--- a/docs/Credara_Pitch_Deck.pptx
+++ b/docs/Credara_Pitch_Deck.pptx
@@ -3283,7 +3283,7 @@
               </a:defRPr>
             </a:pPr>
             <a:r>
-              <a:t>Othniel Obasi  ·  NOVTIA Ltd  ·  credara-jet.vercel.app</a:t>
+              <a:t>Othniel Obasi &amp; Martins Nwanu  ·  NOVTIA Ltd  ·  credara-jet.vercel.app</a:t>
             </a:r>
           </a:p>
         </p:txBody>
@@ -4512,7 +4512,7 @@
               </a:defRPr>
             </a:pPr>
             <a:r>
-              <a:t>Othniel Obasi — Founder, NOVTIA Ltd (London)</a:t>
+              <a:t>Banking operators + engineering leadership — built to win financier trust</a:t>
             </a:r>
           </a:p>
         </p:txBody>
@@ -4681,8 +4681,43 @@
         </p:nvSpPr>
         <p:spPr>
           <a:xfrm>
-            <a:off x="822960" y="2011680"/>
-            <a:ext cx="10515600" cy="4114800"/>
+            <a:off x="822960" y="1874519"/>
+            <a:ext cx="5120640" cy="365760"/>
+          </a:xfrm>
+          <a:prstGeom prst="rect">
+            <a:avLst/>
+          </a:prstGeom>
+          <a:noFill/>
+        </p:spPr>
+        <p:txBody>
+          <a:bodyPr wrap="square">
+            <a:spAutoFit/>
+          </a:bodyPr>
+          <a:lstStyle/>
+          <a:p>
+            <a:pPr algn="l">
+              <a:defRPr sz="1400" b="1">
+                <a:solidFill>
+                  <a:srgbClr val="2563EB"/>
+                </a:solidFill>
+              </a:defRPr>
+            </a:pPr>
+            <a:r>
+              <a:t>Othniel Obasi — Founder, NOVTIA Ltd (London)</a:t>
+            </a:r>
+          </a:p>
+        </p:txBody>
+      </p:sp>
+      <p:sp>
+        <p:nvSpPr>
+          <p:cNvPr id="9" name="TextBox 8"/>
+          <p:cNvSpPr txBox="1"/>
+          <p:nvPr/>
+        </p:nvSpPr>
+        <p:spPr>
+          <a:xfrm>
+            <a:off x="822960" y="2240280"/>
+            <a:ext cx="5120640" cy="3840480"/>
           </a:xfrm>
           <a:prstGeom prst="rect">
             <a:avLst/>
@@ -4697,77 +4732,223 @@
           <a:p>
             <a:pPr>
               <a:spcAft>
-                <a:spcPts val="684"/>
+                <a:spcPts val="603"/>
               </a:spcAft>
-              <a:defRPr sz="1700">
+              <a:defRPr sz="1500">
                 <a:solidFill>
                   <a:srgbClr val="111827"/>
                 </a:solidFill>
               </a:defRPr>
             </a:pPr>
             <a:r>
-              <a:t>Digital banking: Creditville MFBank platform 40K → 100K+ users</a:t>
+              <a:t>Digital banking: Creditville MFBank 40K → 100K+ users</a:t>
             </a:r>
           </a:p>
           <a:p>
             <a:pPr>
               <a:spcAft>
-                <a:spcPts val="684"/>
+                <a:spcPts val="603"/>
               </a:spcAft>
-              <a:defRPr sz="1700">
+              <a:defRPr sz="1500">
                 <a:solidFill>
                   <a:srgbClr val="111827"/>
                 </a:solidFill>
               </a:defRPr>
             </a:pPr>
             <a:r>
-              <a:t>Utilities transformation: PHED — 5M+ customers, $96M+ revenue growth (6 yrs)</a:t>
+              <a:t>Utilities: PHED — 5M+ customers, $96M+ revenue growth</a:t>
             </a:r>
           </a:p>
           <a:p>
             <a:pPr>
               <a:spcAft>
-                <a:spcPts val="684"/>
+                <a:spcPts val="603"/>
               </a:spcAft>
-              <a:defRPr sz="1700">
+              <a:defRPr sz="1500">
                 <a:solidFill>
                   <a:srgbClr val="111827"/>
                 </a:solidFill>
               </a:defRPr>
             </a:pPr>
             <a:r>
-              <a:t>AI governance: AIRG policy engine + SURGE v2 cryptographic receipt chain</a:t>
+              <a:t>AI governance: AIRG + SURGE v2 cryptographic receipt chain</a:t>
             </a:r>
           </a:p>
           <a:p>
             <a:pPr>
               <a:spcAft>
-                <a:spcPts val="684"/>
+                <a:spcPts val="603"/>
               </a:spcAft>
-              <a:defRPr sz="1700">
+              <a:defRPr sz="1500">
                 <a:solidFill>
                   <a:srgbClr val="111827"/>
                 </a:solidFill>
               </a:defRPr>
             </a:pPr>
             <a:r>
-              <a:t>Applied to Credara: evidence-first, fail-closed on-chain settlement</a:t>
-            </a:r>
-          </a:p>
+              <a:t>Credara: evidence-first, fail-closed on-chain settlement</a:t>
+            </a:r>
+          </a:p>
+        </p:txBody>
+      </p:sp>
+      <p:sp>
+        <p:nvSpPr>
+          <p:cNvPr id="10" name="TextBox 9"/>
+          <p:cNvSpPr txBox="1"/>
+          <p:nvPr/>
+        </p:nvSpPr>
+        <p:spPr>
+          <a:xfrm>
+            <a:off x="6309360" y="1874519"/>
+            <a:ext cx="5120640" cy="365760"/>
+          </a:xfrm>
+          <a:prstGeom prst="rect">
+            <a:avLst/>
+          </a:prstGeom>
+          <a:noFill/>
+        </p:spPr>
+        <p:txBody>
+          <a:bodyPr wrap="square">
+            <a:spAutoFit/>
+          </a:bodyPr>
+          <a:lstStyle/>
+          <a:p>
+            <a:pPr algn="l">
+              <a:defRPr sz="1400" b="1">
+                <a:solidFill>
+                  <a:srgbClr val="2563EB"/>
+                </a:solidFill>
+              </a:defRPr>
+            </a:pPr>
+            <a:r>
+              <a:t>Martins Nwanu — Head of IT, Creditville Group</a:t>
+            </a:r>
+          </a:p>
+        </p:txBody>
+      </p:sp>
+      <p:sp>
+        <p:nvSpPr>
+          <p:cNvPr id="11" name="TextBox 10"/>
+          <p:cNvSpPr txBox="1"/>
+          <p:nvPr/>
+        </p:nvSpPr>
+        <p:spPr>
+          <a:xfrm>
+            <a:off x="6309360" y="2240280"/>
+            <a:ext cx="5120640" cy="3840480"/>
+          </a:xfrm>
+          <a:prstGeom prst="rect">
+            <a:avLst/>
+          </a:prstGeom>
+          <a:noFill/>
+        </p:spPr>
+        <p:txBody>
+          <a:bodyPr wrap="square">
+            <a:spAutoFit/>
+          </a:bodyPr>
+          <a:lstStyle/>
           <a:p>
             <a:pPr>
               <a:spcAft>
-                <a:spcPts val="684"/>
+                <a:spcPts val="603"/>
               </a:spcAft>
-              <a:defRPr sz="1700">
+              <a:defRPr sz="1500">
                 <a:solidFill>
                   <a:srgbClr val="111827"/>
                 </a:solidFill>
               </a:defRPr>
             </a:pPr>
             <a:r>
-              <a:t>Portfolio: NorthBridge FraudOps, Kairos on Arc, ProofSource, Autonix — full-stack, tested</a:t>
-            </a:r>
+              <a:t>Led 11-engineer team; core banking &amp; loan platform delivery</a:t>
+            </a:r>
+          </a:p>
+          <a:p>
+            <a:pPr>
+              <a:spcAft>
+                <a:spcPts val="603"/>
+              </a:spcAft>
+              <a:defRPr sz="1500">
+                <a:solidFill>
+                  <a:srgbClr val="111827"/>
+                </a:solidFill>
+              </a:defRPr>
+            </a:pPr>
+            <a:r>
+              <a:t>C Money app: 30K → 100K+ users; CI/CD and Agile at scale</a:t>
+            </a:r>
+          </a:p>
+          <a:p>
+            <a:pPr>
+              <a:spcAft>
+                <a:spcPts val="603"/>
+              </a:spcAft>
+              <a:defRPr sz="1500">
+                <a:solidFill>
+                  <a:srgbClr val="111827"/>
+                </a:solidFill>
+              </a:defRPr>
+            </a:pPr>
+            <a:r>
+              <a:t>Loan disbursement volumes scaled to ₦800M–₦1B/month</a:t>
+            </a:r>
+          </a:p>
+          <a:p>
+            <a:pPr>
+              <a:spcAft>
+                <a:spcPts val="603"/>
+              </a:spcAft>
+              <a:defRPr sz="1500">
+                <a:solidFill>
+                  <a:srgbClr val="111827"/>
+                </a:solidFill>
+              </a:defRPr>
+            </a:pPr>
+            <a:r>
+              <a:t>Credara: enterprise workspace, API, and production deploy rigor</a:t>
+            </a:r>
+          </a:p>
+        </p:txBody>
+      </p:sp>
+      <p:sp>
+        <p:nvSpPr>
+          <p:cNvPr id="12" name="Rectangle 11"/>
+          <p:cNvSpPr/>
+          <p:nvPr/>
+        </p:nvSpPr>
+        <p:spPr>
+          <a:xfrm>
+            <a:off x="6080760" y="1783080"/>
+            <a:ext cx="45720" cy="4389120"/>
+          </a:xfrm>
+          <a:prstGeom prst="rect">
+            <a:avLst/>
+          </a:prstGeom>
+          <a:solidFill>
+            <a:srgbClr val="E7EAF1"/>
+          </a:solidFill>
+          <a:ln>
+            <a:noFill/>
+          </a:ln>
+        </p:spPr>
+        <p:style>
+          <a:lnRef idx="1">
+            <a:schemeClr val="accent1"/>
+          </a:lnRef>
+          <a:fillRef idx="3">
+            <a:schemeClr val="accent1"/>
+          </a:fillRef>
+          <a:effectRef idx="2">
+            <a:schemeClr val="accent1"/>
+          </a:effectRef>
+          <a:fontRef idx="minor">
+            <a:schemeClr val="lt1"/>
+          </a:fontRef>
+        </p:style>
+        <p:txBody>
+          <a:bodyPr rtlCol="0" anchor="ctr"/>
+          <a:lstStyle/>
+          <a:p>
+            <a:pPr algn="ctr"/>
           </a:p>
         </p:txBody>
       </p:sp>

--- a/docs/Credara_Pitch_Deck.pptx
+++ b/docs/Credara_Pitch_Deck.pptx
@@ -19,6 +19,8 @@
     <p:sldId id="267" r:id="rId18"/>
     <p:sldId id="268" r:id="rId19"/>
     <p:sldId id="269" r:id="rId20"/>
+    <p:sldId id="270" r:id="rId21"/>
+    <p:sldId id="271" r:id="rId22"/>
   </p:sldIdLst>
   <p:sldSz cx="12191695" cy="6858000" type="screen4x3"/>
   <p:notesSz cx="6858000" cy="9144000"/>
@@ -3457,7 +3459,7 @@
               </a:defRPr>
             </a:pPr>
             <a:r>
-              <a:t>GO-TO-MARKET</a:t>
+              <a:t>ARCHITECTURE</a:t>
             </a:r>
           </a:p>
         </p:txBody>
@@ -3492,7 +3494,7 @@
               </a:defRPr>
             </a:pPr>
             <a:r>
-              <a:t>Pilot one corridor, then expand</a:t>
+              <a:t>Monorepo: web · API · workers · contracts</a:t>
             </a:r>
           </a:p>
         </p:txBody>
@@ -3661,8 +3663,8 @@
         </p:nvSpPr>
         <p:spPr>
           <a:xfrm>
-            <a:off x="822960" y="2011680"/>
-            <a:ext cx="5303520" cy="4114800"/>
+            <a:off x="822960" y="1828800"/>
+            <a:ext cx="5029200" cy="4114800"/>
           </a:xfrm>
           <a:prstGeom prst="rect">
             <a:avLst/>
@@ -3677,61 +3679,61 @@
           <a:p>
             <a:pPr>
               <a:spcAft>
-                <a:spcPts val="684"/>
+                <a:spcPts val="644"/>
               </a:spcAft>
-              <a:defRPr sz="1700">
+              <a:defRPr sz="1600">
                 <a:solidFill>
                   <a:srgbClr val="111827"/>
                 </a:solidFill>
               </a:defRPr>
             </a:pPr>
             <a:r>
-              <a:t>Target: UAE SMEs, buyers, financiers — Jebel Ali supply chains</a:t>
+              <a:t>apps/web — Next.js enterprise dashboard</a:t>
             </a:r>
           </a:p>
           <a:p>
             <a:pPr>
               <a:spcAft>
-                <a:spcPts val="684"/>
+                <a:spcPts val="644"/>
               </a:spcAft>
-              <a:defRPr sz="1700">
+              <a:defRPr sz="1600">
                 <a:solidFill>
                   <a:srgbClr val="111827"/>
                 </a:solidFill>
               </a:defRPr>
             </a:pPr>
             <a:r>
-              <a:t>Land financiers first — verified receivables pull SME supply</a:t>
+              <a:t>apps/api — FastAPI, Postgres, JWT, Auth0</a:t>
             </a:r>
           </a:p>
           <a:p>
             <a:pPr>
               <a:spcAft>
-                <a:spcPts val="684"/>
+                <a:spcPts val="644"/>
               </a:spcAft>
-              <a:defRPr sz="1700">
+              <a:defRPr sz="1600">
                 <a:solidFill>
                   <a:srgbClr val="111827"/>
                 </a:solidFill>
               </a:defRPr>
             </a:pPr>
             <a:r>
-              <a:t>DIFC ecosystem: 5,000+ VCs, 289 banks, 400+ mentors for pilot cohort</a:t>
+              <a:t>apps/workers — relayer, indexer, scoring</a:t>
             </a:r>
           </a:p>
           <a:p>
             <a:pPr>
               <a:spcAft>
-                <a:spcPts val="684"/>
+                <a:spcPts val="644"/>
               </a:spcAft>
-              <a:defRPr sz="1700">
+              <a:defRPr sz="1600">
                 <a:solidFill>
                   <a:srgbClr val="111827"/>
                 </a:solidFill>
               </a:defRPr>
             </a:pPr>
             <a:r>
-              <a:t>Prove 7–10 day LC friction → same-day proof-to-funding</a:t>
+              <a:t>contracts — Solidity 0.8.28, Amoy / PoS-ready</a:t>
             </a:r>
           </a:p>
         </p:txBody>
@@ -3744,43 +3746,8 @@
         </p:nvSpPr>
         <p:spPr>
           <a:xfrm>
-            <a:off x="6583680" y="1828800"/>
-            <a:ext cx="5029200" cy="457200"/>
-          </a:xfrm>
-          <a:prstGeom prst="rect">
-            <a:avLst/>
-          </a:prstGeom>
-          <a:noFill/>
-        </p:spPr>
-        <p:txBody>
-          <a:bodyPr wrap="square">
-            <a:spAutoFit/>
-          </a:bodyPr>
-          <a:lstStyle/>
-          <a:p>
-            <a:pPr algn="l">
-              <a:defRPr sz="1400" b="1">
-                <a:solidFill>
-                  <a:srgbClr val="2563EB"/>
-                </a:solidFill>
-              </a:defRPr>
-            </a:pPr>
-            <a:r>
-              <a:t>Roadmap</a:t>
-            </a:r>
-          </a:p>
-        </p:txBody>
-      </p:sp>
-      <p:sp>
-        <p:nvSpPr>
-          <p:cNvPr id="10" name="TextBox 9"/>
-          <p:cNvSpPr txBox="1"/>
-          <p:nvPr/>
-        </p:nvSpPr>
-        <p:spPr>
-          <a:xfrm>
-            <a:off x="6583680" y="2286000"/>
-            <a:ext cx="5029200" cy="3657600"/>
+            <a:off x="6217920" y="1828800"/>
+            <a:ext cx="5303520" cy="4114800"/>
           </a:xfrm>
           <a:prstGeom prst="rect">
             <a:avLst/>
@@ -3795,62 +3762,120 @@
           <a:p>
             <a:pPr>
               <a:spcAft>
-                <a:spcPts val="603"/>
+                <a:spcPts val="644"/>
               </a:spcAft>
-              <a:defRPr sz="1500">
-                <a:solidFill>
-                  <a:srgbClr val="667085"/>
-                </a:solidFill>
-              </a:defRPr>
-            </a:pPr>
-            <a:r>
-              <a:t>Now: Amoy demo + Judge Mode (shipped)</a:t>
+              <a:defRPr sz="1600">
+                <a:solidFill>
+                  <a:srgbClr val="111827"/>
+                </a:solidFill>
+              </a:defRPr>
+            </a:pPr>
+            <a:r>
+              <a:t>ProofRegistry — anchor proof hashes</a:t>
             </a:r>
           </a:p>
           <a:p>
             <a:pPr>
               <a:spcAft>
-                <a:spcPts val="603"/>
+                <a:spcPts val="644"/>
               </a:spcAft>
-              <a:defRPr sz="1500">
-                <a:solidFill>
-                  <a:srgbClr val="667085"/>
-                </a:solidFill>
-              </a:defRPr>
-            </a:pPr>
-            <a:r>
-              <a:t>Near-term: Didit KYB prod, Solidity audit</a:t>
+              <a:defRPr sz="1600">
+                <a:solidFill>
+                  <a:srgbClr val="111827"/>
+                </a:solidFill>
+              </a:defRPr>
+            </a:pPr>
+            <a:r>
+              <a:t>ReceivableRegistry — finance-ready state</a:t>
             </a:r>
           </a:p>
           <a:p>
             <a:pPr>
               <a:spcAft>
-                <a:spcPts val="603"/>
+                <a:spcPts val="644"/>
               </a:spcAft>
-              <a:defRPr sz="1500">
-                <a:solidFill>
-                  <a:srgbClr val="667085"/>
-                </a:solidFill>
-              </a:defRPr>
-            </a:pPr>
-            <a:r>
-              <a:t>Phase 2: AED stablecoin partner</a:t>
+              <a:defRPr sz="1600">
+                <a:solidFill>
+                  <a:srgbClr val="111827"/>
+                </a:solidFill>
+              </a:defRPr>
+            </a:pPr>
+            <a:r>
+              <a:t>SmartLCFactory / SmartLC — escrow lifecycle</a:t>
             </a:r>
           </a:p>
           <a:p>
             <a:pPr>
               <a:spcAft>
-                <a:spcPts val="603"/>
+                <a:spcPts val="644"/>
               </a:spcAft>
-              <a:defRPr sz="1500">
-                <a:solidFill>
-                  <a:srgbClr val="667085"/>
-                </a:solidFill>
-              </a:defRPr>
-            </a:pPr>
-            <a:r>
-              <a:t>Phase 3: Mainnet + API ecosystem</a:t>
-            </a:r>
+              <a:defRPr sz="1600">
+                <a:solidFill>
+                  <a:srgbClr val="111827"/>
+                </a:solidFill>
+              </a:defRPr>
+            </a:pPr>
+            <a:r>
+              <a:t>CreditScoreAttestation — trade credit on-chain</a:t>
+            </a:r>
+          </a:p>
+          <a:p>
+            <a:pPr>
+              <a:spcAft>
+                <a:spcPts val="644"/>
+              </a:spcAft>
+              <a:defRPr sz="1600">
+                <a:solidFill>
+                  <a:srgbClr val="111827"/>
+                </a:solidFill>
+              </a:defRPr>
+            </a:pPr>
+            <a:r>
+              <a:t>MockUSDC — demo settlement (IERC20-agnostic)</a:t>
+            </a:r>
+          </a:p>
+        </p:txBody>
+      </p:sp>
+      <p:sp>
+        <p:nvSpPr>
+          <p:cNvPr id="10" name="Rectangle 9"/>
+          <p:cNvSpPr/>
+          <p:nvPr/>
+        </p:nvSpPr>
+        <p:spPr>
+          <a:xfrm>
+            <a:off x="5943600" y="1691640"/>
+            <a:ext cx="45720" cy="4389120"/>
+          </a:xfrm>
+          <a:prstGeom prst="rect">
+            <a:avLst/>
+          </a:prstGeom>
+          <a:solidFill>
+            <a:srgbClr val="E7EAF1"/>
+          </a:solidFill>
+          <a:ln>
+            <a:noFill/>
+          </a:ln>
+        </p:spPr>
+        <p:style>
+          <a:lnRef idx="1">
+            <a:schemeClr val="accent1"/>
+          </a:lnRef>
+          <a:fillRef idx="3">
+            <a:schemeClr val="accent1"/>
+          </a:fillRef>
+          <a:effectRef idx="2">
+            <a:schemeClr val="accent1"/>
+          </a:effectRef>
+          <a:fontRef idx="minor">
+            <a:schemeClr val="lt1"/>
+          </a:fontRef>
+        </p:style>
+        <p:txBody>
+          <a:bodyPr rtlCol="0" anchor="ctr"/>
+          <a:lstStyle/>
+          <a:p>
+            <a:pPr algn="ctr"/>
           </a:p>
         </p:txBody>
       </p:sp>
@@ -3868,7 +3893,7 @@
     <p:bg>
       <p:bgPr>
         <a:solidFill>
-          <a:srgbClr val="FFFFFF"/>
+          <a:srgbClr val="F8FAFC"/>
         </a:solidFill>
         <a:effectLst/>
       </p:bgPr>
@@ -3888,8 +3913,8 @@
         </p:nvSpPr>
         <p:spPr>
           <a:xfrm>
-            <a:off x="640080" y="411480"/>
-            <a:ext cx="10515600" cy="457200"/>
+            <a:off x="822960" y="548640"/>
+            <a:ext cx="10058400" cy="365760"/>
           </a:xfrm>
           <a:prstGeom prst="rect">
             <a:avLst/>
@@ -3910,7 +3935,7 @@
               </a:defRPr>
             </a:pPr>
             <a:r>
-              <a:t>BUSINESS MODEL</a:t>
+              <a:t>SETTLEMENT ROADMAP</a:t>
             </a:r>
           </a:p>
         </p:txBody>
@@ -3923,8 +3948,8 @@
         </p:nvSpPr>
         <p:spPr>
           <a:xfrm>
-            <a:off x="640080" y="777240"/>
-            <a:ext cx="10515600" cy="1097280"/>
+            <a:off x="822960" y="1005840"/>
+            <a:ext cx="10058400" cy="1280160"/>
           </a:xfrm>
           <a:prstGeom prst="rect">
             <a:avLst/>
@@ -3938,58 +3963,102 @@
           <a:lstStyle/>
           <a:p>
             <a:pPr algn="l">
-              <a:defRPr sz="3200" b="1">
+              <a:defRPr sz="3000" b="1">
                 <a:solidFill>
                   <a:srgbClr val="111827"/>
                 </a:solidFill>
               </a:defRPr>
             </a:pPr>
             <a:r>
-              <a:t>Infrastructure economics — multiple revenue lines</a:t>
-            </a:r>
-          </a:p>
-        </p:txBody>
-      </p:sp>
-      <p:sp>
-        <p:nvSpPr>
-          <p:cNvPr id="4" name="Rectangle 3"/>
-          <p:cNvSpPr/>
-          <p:nvPr/>
-        </p:nvSpPr>
-        <p:spPr>
-          <a:xfrm>
-            <a:off x="640080" y="1600200"/>
-            <a:ext cx="1097280" cy="54864"/>
-          </a:xfrm>
-          <a:prstGeom prst="rect">
-            <a:avLst/>
-          </a:prstGeom>
-          <a:solidFill>
-            <a:srgbClr val="2563EB"/>
-          </a:solidFill>
-          <a:ln>
-            <a:noFill/>
-          </a:ln>
-        </p:spPr>
-        <p:style>
-          <a:lnRef idx="1">
-            <a:schemeClr val="accent1"/>
-          </a:lnRef>
-          <a:fillRef idx="3">
-            <a:schemeClr val="accent1"/>
-          </a:fillRef>
-          <a:effectRef idx="2">
-            <a:schemeClr val="accent1"/>
-          </a:effectRef>
-          <a:fontRef idx="minor">
-            <a:schemeClr val="lt1"/>
-          </a:fontRef>
-        </p:style>
-        <p:txBody>
-          <a:bodyPr rtlCol="0" anchor="ctr"/>
-          <a:lstStyle/>
-          <a:p>
-            <a:pPr algn="ctr"/>
+              <a:t>Today: MockUSDC on Amoy.</a:t>
+            </a:r>
+            <a:br/>
+            <a:r>
+              <a:t>Tomorrow: regulated AED stablecoin — same Smart LC rails.</a:t>
+            </a:r>
+          </a:p>
+        </p:txBody>
+      </p:sp>
+      <p:sp>
+        <p:nvSpPr>
+          <p:cNvPr id="4" name="TextBox 3"/>
+          <p:cNvSpPr txBox="1"/>
+          <p:nvPr/>
+        </p:nvSpPr>
+        <p:spPr>
+          <a:xfrm>
+            <a:off x="822960" y="2743200"/>
+            <a:ext cx="10058400" cy="3200400"/>
+          </a:xfrm>
+          <a:prstGeom prst="rect">
+            <a:avLst/>
+          </a:prstGeom>
+          <a:noFill/>
+        </p:spPr>
+        <p:txBody>
+          <a:bodyPr wrap="square">
+            <a:spAutoFit/>
+          </a:bodyPr>
+          <a:lstStyle/>
+          <a:p>
+            <a:pPr>
+              <a:spcAft>
+                <a:spcPts val="684"/>
+              </a:spcAft>
+              <a:defRPr sz="1700">
+                <a:solidFill>
+                  <a:srgbClr val="111827"/>
+                </a:solidFill>
+              </a:defRPr>
+            </a:pPr>
+            <a:r>
+              <a:t>Demo proves create → fund → verify → release without claiming AED issuance</a:t>
+            </a:r>
+          </a:p>
+          <a:p>
+            <a:pPr>
+              <a:spcAft>
+                <a:spcPts val="684"/>
+              </a:spcAft>
+              <a:defRPr sz="1700">
+                <a:solidFill>
+                  <a:srgbClr val="111827"/>
+                </a:solidFill>
+              </a:defRPr>
+            </a:pPr>
+            <a:r>
+              <a:t>UAE CBUAE PTSR: regulated AED stablecoin partner — same Smart LC rails</a:t>
+            </a:r>
+          </a:p>
+          <a:p>
+            <a:pPr>
+              <a:spcAft>
+                <a:spcPts val="684"/>
+              </a:spcAft>
+              <a:defRPr sz="1700">
+                <a:solidFill>
+                  <a:srgbClr val="111827"/>
+                </a:solidFill>
+              </a:defRPr>
+            </a:pPr>
+            <a:r>
+              <a:t>Smart LC is token-agnostic — factory and proof conditions unchanged</a:t>
+            </a:r>
+          </a:p>
+          <a:p>
+            <a:pPr>
+              <a:spcAft>
+                <a:spcPts val="684"/>
+              </a:spcAft>
+              <a:defRPr sz="1700">
+                <a:solidFill>
+                  <a:srgbClr val="111827"/>
+                </a:solidFill>
+              </a:defRPr>
+            </a:pPr>
+            <a:r>
+              <a:t>Do say: settlement-ready · Don't say: we issue AED or we are remittance</a:t>
+            </a:r>
           </a:p>
         </p:txBody>
       </p:sp>
@@ -4102,321 +4171,6 @@
             </a:pPr>
             <a:r>
               <a:t>credara-jet.vercel.app</a:t>
-            </a:r>
-          </a:p>
-        </p:txBody>
-      </p:sp>
-      <p:sp>
-        <p:nvSpPr>
-          <p:cNvPr id="8" name="TextBox 7"/>
-          <p:cNvSpPr txBox="1"/>
-          <p:nvPr/>
-        </p:nvSpPr>
-        <p:spPr>
-          <a:xfrm>
-            <a:off x="822960" y="2011680"/>
-            <a:ext cx="2926080" cy="365760"/>
-          </a:xfrm>
-          <a:prstGeom prst="rect">
-            <a:avLst/>
-          </a:prstGeom>
-          <a:noFill/>
-        </p:spPr>
-        <p:txBody>
-          <a:bodyPr wrap="square">
-            <a:spAutoFit/>
-          </a:bodyPr>
-          <a:lstStyle/>
-          <a:p>
-            <a:pPr algn="l">
-              <a:defRPr sz="1600" b="1">
-                <a:solidFill>
-                  <a:srgbClr val="2563EB"/>
-                </a:solidFill>
-              </a:defRPr>
-            </a:pPr>
-            <a:r>
-              <a:t>Origination fee</a:t>
-            </a:r>
-          </a:p>
-        </p:txBody>
-      </p:sp>
-      <p:sp>
-        <p:nvSpPr>
-          <p:cNvPr id="9" name="TextBox 8"/>
-          <p:cNvSpPr txBox="1"/>
-          <p:nvPr/>
-        </p:nvSpPr>
-        <p:spPr>
-          <a:xfrm>
-            <a:off x="3840480" y="2011680"/>
-            <a:ext cx="7589520" cy="457200"/>
-          </a:xfrm>
-          <a:prstGeom prst="rect">
-            <a:avLst/>
-          </a:prstGeom>
-          <a:noFill/>
-        </p:spPr>
-        <p:txBody>
-          <a:bodyPr wrap="square">
-            <a:spAutoFit/>
-          </a:bodyPr>
-          <a:lstStyle/>
-          <a:p>
-            <a:pPr algn="l">
-              <a:defRPr sz="1600" b="0">
-                <a:solidFill>
-                  <a:srgbClr val="111827"/>
-                </a:solidFill>
-              </a:defRPr>
-            </a:pPr>
-            <a:r>
-              <a:t>Per receivable financed via Smart LC marketplace</a:t>
-            </a:r>
-          </a:p>
-        </p:txBody>
-      </p:sp>
-      <p:sp>
-        <p:nvSpPr>
-          <p:cNvPr id="10" name="TextBox 9"/>
-          <p:cNvSpPr txBox="1"/>
-          <p:nvPr/>
-        </p:nvSpPr>
-        <p:spPr>
-          <a:xfrm>
-            <a:off x="822960" y="2788920"/>
-            <a:ext cx="2926080" cy="365760"/>
-          </a:xfrm>
-          <a:prstGeom prst="rect">
-            <a:avLst/>
-          </a:prstGeom>
-          <a:noFill/>
-        </p:spPr>
-        <p:txBody>
-          <a:bodyPr wrap="square">
-            <a:spAutoFit/>
-          </a:bodyPr>
-          <a:lstStyle/>
-          <a:p>
-            <a:pPr algn="l">
-              <a:defRPr sz="1600" b="1">
-                <a:solidFill>
-                  <a:srgbClr val="2563EB"/>
-                </a:solidFill>
-              </a:defRPr>
-            </a:pPr>
-            <a:r>
-              <a:t>Platform / SaaS</a:t>
-            </a:r>
-          </a:p>
-        </p:txBody>
-      </p:sp>
-      <p:sp>
-        <p:nvSpPr>
-          <p:cNvPr id="11" name="TextBox 10"/>
-          <p:cNvSpPr txBox="1"/>
-          <p:nvPr/>
-        </p:nvSpPr>
-        <p:spPr>
-          <a:xfrm>
-            <a:off x="3840480" y="2788920"/>
-            <a:ext cx="7589520" cy="457200"/>
-          </a:xfrm>
-          <a:prstGeom prst="rect">
-            <a:avLst/>
-          </a:prstGeom>
-          <a:noFill/>
-        </p:spPr>
-        <p:txBody>
-          <a:bodyPr wrap="square">
-            <a:spAutoFit/>
-          </a:bodyPr>
-          <a:lstStyle/>
-          <a:p>
-            <a:pPr algn="l">
-              <a:defRPr sz="1600" b="0">
-                <a:solidFill>
-                  <a:srgbClr val="111827"/>
-                </a:solidFill>
-              </a:defRPr>
-            </a:pPr>
-            <a:r>
-              <a:t>Verification, deal room, reporting — tiered by volume</a:t>
-            </a:r>
-          </a:p>
-        </p:txBody>
-      </p:sp>
-      <p:sp>
-        <p:nvSpPr>
-          <p:cNvPr id="12" name="TextBox 11"/>
-          <p:cNvSpPr txBox="1"/>
-          <p:nvPr/>
-        </p:nvSpPr>
-        <p:spPr>
-          <a:xfrm>
-            <a:off x="822960" y="3566160"/>
-            <a:ext cx="2926080" cy="365760"/>
-          </a:xfrm>
-          <a:prstGeom prst="rect">
-            <a:avLst/>
-          </a:prstGeom>
-          <a:noFill/>
-        </p:spPr>
-        <p:txBody>
-          <a:bodyPr wrap="square">
-            <a:spAutoFit/>
-          </a:bodyPr>
-          <a:lstStyle/>
-          <a:p>
-            <a:pPr algn="l">
-              <a:defRPr sz="1600" b="1">
-                <a:solidFill>
-                  <a:srgbClr val="2563EB"/>
-                </a:solidFill>
-              </a:defRPr>
-            </a:pPr>
-            <a:r>
-              <a:t>Settlement fee</a:t>
-            </a:r>
-          </a:p>
-        </p:txBody>
-      </p:sp>
-      <p:sp>
-        <p:nvSpPr>
-          <p:cNvPr id="13" name="TextBox 12"/>
-          <p:cNvSpPr txBox="1"/>
-          <p:nvPr/>
-        </p:nvSpPr>
-        <p:spPr>
-          <a:xfrm>
-            <a:off x="3840480" y="3566160"/>
-            <a:ext cx="7589520" cy="457200"/>
-          </a:xfrm>
-          <a:prstGeom prst="rect">
-            <a:avLst/>
-          </a:prstGeom>
-          <a:noFill/>
-        </p:spPr>
-        <p:txBody>
-          <a:bodyPr wrap="square">
-            <a:spAutoFit/>
-          </a:bodyPr>
-          <a:lstStyle/>
-          <a:p>
-            <a:pPr algn="l">
-              <a:defRPr sz="1600" b="0">
-                <a:solidFill>
-                  <a:srgbClr val="111827"/>
-                </a:solidFill>
-              </a:defRPr>
-            </a:pPr>
-            <a:r>
-              <a:t>Basis points per LC fund/release vs. days of bank LC</a:t>
-            </a:r>
-          </a:p>
-        </p:txBody>
-      </p:sp>
-      <p:sp>
-        <p:nvSpPr>
-          <p:cNvPr id="14" name="TextBox 13"/>
-          <p:cNvSpPr txBox="1"/>
-          <p:nvPr/>
-        </p:nvSpPr>
-        <p:spPr>
-          <a:xfrm>
-            <a:off x="822960" y="4343400"/>
-            <a:ext cx="2926080" cy="365760"/>
-          </a:xfrm>
-          <a:prstGeom prst="rect">
-            <a:avLst/>
-          </a:prstGeom>
-          <a:noFill/>
-        </p:spPr>
-        <p:txBody>
-          <a:bodyPr wrap="square">
-            <a:spAutoFit/>
-          </a:bodyPr>
-          <a:lstStyle/>
-          <a:p>
-            <a:pPr algn="l">
-              <a:defRPr sz="1600" b="1">
-                <a:solidFill>
-                  <a:srgbClr val="2563EB"/>
-                </a:solidFill>
-              </a:defRPr>
-            </a:pPr>
-            <a:r>
-              <a:t>Credit scoring API</a:t>
-            </a:r>
-          </a:p>
-        </p:txBody>
-      </p:sp>
-      <p:sp>
-        <p:nvSpPr>
-          <p:cNvPr id="15" name="TextBox 14"/>
-          <p:cNvSpPr txBox="1"/>
-          <p:nvPr/>
-        </p:nvSpPr>
-        <p:spPr>
-          <a:xfrm>
-            <a:off x="3840480" y="4343400"/>
-            <a:ext cx="7589520" cy="457200"/>
-          </a:xfrm>
-          <a:prstGeom prst="rect">
-            <a:avLst/>
-          </a:prstGeom>
-          <a:noFill/>
-        </p:spPr>
-        <p:txBody>
-          <a:bodyPr wrap="square">
-            <a:spAutoFit/>
-          </a:bodyPr>
-          <a:lstStyle/>
-          <a:p>
-            <a:pPr algn="l">
-              <a:defRPr sz="1600" b="0">
-                <a:solidFill>
-                  <a:srgbClr val="111827"/>
-                </a:solidFill>
-              </a:defRPr>
-            </a:pPr>
-            <a:r>
-              <a:t>Attestations for external lenders without full workspace</a:t>
-            </a:r>
-          </a:p>
-        </p:txBody>
-      </p:sp>
-      <p:sp>
-        <p:nvSpPr>
-          <p:cNvPr id="16" name="TextBox 15"/>
-          <p:cNvSpPr txBox="1"/>
-          <p:nvPr/>
-        </p:nvSpPr>
-        <p:spPr>
-          <a:xfrm>
-            <a:off x="822960" y="5303520"/>
-            <a:ext cx="10058400" cy="548640"/>
-          </a:xfrm>
-          <a:prstGeom prst="rect">
-            <a:avLst/>
-          </a:prstGeom>
-          <a:noFill/>
-        </p:spPr>
-        <p:txBody>
-          <a:bodyPr wrap="square">
-            <a:spAutoFit/>
-          </a:bodyPr>
-          <a:lstStyle/>
-          <a:p>
-            <a:pPr algn="l">
-              <a:defRPr sz="1400" b="0">
-                <a:solidFill>
-                  <a:srgbClr val="667085"/>
-                </a:solidFill>
-              </a:defRPr>
-            </a:pPr>
-            <a:r>
-              <a:t>API-first: third parties integrate proof, receivable, and LC rails without Credara UI.</a:t>
             </a:r>
           </a:p>
         </p:txBody>
@@ -4477,7 +4231,7 @@
               </a:defRPr>
             </a:pPr>
             <a:r>
-              <a:t>TEAM</a:t>
+              <a:t>GO-TO-MARKET</a:t>
             </a:r>
           </a:p>
         </p:txBody>
@@ -4512,7 +4266,7 @@
               </a:defRPr>
             </a:pPr>
             <a:r>
-              <a:t>Banking operators + engineering leadership — built to win financier trust</a:t>
+              <a:t>Pilot one corridor, then expand</a:t>
             </a:r>
           </a:p>
         </p:txBody>
@@ -4681,8 +4435,91 @@
         </p:nvSpPr>
         <p:spPr>
           <a:xfrm>
-            <a:off x="822960" y="1874519"/>
-            <a:ext cx="5120640" cy="365760"/>
+            <a:off x="822960" y="2011680"/>
+            <a:ext cx="5303520" cy="4114800"/>
+          </a:xfrm>
+          <a:prstGeom prst="rect">
+            <a:avLst/>
+          </a:prstGeom>
+          <a:noFill/>
+        </p:spPr>
+        <p:txBody>
+          <a:bodyPr wrap="square">
+            <a:spAutoFit/>
+          </a:bodyPr>
+          <a:lstStyle/>
+          <a:p>
+            <a:pPr>
+              <a:spcAft>
+                <a:spcPts val="684"/>
+              </a:spcAft>
+              <a:defRPr sz="1700">
+                <a:solidFill>
+                  <a:srgbClr val="111827"/>
+                </a:solidFill>
+              </a:defRPr>
+            </a:pPr>
+            <a:r>
+              <a:t>Target: UAE SMEs, buyers, financiers — Jebel Ali supply chains</a:t>
+            </a:r>
+          </a:p>
+          <a:p>
+            <a:pPr>
+              <a:spcAft>
+                <a:spcPts val="684"/>
+              </a:spcAft>
+              <a:defRPr sz="1700">
+                <a:solidFill>
+                  <a:srgbClr val="111827"/>
+                </a:solidFill>
+              </a:defRPr>
+            </a:pPr>
+            <a:r>
+              <a:t>Land financiers first — verified receivables pull SME supply</a:t>
+            </a:r>
+          </a:p>
+          <a:p>
+            <a:pPr>
+              <a:spcAft>
+                <a:spcPts val="684"/>
+              </a:spcAft>
+              <a:defRPr sz="1700">
+                <a:solidFill>
+                  <a:srgbClr val="111827"/>
+                </a:solidFill>
+              </a:defRPr>
+            </a:pPr>
+            <a:r>
+              <a:t>DIFC ecosystem: 5,000+ VCs, 289 banks, 400+ mentors for pilot cohort</a:t>
+            </a:r>
+          </a:p>
+          <a:p>
+            <a:pPr>
+              <a:spcAft>
+                <a:spcPts val="684"/>
+              </a:spcAft>
+              <a:defRPr sz="1700">
+                <a:solidFill>
+                  <a:srgbClr val="111827"/>
+                </a:solidFill>
+              </a:defRPr>
+            </a:pPr>
+            <a:r>
+              <a:t>Prove 7–10 day LC friction → same-day proof-to-funding</a:t>
+            </a:r>
+          </a:p>
+        </p:txBody>
+      </p:sp>
+      <p:sp>
+        <p:nvSpPr>
+          <p:cNvPr id="9" name="TextBox 8"/>
+          <p:cNvSpPr txBox="1"/>
+          <p:nvPr/>
+        </p:nvSpPr>
+        <p:spPr>
+          <a:xfrm>
+            <a:off x="6583680" y="1828800"/>
+            <a:ext cx="5029200" cy="457200"/>
           </a:xfrm>
           <a:prstGeom prst="rect">
             <a:avLst/>
@@ -4703,21 +4540,21 @@
               </a:defRPr>
             </a:pPr>
             <a:r>
-              <a:t>Othniel Obasi — Founder, NOVTIA Ltd (London)</a:t>
-            </a:r>
-          </a:p>
-        </p:txBody>
-      </p:sp>
-      <p:sp>
-        <p:nvSpPr>
-          <p:cNvPr id="9" name="TextBox 8"/>
-          <p:cNvSpPr txBox="1"/>
-          <p:nvPr/>
-        </p:nvSpPr>
-        <p:spPr>
-          <a:xfrm>
-            <a:off x="822960" y="2240280"/>
-            <a:ext cx="5120640" cy="3840480"/>
+              <a:t>Roadmap</a:t>
+            </a:r>
+          </a:p>
+        </p:txBody>
+      </p:sp>
+      <p:sp>
+        <p:nvSpPr>
+          <p:cNvPr id="10" name="TextBox 9"/>
+          <p:cNvSpPr txBox="1"/>
+          <p:nvPr/>
+        </p:nvSpPr>
+        <p:spPr>
+          <a:xfrm>
+            <a:off x="6583680" y="2286000"/>
+            <a:ext cx="5029200" cy="3657600"/>
           </a:xfrm>
           <a:prstGeom prst="rect">
             <a:avLst/>
@@ -4736,12 +4573,12 @@
               </a:spcAft>
               <a:defRPr sz="1500">
                 <a:solidFill>
-                  <a:srgbClr val="111827"/>
-                </a:solidFill>
-              </a:defRPr>
-            </a:pPr>
-            <a:r>
-              <a:t>Digital banking: Creditville MFBank 40K → 100K+ users</a:t>
+                  <a:srgbClr val="667085"/>
+                </a:solidFill>
+              </a:defRPr>
+            </a:pPr>
+            <a:r>
+              <a:t>Now: Amoy demo + Judge Mode (shipped)</a:t>
             </a:r>
           </a:p>
           <a:p>
@@ -4751,12 +4588,12 @@
               </a:spcAft>
               <a:defRPr sz="1500">
                 <a:solidFill>
-                  <a:srgbClr val="111827"/>
-                </a:solidFill>
-              </a:defRPr>
-            </a:pPr>
-            <a:r>
-              <a:t>Utilities: PHED — 5M+ customers, $96M+ revenue growth</a:t>
+                  <a:srgbClr val="667085"/>
+                </a:solidFill>
+              </a:defRPr>
+            </a:pPr>
+            <a:r>
+              <a:t>Near-term: Didit KYB prod, Solidity audit</a:t>
             </a:r>
           </a:p>
           <a:p>
@@ -4766,12 +4603,12 @@
               </a:spcAft>
               <a:defRPr sz="1500">
                 <a:solidFill>
-                  <a:srgbClr val="111827"/>
-                </a:solidFill>
-              </a:defRPr>
-            </a:pPr>
-            <a:r>
-              <a:t>AI governance: AIRG + SURGE v2 cryptographic receipt chain</a:t>
+                  <a:srgbClr val="667085"/>
+                </a:solidFill>
+              </a:defRPr>
+            </a:pPr>
+            <a:r>
+              <a:t>Phase 2: AED stablecoin partner</a:t>
             </a:r>
           </a:p>
           <a:p>
@@ -4781,174 +4618,13 @@
               </a:spcAft>
               <a:defRPr sz="1500">
                 <a:solidFill>
-                  <a:srgbClr val="111827"/>
-                </a:solidFill>
-              </a:defRPr>
-            </a:pPr>
-            <a:r>
-              <a:t>Credara: evidence-first, fail-closed on-chain settlement</a:t>
-            </a:r>
-          </a:p>
-        </p:txBody>
-      </p:sp>
-      <p:sp>
-        <p:nvSpPr>
-          <p:cNvPr id="10" name="TextBox 9"/>
-          <p:cNvSpPr txBox="1"/>
-          <p:nvPr/>
-        </p:nvSpPr>
-        <p:spPr>
-          <a:xfrm>
-            <a:off x="6309360" y="1874519"/>
-            <a:ext cx="5120640" cy="365760"/>
-          </a:xfrm>
-          <a:prstGeom prst="rect">
-            <a:avLst/>
-          </a:prstGeom>
-          <a:noFill/>
-        </p:spPr>
-        <p:txBody>
-          <a:bodyPr wrap="square">
-            <a:spAutoFit/>
-          </a:bodyPr>
-          <a:lstStyle/>
-          <a:p>
-            <a:pPr algn="l">
-              <a:defRPr sz="1400" b="1">
-                <a:solidFill>
-                  <a:srgbClr val="2563EB"/>
-                </a:solidFill>
-              </a:defRPr>
-            </a:pPr>
-            <a:r>
-              <a:t>Martins Nwanu — Head of IT, Creditville Group</a:t>
-            </a:r>
-          </a:p>
-        </p:txBody>
-      </p:sp>
-      <p:sp>
-        <p:nvSpPr>
-          <p:cNvPr id="11" name="TextBox 10"/>
-          <p:cNvSpPr txBox="1"/>
-          <p:nvPr/>
-        </p:nvSpPr>
-        <p:spPr>
-          <a:xfrm>
-            <a:off x="6309360" y="2240280"/>
-            <a:ext cx="5120640" cy="3840480"/>
-          </a:xfrm>
-          <a:prstGeom prst="rect">
-            <a:avLst/>
-          </a:prstGeom>
-          <a:noFill/>
-        </p:spPr>
-        <p:txBody>
-          <a:bodyPr wrap="square">
-            <a:spAutoFit/>
-          </a:bodyPr>
-          <a:lstStyle/>
-          <a:p>
-            <a:pPr>
-              <a:spcAft>
-                <a:spcPts val="603"/>
-              </a:spcAft>
-              <a:defRPr sz="1500">
-                <a:solidFill>
-                  <a:srgbClr val="111827"/>
-                </a:solidFill>
-              </a:defRPr>
-            </a:pPr>
-            <a:r>
-              <a:t>Led 11-engineer team; core banking &amp; loan platform delivery</a:t>
-            </a:r>
-          </a:p>
-          <a:p>
-            <a:pPr>
-              <a:spcAft>
-                <a:spcPts val="603"/>
-              </a:spcAft>
-              <a:defRPr sz="1500">
-                <a:solidFill>
-                  <a:srgbClr val="111827"/>
-                </a:solidFill>
-              </a:defRPr>
-            </a:pPr>
-            <a:r>
-              <a:t>C Money app: 30K → 100K+ users; CI/CD and Agile at scale</a:t>
-            </a:r>
-          </a:p>
-          <a:p>
-            <a:pPr>
-              <a:spcAft>
-                <a:spcPts val="603"/>
-              </a:spcAft>
-              <a:defRPr sz="1500">
-                <a:solidFill>
-                  <a:srgbClr val="111827"/>
-                </a:solidFill>
-              </a:defRPr>
-            </a:pPr>
-            <a:r>
-              <a:t>Loan disbursement volumes scaled to ₦800M–₦1B/month</a:t>
-            </a:r>
-          </a:p>
-          <a:p>
-            <a:pPr>
-              <a:spcAft>
-                <a:spcPts val="603"/>
-              </a:spcAft>
-              <a:defRPr sz="1500">
-                <a:solidFill>
-                  <a:srgbClr val="111827"/>
-                </a:solidFill>
-              </a:defRPr>
-            </a:pPr>
-            <a:r>
-              <a:t>Credara: enterprise workspace, API, and production deploy rigor</a:t>
-            </a:r>
-          </a:p>
-        </p:txBody>
-      </p:sp>
-      <p:sp>
-        <p:nvSpPr>
-          <p:cNvPr id="12" name="Rectangle 11"/>
-          <p:cNvSpPr/>
-          <p:nvPr/>
-        </p:nvSpPr>
-        <p:spPr>
-          <a:xfrm>
-            <a:off x="6080760" y="1783080"/>
-            <a:ext cx="45720" cy="4389120"/>
-          </a:xfrm>
-          <a:prstGeom prst="rect">
-            <a:avLst/>
-          </a:prstGeom>
-          <a:solidFill>
-            <a:srgbClr val="E7EAF1"/>
-          </a:solidFill>
-          <a:ln>
-            <a:noFill/>
-          </a:ln>
-        </p:spPr>
-        <p:style>
-          <a:lnRef idx="1">
-            <a:schemeClr val="accent1"/>
-          </a:lnRef>
-          <a:fillRef idx="3">
-            <a:schemeClr val="accent1"/>
-          </a:fillRef>
-          <a:effectRef idx="2">
-            <a:schemeClr val="accent1"/>
-          </a:effectRef>
-          <a:fontRef idx="minor">
-            <a:schemeClr val="lt1"/>
-          </a:fontRef>
-        </p:style>
-        <p:txBody>
-          <a:bodyPr rtlCol="0" anchor="ctr"/>
-          <a:lstStyle/>
-          <a:p>
-            <a:pPr algn="ctr"/>
+                  <a:srgbClr val="667085"/>
+                </a:solidFill>
+              </a:defRPr>
+            </a:pPr>
+            <a:r>
+              <a:t>Phase 3: Mainnet + API ecosystem</a:t>
+            </a:r>
           </a:p>
         </p:txBody>
       </p:sp>
@@ -5008,7 +4684,7 @@
               </a:defRPr>
             </a:pPr>
             <a:r>
-              <a:t>MVP — LIVE TODAY</a:t>
+              <a:t>BUSINESS MODEL</a:t>
             </a:r>
           </a:p>
         </p:txBody>
@@ -5043,7 +4719,7 @@
               </a:defRPr>
             </a:pPr>
             <a:r>
-              <a:t>Test it now</a:t>
+              <a:t>Infrastructure economics — multiple revenue lines</a:t>
             </a:r>
           </a:p>
         </p:txBody>
@@ -5212,221 +4888,309 @@
         </p:nvSpPr>
         <p:spPr>
           <a:xfrm>
-            <a:off x="822960" y="1828800"/>
-            <a:ext cx="5303520" cy="3474720"/>
-          </a:xfrm>
-          <a:prstGeom prst="rect">
-            <a:avLst/>
-          </a:prstGeom>
-          <a:noFill/>
-        </p:spPr>
-        <p:txBody>
-          <a:bodyPr wrap="square">
-            <a:spAutoFit/>
-          </a:bodyPr>
-          <a:lstStyle/>
-          <a:p>
-            <a:pPr>
-              <a:spcAft>
-                <a:spcPts val="644"/>
-              </a:spcAft>
-              <a:defRPr sz="1600">
+            <a:off x="822960" y="2011680"/>
+            <a:ext cx="2926080" cy="365760"/>
+          </a:xfrm>
+          <a:prstGeom prst="rect">
+            <a:avLst/>
+          </a:prstGeom>
+          <a:noFill/>
+        </p:spPr>
+        <p:txBody>
+          <a:bodyPr wrap="square">
+            <a:spAutoFit/>
+          </a:bodyPr>
+          <a:lstStyle/>
+          <a:p>
+            <a:pPr algn="l">
+              <a:defRPr sz="1600" b="1">
+                <a:solidFill>
+                  <a:srgbClr val="2563EB"/>
+                </a:solidFill>
+              </a:defRPr>
+            </a:pPr>
+            <a:r>
+              <a:t>Origination fee</a:t>
+            </a:r>
+          </a:p>
+        </p:txBody>
+      </p:sp>
+      <p:sp>
+        <p:nvSpPr>
+          <p:cNvPr id="9" name="TextBox 8"/>
+          <p:cNvSpPr txBox="1"/>
+          <p:nvPr/>
+        </p:nvSpPr>
+        <p:spPr>
+          <a:xfrm>
+            <a:off x="3840480" y="2011680"/>
+            <a:ext cx="7589520" cy="457200"/>
+          </a:xfrm>
+          <a:prstGeom prst="rect">
+            <a:avLst/>
+          </a:prstGeom>
+          <a:noFill/>
+        </p:spPr>
+        <p:txBody>
+          <a:bodyPr wrap="square">
+            <a:spAutoFit/>
+          </a:bodyPr>
+          <a:lstStyle/>
+          <a:p>
+            <a:pPr algn="l">
+              <a:defRPr sz="1600" b="0">
                 <a:solidFill>
                   <a:srgbClr val="111827"/>
                 </a:solidFill>
               </a:defRPr>
             </a:pPr>
             <a:r>
-              <a:t>credara-jet.vercel.app/workspace</a:t>
-            </a:r>
-          </a:p>
-          <a:p>
-            <a:pPr>
-              <a:spcAft>
-                <a:spcPts val="644"/>
-              </a:spcAft>
-              <a:defRPr sz="1600">
+              <a:t>Per receivable financed via Smart LC marketplace</a:t>
+            </a:r>
+          </a:p>
+        </p:txBody>
+      </p:sp>
+      <p:sp>
+        <p:nvSpPr>
+          <p:cNvPr id="10" name="TextBox 9"/>
+          <p:cNvSpPr txBox="1"/>
+          <p:nvPr/>
+        </p:nvSpPr>
+        <p:spPr>
+          <a:xfrm>
+            <a:off x="822960" y="2788920"/>
+            <a:ext cx="2926080" cy="365760"/>
+          </a:xfrm>
+          <a:prstGeom prst="rect">
+            <a:avLst/>
+          </a:prstGeom>
+          <a:noFill/>
+        </p:spPr>
+        <p:txBody>
+          <a:bodyPr wrap="square">
+            <a:spAutoFit/>
+          </a:bodyPr>
+          <a:lstStyle/>
+          <a:p>
+            <a:pPr algn="l">
+              <a:defRPr sz="1600" b="1">
+                <a:solidFill>
+                  <a:srgbClr val="2563EB"/>
+                </a:solidFill>
+              </a:defRPr>
+            </a:pPr>
+            <a:r>
+              <a:t>Platform / SaaS</a:t>
+            </a:r>
+          </a:p>
+        </p:txBody>
+      </p:sp>
+      <p:sp>
+        <p:nvSpPr>
+          <p:cNvPr id="11" name="TextBox 10"/>
+          <p:cNvSpPr txBox="1"/>
+          <p:nvPr/>
+        </p:nvSpPr>
+        <p:spPr>
+          <a:xfrm>
+            <a:off x="3840480" y="2788920"/>
+            <a:ext cx="7589520" cy="457200"/>
+          </a:xfrm>
+          <a:prstGeom prst="rect">
+            <a:avLst/>
+          </a:prstGeom>
+          <a:noFill/>
+        </p:spPr>
+        <p:txBody>
+          <a:bodyPr wrap="square">
+            <a:spAutoFit/>
+          </a:bodyPr>
+          <a:lstStyle/>
+          <a:p>
+            <a:pPr algn="l">
+              <a:defRPr sz="1600" b="0">
                 <a:solidFill>
                   <a:srgbClr val="111827"/>
                 </a:solidFill>
               </a:defRPr>
             </a:pPr>
             <a:r>
-              <a:t>credara-api.vercel.app/docs</a:t>
-            </a:r>
-          </a:p>
-          <a:p>
-            <a:pPr>
-              <a:spcAft>
-                <a:spcPts val="644"/>
-              </a:spcAft>
-              <a:defRPr sz="1600">
+              <a:t>Verification, deal room, reporting — tiered by volume</a:t>
+            </a:r>
+          </a:p>
+        </p:txBody>
+      </p:sp>
+      <p:sp>
+        <p:nvSpPr>
+          <p:cNvPr id="12" name="TextBox 11"/>
+          <p:cNvSpPr txBox="1"/>
+          <p:nvPr/>
+        </p:nvSpPr>
+        <p:spPr>
+          <a:xfrm>
+            <a:off x="822960" y="3566160"/>
+            <a:ext cx="2926080" cy="365760"/>
+          </a:xfrm>
+          <a:prstGeom prst="rect">
+            <a:avLst/>
+          </a:prstGeom>
+          <a:noFill/>
+        </p:spPr>
+        <p:txBody>
+          <a:bodyPr wrap="square">
+            <a:spAutoFit/>
+          </a:bodyPr>
+          <a:lstStyle/>
+          <a:p>
+            <a:pPr algn="l">
+              <a:defRPr sz="1600" b="1">
+                <a:solidFill>
+                  <a:srgbClr val="2563EB"/>
+                </a:solidFill>
+              </a:defRPr>
+            </a:pPr>
+            <a:r>
+              <a:t>Settlement fee</a:t>
+            </a:r>
+          </a:p>
+        </p:txBody>
+      </p:sp>
+      <p:sp>
+        <p:nvSpPr>
+          <p:cNvPr id="13" name="TextBox 12"/>
+          <p:cNvSpPr txBox="1"/>
+          <p:nvPr/>
+        </p:nvSpPr>
+        <p:spPr>
+          <a:xfrm>
+            <a:off x="3840480" y="3566160"/>
+            <a:ext cx="7589520" cy="457200"/>
+          </a:xfrm>
+          <a:prstGeom prst="rect">
+            <a:avLst/>
+          </a:prstGeom>
+          <a:noFill/>
+        </p:spPr>
+        <p:txBody>
+          <a:bodyPr wrap="square">
+            <a:spAutoFit/>
+          </a:bodyPr>
+          <a:lstStyle/>
+          <a:p>
+            <a:pPr algn="l">
+              <a:defRPr sz="1600" b="0">
                 <a:solidFill>
                   <a:srgbClr val="111827"/>
                 </a:solidFill>
               </a:defRPr>
             </a:pPr>
             <a:r>
-              <a:t>Judge demo mode in sidebar</a:t>
-            </a:r>
-          </a:p>
-          <a:p>
-            <a:pPr>
-              <a:spcAft>
-                <a:spcPts val="644"/>
-              </a:spcAft>
-              <a:defRPr sz="1600">
+              <a:t>Basis points per LC fund/release vs. days of bank LC</a:t>
+            </a:r>
+          </a:p>
+        </p:txBody>
+      </p:sp>
+      <p:sp>
+        <p:nvSpPr>
+          <p:cNvPr id="14" name="TextBox 13"/>
+          <p:cNvSpPr txBox="1"/>
+          <p:nvPr/>
+        </p:nvSpPr>
+        <p:spPr>
+          <a:xfrm>
+            <a:off x="822960" y="4343400"/>
+            <a:ext cx="2926080" cy="365760"/>
+          </a:xfrm>
+          <a:prstGeom prst="rect">
+            <a:avLst/>
+          </a:prstGeom>
+          <a:noFill/>
+        </p:spPr>
+        <p:txBody>
+          <a:bodyPr wrap="square">
+            <a:spAutoFit/>
+          </a:bodyPr>
+          <a:lstStyle/>
+          <a:p>
+            <a:pPr algn="l">
+              <a:defRPr sz="1600" b="1">
+                <a:solidFill>
+                  <a:srgbClr val="2563EB"/>
+                </a:solidFill>
+              </a:defRPr>
+            </a:pPr>
+            <a:r>
+              <a:t>Credit scoring API</a:t>
+            </a:r>
+          </a:p>
+        </p:txBody>
+      </p:sp>
+      <p:sp>
+        <p:nvSpPr>
+          <p:cNvPr id="15" name="TextBox 14"/>
+          <p:cNvSpPr txBox="1"/>
+          <p:nvPr/>
+        </p:nvSpPr>
+        <p:spPr>
+          <a:xfrm>
+            <a:off x="3840480" y="4343400"/>
+            <a:ext cx="7589520" cy="457200"/>
+          </a:xfrm>
+          <a:prstGeom prst="rect">
+            <a:avLst/>
+          </a:prstGeom>
+          <a:noFill/>
+        </p:spPr>
+        <p:txBody>
+          <a:bodyPr wrap="square">
+            <a:spAutoFit/>
+          </a:bodyPr>
+          <a:lstStyle/>
+          <a:p>
+            <a:pPr algn="l">
+              <a:defRPr sz="1600" b="0">
                 <a:solidFill>
                   <a:srgbClr val="111827"/>
                 </a:solidFill>
               </a:defRPr>
             </a:pPr>
             <a:r>
-              <a:t>Polygon Amoy contracts deployed</a:t>
-            </a:r>
-          </a:p>
-          <a:p>
-            <a:pPr>
-              <a:spcAft>
-                <a:spcPts val="644"/>
-              </a:spcAft>
-              <a:defRPr sz="1600">
-                <a:solidFill>
-                  <a:srgbClr val="111827"/>
-                </a:solidFill>
-              </a:defRPr>
-            </a:pPr>
-            <a:r>
-              <a:t>Slither + Hardhat tests in CI</a:t>
-            </a:r>
-          </a:p>
-        </p:txBody>
-      </p:sp>
-      <p:pic>
-        <p:nvPicPr>
-          <p:cNvPr id="9" name="Picture 8" descr="workspace-judge-mode.png"/>
-          <p:cNvPicPr>
-            <a:picLocks noChangeAspect="1"/>
-          </p:cNvPicPr>
-          <p:nvPr/>
-        </p:nvPicPr>
-        <p:blipFill>
-          <a:blip r:embed="rId2"/>
-          <a:stretch>
-            <a:fillRect/>
-          </a:stretch>
-        </p:blipFill>
-        <p:spPr>
-          <a:xfrm>
-            <a:off x="6400800" y="1828800"/>
-            <a:ext cx="5303520" cy="3535680"/>
-          </a:xfrm>
-          <a:prstGeom prst="rect">
-            <a:avLst/>
-          </a:prstGeom>
-        </p:spPr>
-      </p:pic>
-      <p:sp>
-        <p:nvSpPr>
-          <p:cNvPr id="10" name="TextBox 9"/>
-          <p:cNvSpPr txBox="1"/>
-          <p:nvPr/>
-        </p:nvSpPr>
-        <p:spPr>
-          <a:xfrm>
-            <a:off x="6400800" y="5989320"/>
-            <a:ext cx="5303520" cy="274320"/>
-          </a:xfrm>
-          <a:prstGeom prst="rect">
-            <a:avLst/>
-          </a:prstGeom>
-          <a:noFill/>
-        </p:spPr>
-        <p:txBody>
-          <a:bodyPr wrap="square">
-            <a:spAutoFit/>
-          </a:bodyPr>
-          <a:lstStyle/>
-          <a:p>
-            <a:pPr algn="ctr">
-              <a:defRPr sz="1000" b="0">
+              <a:t>Attestations for external lenders without full workspace</a:t>
+            </a:r>
+          </a:p>
+        </p:txBody>
+      </p:sp>
+      <p:sp>
+        <p:nvSpPr>
+          <p:cNvPr id="16" name="TextBox 15"/>
+          <p:cNvSpPr txBox="1"/>
+          <p:nvPr/>
+        </p:nvSpPr>
+        <p:spPr>
+          <a:xfrm>
+            <a:off x="822960" y="5303520"/>
+            <a:ext cx="10058400" cy="548640"/>
+          </a:xfrm>
+          <a:prstGeom prst="rect">
+            <a:avLst/>
+          </a:prstGeom>
+          <a:noFill/>
+        </p:spPr>
+        <p:txBody>
+          <a:bodyPr wrap="square">
+            <a:spAutoFit/>
+          </a:bodyPr>
+          <a:lstStyle/>
+          <a:p>
+            <a:pPr algn="l">
+              <a:defRPr sz="1400" b="0">
                 <a:solidFill>
                   <a:srgbClr val="667085"/>
                 </a:solidFill>
               </a:defRPr>
             </a:pPr>
             <a:r>
-              <a:t>Enterprise workspace (Judge Mode)</a:t>
-            </a:r>
-          </a:p>
-        </p:txBody>
-      </p:sp>
-      <p:sp>
-        <p:nvSpPr>
-          <p:cNvPr id="11" name="TextBox 10"/>
-          <p:cNvSpPr txBox="1"/>
-          <p:nvPr/>
-        </p:nvSpPr>
-        <p:spPr>
-          <a:xfrm>
-            <a:off x="822960" y="5029200"/>
-            <a:ext cx="5303520" cy="457200"/>
-          </a:xfrm>
-          <a:prstGeom prst="rect">
-            <a:avLst/>
-          </a:prstGeom>
-          <a:noFill/>
-        </p:spPr>
-        <p:txBody>
-          <a:bodyPr wrap="square">
-            <a:spAutoFit/>
-          </a:bodyPr>
-          <a:lstStyle/>
-          <a:p>
-            <a:pPr algn="l">
-              <a:defRPr sz="1200" b="0">
-                <a:solidFill>
-                  <a:srgbClr val="667085"/>
-                </a:solidFill>
-              </a:defRPr>
-            </a:pPr>
-            <a:r>
-              <a:t>Non-goals: no remittance MVP · no POS · no AED issuance claim</a:t>
-            </a:r>
-          </a:p>
-        </p:txBody>
-      </p:sp>
-      <p:sp>
-        <p:nvSpPr>
-          <p:cNvPr id="12" name="TextBox 11"/>
-          <p:cNvSpPr txBox="1"/>
-          <p:nvPr/>
-        </p:nvSpPr>
-        <p:spPr>
-          <a:xfrm>
-            <a:off x="822960" y="5486400"/>
-            <a:ext cx="10058400" cy="457200"/>
-          </a:xfrm>
-          <a:prstGeom prst="rect">
-            <a:avLst/>
-          </a:prstGeom>
-          <a:noFill/>
-        </p:spPr>
-        <p:txBody>
-          <a:bodyPr wrap="square">
-            <a:spAutoFit/>
-          </a:bodyPr>
-          <a:lstStyle/>
-          <a:p>
-            <a:pPr algn="l">
-              <a:defRPr sz="1400" b="1">
-                <a:solidFill>
-                  <a:srgbClr val="16A34A"/>
-                </a:solidFill>
-              </a:defRPr>
-            </a:pPr>
-            <a:r>
-              <a:t>Demo climax: Polygonscan proof anchor + Smart LC settlement</a:t>
+              <a:t>API-first: third parties integrate proof, receivable, and LC rails without Credara UI.</a:t>
             </a:r>
           </a:p>
         </p:txBody>
@@ -5440,6 +5204,1016 @@
 </file>
 
 <file path=ppt/slides/slide14.xml><?xml version="1.0" encoding="utf-8"?>
+<p:sld xmlns:a="http://schemas.openxmlformats.org/drawingml/2006/main" xmlns:p="http://schemas.openxmlformats.org/presentationml/2006/main" xmlns:r="http://schemas.openxmlformats.org/officeDocument/2006/relationships">
+  <p:cSld>
+    <p:bg>
+      <p:bgPr>
+        <a:solidFill>
+          <a:srgbClr val="FFFFFF"/>
+        </a:solidFill>
+        <a:effectLst/>
+      </p:bgPr>
+    </p:bg>
+    <p:spTree>
+      <p:nvGrpSpPr>
+        <p:cNvPr id="1" name=""/>
+        <p:cNvGrpSpPr/>
+        <p:nvPr/>
+      </p:nvGrpSpPr>
+      <p:grpSpPr/>
+      <p:sp>
+        <p:nvSpPr>
+          <p:cNvPr id="2" name="TextBox 1"/>
+          <p:cNvSpPr txBox="1"/>
+          <p:nvPr/>
+        </p:nvSpPr>
+        <p:spPr>
+          <a:xfrm>
+            <a:off x="640080" y="411480"/>
+            <a:ext cx="10515600" cy="457200"/>
+          </a:xfrm>
+          <a:prstGeom prst="rect">
+            <a:avLst/>
+          </a:prstGeom>
+          <a:noFill/>
+        </p:spPr>
+        <p:txBody>
+          <a:bodyPr wrap="square">
+            <a:spAutoFit/>
+          </a:bodyPr>
+          <a:lstStyle/>
+          <a:p>
+            <a:pPr algn="l">
+              <a:defRPr sz="1100" b="1">
+                <a:solidFill>
+                  <a:srgbClr val="2563EB"/>
+                </a:solidFill>
+              </a:defRPr>
+            </a:pPr>
+            <a:r>
+              <a:t>TEAM</a:t>
+            </a:r>
+          </a:p>
+        </p:txBody>
+      </p:sp>
+      <p:sp>
+        <p:nvSpPr>
+          <p:cNvPr id="3" name="TextBox 2"/>
+          <p:cNvSpPr txBox="1"/>
+          <p:nvPr/>
+        </p:nvSpPr>
+        <p:spPr>
+          <a:xfrm>
+            <a:off x="640080" y="777240"/>
+            <a:ext cx="10515600" cy="1097280"/>
+          </a:xfrm>
+          <a:prstGeom prst="rect">
+            <a:avLst/>
+          </a:prstGeom>
+          <a:noFill/>
+        </p:spPr>
+        <p:txBody>
+          <a:bodyPr wrap="square">
+            <a:spAutoFit/>
+          </a:bodyPr>
+          <a:lstStyle/>
+          <a:p>
+            <a:pPr algn="l">
+              <a:defRPr sz="3200" b="1">
+                <a:solidFill>
+                  <a:srgbClr val="111827"/>
+                </a:solidFill>
+              </a:defRPr>
+            </a:pPr>
+            <a:r>
+              <a:t>Banking operators + engineering leadership — built to win financier trust</a:t>
+            </a:r>
+          </a:p>
+        </p:txBody>
+      </p:sp>
+      <p:sp>
+        <p:nvSpPr>
+          <p:cNvPr id="4" name="Rectangle 3"/>
+          <p:cNvSpPr/>
+          <p:nvPr/>
+        </p:nvSpPr>
+        <p:spPr>
+          <a:xfrm>
+            <a:off x="640080" y="1600200"/>
+            <a:ext cx="1097280" cy="54864"/>
+          </a:xfrm>
+          <a:prstGeom prst="rect">
+            <a:avLst/>
+          </a:prstGeom>
+          <a:solidFill>
+            <a:srgbClr val="2563EB"/>
+          </a:solidFill>
+          <a:ln>
+            <a:noFill/>
+          </a:ln>
+        </p:spPr>
+        <p:style>
+          <a:lnRef idx="1">
+            <a:schemeClr val="accent1"/>
+          </a:lnRef>
+          <a:fillRef idx="3">
+            <a:schemeClr val="accent1"/>
+          </a:fillRef>
+          <a:effectRef idx="2">
+            <a:schemeClr val="accent1"/>
+          </a:effectRef>
+          <a:fontRef idx="minor">
+            <a:schemeClr val="lt1"/>
+          </a:fontRef>
+        </p:style>
+        <p:txBody>
+          <a:bodyPr rtlCol="0" anchor="ctr"/>
+          <a:lstStyle/>
+          <a:p>
+            <a:pPr algn="ctr"/>
+          </a:p>
+        </p:txBody>
+      </p:sp>
+      <p:sp>
+        <p:nvSpPr>
+          <p:cNvPr id="5" name="Rectangle 4"/>
+          <p:cNvSpPr/>
+          <p:nvPr/>
+        </p:nvSpPr>
+        <p:spPr>
+          <a:xfrm>
+            <a:off x="0" y="6446520"/>
+            <a:ext cx="12191695" cy="411480"/>
+          </a:xfrm>
+          <a:prstGeom prst="rect">
+            <a:avLst/>
+          </a:prstGeom>
+          <a:solidFill>
+            <a:srgbClr val="F1F5F9"/>
+          </a:solidFill>
+          <a:ln>
+            <a:noFill/>
+          </a:ln>
+        </p:spPr>
+        <p:style>
+          <a:lnRef idx="1">
+            <a:schemeClr val="accent1"/>
+          </a:lnRef>
+          <a:fillRef idx="3">
+            <a:schemeClr val="accent1"/>
+          </a:fillRef>
+          <a:effectRef idx="2">
+            <a:schemeClr val="accent1"/>
+          </a:effectRef>
+          <a:fontRef idx="minor">
+            <a:schemeClr val="lt1"/>
+          </a:fontRef>
+        </p:style>
+        <p:txBody>
+          <a:bodyPr rtlCol="0" anchor="ctr"/>
+          <a:lstStyle/>
+          <a:p>
+            <a:pPr algn="ctr"/>
+          </a:p>
+        </p:txBody>
+      </p:sp>
+      <p:sp>
+        <p:nvSpPr>
+          <p:cNvPr id="6" name="TextBox 5"/>
+          <p:cNvSpPr txBox="1"/>
+          <p:nvPr/>
+        </p:nvSpPr>
+        <p:spPr>
+          <a:xfrm>
+            <a:off x="640080" y="6510528"/>
+            <a:ext cx="5486400" cy="274320"/>
+          </a:xfrm>
+          <a:prstGeom prst="rect">
+            <a:avLst/>
+          </a:prstGeom>
+          <a:noFill/>
+        </p:spPr>
+        <p:txBody>
+          <a:bodyPr wrap="square">
+            <a:spAutoFit/>
+          </a:bodyPr>
+          <a:lstStyle/>
+          <a:p>
+            <a:pPr algn="l">
+              <a:defRPr sz="1000" b="0">
+                <a:solidFill>
+                  <a:srgbClr val="667085"/>
+                </a:solidFill>
+              </a:defRPr>
+            </a:pPr>
+            <a:r>
+              <a:t>Credara · Smart Commerce Infrastructure</a:t>
+            </a:r>
+          </a:p>
+        </p:txBody>
+      </p:sp>
+      <p:sp>
+        <p:nvSpPr>
+          <p:cNvPr id="7" name="TextBox 6"/>
+          <p:cNvSpPr txBox="1"/>
+          <p:nvPr/>
+        </p:nvSpPr>
+        <p:spPr>
+          <a:xfrm>
+            <a:off x="8686800" y="6510528"/>
+            <a:ext cx="3200400" cy="274320"/>
+          </a:xfrm>
+          <a:prstGeom prst="rect">
+            <a:avLst/>
+          </a:prstGeom>
+          <a:noFill/>
+        </p:spPr>
+        <p:txBody>
+          <a:bodyPr wrap="square">
+            <a:spAutoFit/>
+          </a:bodyPr>
+          <a:lstStyle/>
+          <a:p>
+            <a:pPr algn="r">
+              <a:defRPr sz="1000" b="0">
+                <a:solidFill>
+                  <a:srgbClr val="667085"/>
+                </a:solidFill>
+              </a:defRPr>
+            </a:pPr>
+            <a:r>
+              <a:t>credara-jet.vercel.app</a:t>
+            </a:r>
+          </a:p>
+        </p:txBody>
+      </p:sp>
+      <p:sp>
+        <p:nvSpPr>
+          <p:cNvPr id="8" name="TextBox 7"/>
+          <p:cNvSpPr txBox="1"/>
+          <p:nvPr/>
+        </p:nvSpPr>
+        <p:spPr>
+          <a:xfrm>
+            <a:off x="822960" y="1874519"/>
+            <a:ext cx="5120640" cy="365760"/>
+          </a:xfrm>
+          <a:prstGeom prst="rect">
+            <a:avLst/>
+          </a:prstGeom>
+          <a:noFill/>
+        </p:spPr>
+        <p:txBody>
+          <a:bodyPr wrap="square">
+            <a:spAutoFit/>
+          </a:bodyPr>
+          <a:lstStyle/>
+          <a:p>
+            <a:pPr algn="l">
+              <a:defRPr sz="1400" b="1">
+                <a:solidFill>
+                  <a:srgbClr val="2563EB"/>
+                </a:solidFill>
+              </a:defRPr>
+            </a:pPr>
+            <a:r>
+              <a:t>Othniel Obasi — Founder, NOVTIA Ltd (London)</a:t>
+            </a:r>
+          </a:p>
+        </p:txBody>
+      </p:sp>
+      <p:sp>
+        <p:nvSpPr>
+          <p:cNvPr id="9" name="TextBox 8"/>
+          <p:cNvSpPr txBox="1"/>
+          <p:nvPr/>
+        </p:nvSpPr>
+        <p:spPr>
+          <a:xfrm>
+            <a:off x="822960" y="2240280"/>
+            <a:ext cx="5120640" cy="3840480"/>
+          </a:xfrm>
+          <a:prstGeom prst="rect">
+            <a:avLst/>
+          </a:prstGeom>
+          <a:noFill/>
+        </p:spPr>
+        <p:txBody>
+          <a:bodyPr wrap="square">
+            <a:spAutoFit/>
+          </a:bodyPr>
+          <a:lstStyle/>
+          <a:p>
+            <a:pPr>
+              <a:spcAft>
+                <a:spcPts val="603"/>
+              </a:spcAft>
+              <a:defRPr sz="1500">
+                <a:solidFill>
+                  <a:srgbClr val="111827"/>
+                </a:solidFill>
+              </a:defRPr>
+            </a:pPr>
+            <a:r>
+              <a:t>Digital banking: Creditville MFBank 40K → 100K+ users</a:t>
+            </a:r>
+          </a:p>
+          <a:p>
+            <a:pPr>
+              <a:spcAft>
+                <a:spcPts val="603"/>
+              </a:spcAft>
+              <a:defRPr sz="1500">
+                <a:solidFill>
+                  <a:srgbClr val="111827"/>
+                </a:solidFill>
+              </a:defRPr>
+            </a:pPr>
+            <a:r>
+              <a:t>Utilities: PHED — 5M+ customers, $96M+ revenue growth</a:t>
+            </a:r>
+          </a:p>
+          <a:p>
+            <a:pPr>
+              <a:spcAft>
+                <a:spcPts val="603"/>
+              </a:spcAft>
+              <a:defRPr sz="1500">
+                <a:solidFill>
+                  <a:srgbClr val="111827"/>
+                </a:solidFill>
+              </a:defRPr>
+            </a:pPr>
+            <a:r>
+              <a:t>AI governance: AIRG + SURGE v2 cryptographic receipt chain</a:t>
+            </a:r>
+          </a:p>
+          <a:p>
+            <a:pPr>
+              <a:spcAft>
+                <a:spcPts val="603"/>
+              </a:spcAft>
+              <a:defRPr sz="1500">
+                <a:solidFill>
+                  <a:srgbClr val="111827"/>
+                </a:solidFill>
+              </a:defRPr>
+            </a:pPr>
+            <a:r>
+              <a:t>Credara: evidence-first, fail-closed on-chain settlement</a:t>
+            </a:r>
+          </a:p>
+        </p:txBody>
+      </p:sp>
+      <p:sp>
+        <p:nvSpPr>
+          <p:cNvPr id="10" name="TextBox 9"/>
+          <p:cNvSpPr txBox="1"/>
+          <p:nvPr/>
+        </p:nvSpPr>
+        <p:spPr>
+          <a:xfrm>
+            <a:off x="6309360" y="1874519"/>
+            <a:ext cx="5120640" cy="365760"/>
+          </a:xfrm>
+          <a:prstGeom prst="rect">
+            <a:avLst/>
+          </a:prstGeom>
+          <a:noFill/>
+        </p:spPr>
+        <p:txBody>
+          <a:bodyPr wrap="square">
+            <a:spAutoFit/>
+          </a:bodyPr>
+          <a:lstStyle/>
+          <a:p>
+            <a:pPr algn="l">
+              <a:defRPr sz="1400" b="1">
+                <a:solidFill>
+                  <a:srgbClr val="2563EB"/>
+                </a:solidFill>
+              </a:defRPr>
+            </a:pPr>
+            <a:r>
+              <a:t>Martins Nwanu — Head of IT, Creditville Group</a:t>
+            </a:r>
+          </a:p>
+        </p:txBody>
+      </p:sp>
+      <p:sp>
+        <p:nvSpPr>
+          <p:cNvPr id="11" name="TextBox 10"/>
+          <p:cNvSpPr txBox="1"/>
+          <p:nvPr/>
+        </p:nvSpPr>
+        <p:spPr>
+          <a:xfrm>
+            <a:off x="6309360" y="2240280"/>
+            <a:ext cx="5120640" cy="3840480"/>
+          </a:xfrm>
+          <a:prstGeom prst="rect">
+            <a:avLst/>
+          </a:prstGeom>
+          <a:noFill/>
+        </p:spPr>
+        <p:txBody>
+          <a:bodyPr wrap="square">
+            <a:spAutoFit/>
+          </a:bodyPr>
+          <a:lstStyle/>
+          <a:p>
+            <a:pPr>
+              <a:spcAft>
+                <a:spcPts val="603"/>
+              </a:spcAft>
+              <a:defRPr sz="1500">
+                <a:solidFill>
+                  <a:srgbClr val="111827"/>
+                </a:solidFill>
+              </a:defRPr>
+            </a:pPr>
+            <a:r>
+              <a:t>Led 11-engineer team; core banking &amp; loan platform delivery</a:t>
+            </a:r>
+          </a:p>
+          <a:p>
+            <a:pPr>
+              <a:spcAft>
+                <a:spcPts val="603"/>
+              </a:spcAft>
+              <a:defRPr sz="1500">
+                <a:solidFill>
+                  <a:srgbClr val="111827"/>
+                </a:solidFill>
+              </a:defRPr>
+            </a:pPr>
+            <a:r>
+              <a:t>C Money app: 30K → 100K+ users; CI/CD and Agile at scale</a:t>
+            </a:r>
+          </a:p>
+          <a:p>
+            <a:pPr>
+              <a:spcAft>
+                <a:spcPts val="603"/>
+              </a:spcAft>
+              <a:defRPr sz="1500">
+                <a:solidFill>
+                  <a:srgbClr val="111827"/>
+                </a:solidFill>
+              </a:defRPr>
+            </a:pPr>
+            <a:r>
+              <a:t>Loan disbursement volumes scaled to ₦800M–₦1B/month</a:t>
+            </a:r>
+          </a:p>
+          <a:p>
+            <a:pPr>
+              <a:spcAft>
+                <a:spcPts val="603"/>
+              </a:spcAft>
+              <a:defRPr sz="1500">
+                <a:solidFill>
+                  <a:srgbClr val="111827"/>
+                </a:solidFill>
+              </a:defRPr>
+            </a:pPr>
+            <a:r>
+              <a:t>Credara: enterprise workspace, API, and production deploy rigor</a:t>
+            </a:r>
+          </a:p>
+        </p:txBody>
+      </p:sp>
+      <p:sp>
+        <p:nvSpPr>
+          <p:cNvPr id="12" name="Rectangle 11"/>
+          <p:cNvSpPr/>
+          <p:nvPr/>
+        </p:nvSpPr>
+        <p:spPr>
+          <a:xfrm>
+            <a:off x="6080760" y="1783080"/>
+            <a:ext cx="45720" cy="4389120"/>
+          </a:xfrm>
+          <a:prstGeom prst="rect">
+            <a:avLst/>
+          </a:prstGeom>
+          <a:solidFill>
+            <a:srgbClr val="E7EAF1"/>
+          </a:solidFill>
+          <a:ln>
+            <a:noFill/>
+          </a:ln>
+        </p:spPr>
+        <p:style>
+          <a:lnRef idx="1">
+            <a:schemeClr val="accent1"/>
+          </a:lnRef>
+          <a:fillRef idx="3">
+            <a:schemeClr val="accent1"/>
+          </a:fillRef>
+          <a:effectRef idx="2">
+            <a:schemeClr val="accent1"/>
+          </a:effectRef>
+          <a:fontRef idx="minor">
+            <a:schemeClr val="lt1"/>
+          </a:fontRef>
+        </p:style>
+        <p:txBody>
+          <a:bodyPr rtlCol="0" anchor="ctr"/>
+          <a:lstStyle/>
+          <a:p>
+            <a:pPr algn="ctr"/>
+          </a:p>
+        </p:txBody>
+      </p:sp>
+    </p:spTree>
+  </p:cSld>
+  <p:clrMapOvr>
+    <a:masterClrMapping/>
+  </p:clrMapOvr>
+</p:sld>
+</file>
+
+<file path=ppt/slides/slide15.xml><?xml version="1.0" encoding="utf-8"?>
+<p:sld xmlns:a="http://schemas.openxmlformats.org/drawingml/2006/main" xmlns:p="http://schemas.openxmlformats.org/presentationml/2006/main" xmlns:r="http://schemas.openxmlformats.org/officeDocument/2006/relationships">
+  <p:cSld>
+    <p:bg>
+      <p:bgPr>
+        <a:solidFill>
+          <a:srgbClr val="FFFFFF"/>
+        </a:solidFill>
+        <a:effectLst/>
+      </p:bgPr>
+    </p:bg>
+    <p:spTree>
+      <p:nvGrpSpPr>
+        <p:cNvPr id="1" name=""/>
+        <p:cNvGrpSpPr/>
+        <p:nvPr/>
+      </p:nvGrpSpPr>
+      <p:grpSpPr/>
+      <p:sp>
+        <p:nvSpPr>
+          <p:cNvPr id="2" name="TextBox 1"/>
+          <p:cNvSpPr txBox="1"/>
+          <p:nvPr/>
+        </p:nvSpPr>
+        <p:spPr>
+          <a:xfrm>
+            <a:off x="640080" y="411480"/>
+            <a:ext cx="10515600" cy="457200"/>
+          </a:xfrm>
+          <a:prstGeom prst="rect">
+            <a:avLst/>
+          </a:prstGeom>
+          <a:noFill/>
+        </p:spPr>
+        <p:txBody>
+          <a:bodyPr wrap="square">
+            <a:spAutoFit/>
+          </a:bodyPr>
+          <a:lstStyle/>
+          <a:p>
+            <a:pPr algn="l">
+              <a:defRPr sz="1100" b="1">
+                <a:solidFill>
+                  <a:srgbClr val="2563EB"/>
+                </a:solidFill>
+              </a:defRPr>
+            </a:pPr>
+            <a:r>
+              <a:t>MVP — LIVE TODAY</a:t>
+            </a:r>
+          </a:p>
+        </p:txBody>
+      </p:sp>
+      <p:sp>
+        <p:nvSpPr>
+          <p:cNvPr id="3" name="TextBox 2"/>
+          <p:cNvSpPr txBox="1"/>
+          <p:nvPr/>
+        </p:nvSpPr>
+        <p:spPr>
+          <a:xfrm>
+            <a:off x="640080" y="777240"/>
+            <a:ext cx="10515600" cy="1097280"/>
+          </a:xfrm>
+          <a:prstGeom prst="rect">
+            <a:avLst/>
+          </a:prstGeom>
+          <a:noFill/>
+        </p:spPr>
+        <p:txBody>
+          <a:bodyPr wrap="square">
+            <a:spAutoFit/>
+          </a:bodyPr>
+          <a:lstStyle/>
+          <a:p>
+            <a:pPr algn="l">
+              <a:defRPr sz="3200" b="1">
+                <a:solidFill>
+                  <a:srgbClr val="111827"/>
+                </a:solidFill>
+              </a:defRPr>
+            </a:pPr>
+            <a:r>
+              <a:t>Test it now</a:t>
+            </a:r>
+          </a:p>
+        </p:txBody>
+      </p:sp>
+      <p:sp>
+        <p:nvSpPr>
+          <p:cNvPr id="4" name="Rectangle 3"/>
+          <p:cNvSpPr/>
+          <p:nvPr/>
+        </p:nvSpPr>
+        <p:spPr>
+          <a:xfrm>
+            <a:off x="640080" y="1600200"/>
+            <a:ext cx="1097280" cy="54864"/>
+          </a:xfrm>
+          <a:prstGeom prst="rect">
+            <a:avLst/>
+          </a:prstGeom>
+          <a:solidFill>
+            <a:srgbClr val="2563EB"/>
+          </a:solidFill>
+          <a:ln>
+            <a:noFill/>
+          </a:ln>
+        </p:spPr>
+        <p:style>
+          <a:lnRef idx="1">
+            <a:schemeClr val="accent1"/>
+          </a:lnRef>
+          <a:fillRef idx="3">
+            <a:schemeClr val="accent1"/>
+          </a:fillRef>
+          <a:effectRef idx="2">
+            <a:schemeClr val="accent1"/>
+          </a:effectRef>
+          <a:fontRef idx="minor">
+            <a:schemeClr val="lt1"/>
+          </a:fontRef>
+        </p:style>
+        <p:txBody>
+          <a:bodyPr rtlCol="0" anchor="ctr"/>
+          <a:lstStyle/>
+          <a:p>
+            <a:pPr algn="ctr"/>
+          </a:p>
+        </p:txBody>
+      </p:sp>
+      <p:sp>
+        <p:nvSpPr>
+          <p:cNvPr id="5" name="Rectangle 4"/>
+          <p:cNvSpPr/>
+          <p:nvPr/>
+        </p:nvSpPr>
+        <p:spPr>
+          <a:xfrm>
+            <a:off x="0" y="6446520"/>
+            <a:ext cx="12191695" cy="411480"/>
+          </a:xfrm>
+          <a:prstGeom prst="rect">
+            <a:avLst/>
+          </a:prstGeom>
+          <a:solidFill>
+            <a:srgbClr val="F1F5F9"/>
+          </a:solidFill>
+          <a:ln>
+            <a:noFill/>
+          </a:ln>
+        </p:spPr>
+        <p:style>
+          <a:lnRef idx="1">
+            <a:schemeClr val="accent1"/>
+          </a:lnRef>
+          <a:fillRef idx="3">
+            <a:schemeClr val="accent1"/>
+          </a:fillRef>
+          <a:effectRef idx="2">
+            <a:schemeClr val="accent1"/>
+          </a:effectRef>
+          <a:fontRef idx="minor">
+            <a:schemeClr val="lt1"/>
+          </a:fontRef>
+        </p:style>
+        <p:txBody>
+          <a:bodyPr rtlCol="0" anchor="ctr"/>
+          <a:lstStyle/>
+          <a:p>
+            <a:pPr algn="ctr"/>
+          </a:p>
+        </p:txBody>
+      </p:sp>
+      <p:sp>
+        <p:nvSpPr>
+          <p:cNvPr id="6" name="TextBox 5"/>
+          <p:cNvSpPr txBox="1"/>
+          <p:nvPr/>
+        </p:nvSpPr>
+        <p:spPr>
+          <a:xfrm>
+            <a:off x="640080" y="6510528"/>
+            <a:ext cx="5486400" cy="274320"/>
+          </a:xfrm>
+          <a:prstGeom prst="rect">
+            <a:avLst/>
+          </a:prstGeom>
+          <a:noFill/>
+        </p:spPr>
+        <p:txBody>
+          <a:bodyPr wrap="square">
+            <a:spAutoFit/>
+          </a:bodyPr>
+          <a:lstStyle/>
+          <a:p>
+            <a:pPr algn="l">
+              <a:defRPr sz="1000" b="0">
+                <a:solidFill>
+                  <a:srgbClr val="667085"/>
+                </a:solidFill>
+              </a:defRPr>
+            </a:pPr>
+            <a:r>
+              <a:t>Credara · Smart Commerce Infrastructure</a:t>
+            </a:r>
+          </a:p>
+        </p:txBody>
+      </p:sp>
+      <p:sp>
+        <p:nvSpPr>
+          <p:cNvPr id="7" name="TextBox 6"/>
+          <p:cNvSpPr txBox="1"/>
+          <p:nvPr/>
+        </p:nvSpPr>
+        <p:spPr>
+          <a:xfrm>
+            <a:off x="8686800" y="6510528"/>
+            <a:ext cx="3200400" cy="274320"/>
+          </a:xfrm>
+          <a:prstGeom prst="rect">
+            <a:avLst/>
+          </a:prstGeom>
+          <a:noFill/>
+        </p:spPr>
+        <p:txBody>
+          <a:bodyPr wrap="square">
+            <a:spAutoFit/>
+          </a:bodyPr>
+          <a:lstStyle/>
+          <a:p>
+            <a:pPr algn="r">
+              <a:defRPr sz="1000" b="0">
+                <a:solidFill>
+                  <a:srgbClr val="667085"/>
+                </a:solidFill>
+              </a:defRPr>
+            </a:pPr>
+            <a:r>
+              <a:t>credara-jet.vercel.app</a:t>
+            </a:r>
+          </a:p>
+        </p:txBody>
+      </p:sp>
+      <p:sp>
+        <p:nvSpPr>
+          <p:cNvPr id="8" name="TextBox 7"/>
+          <p:cNvSpPr txBox="1"/>
+          <p:nvPr/>
+        </p:nvSpPr>
+        <p:spPr>
+          <a:xfrm>
+            <a:off x="822960" y="1828800"/>
+            <a:ext cx="5303520" cy="3474720"/>
+          </a:xfrm>
+          <a:prstGeom prst="rect">
+            <a:avLst/>
+          </a:prstGeom>
+          <a:noFill/>
+        </p:spPr>
+        <p:txBody>
+          <a:bodyPr wrap="square">
+            <a:spAutoFit/>
+          </a:bodyPr>
+          <a:lstStyle/>
+          <a:p>
+            <a:pPr>
+              <a:spcAft>
+                <a:spcPts val="644"/>
+              </a:spcAft>
+              <a:defRPr sz="1600">
+                <a:solidFill>
+                  <a:srgbClr val="111827"/>
+                </a:solidFill>
+              </a:defRPr>
+            </a:pPr>
+            <a:r>
+              <a:t>credara-jet.vercel.app/workspace</a:t>
+            </a:r>
+          </a:p>
+          <a:p>
+            <a:pPr>
+              <a:spcAft>
+                <a:spcPts val="644"/>
+              </a:spcAft>
+              <a:defRPr sz="1600">
+                <a:solidFill>
+                  <a:srgbClr val="111827"/>
+                </a:solidFill>
+              </a:defRPr>
+            </a:pPr>
+            <a:r>
+              <a:t>credara-api.vercel.app/docs</a:t>
+            </a:r>
+          </a:p>
+          <a:p>
+            <a:pPr>
+              <a:spcAft>
+                <a:spcPts val="644"/>
+              </a:spcAft>
+              <a:defRPr sz="1600">
+                <a:solidFill>
+                  <a:srgbClr val="111827"/>
+                </a:solidFill>
+              </a:defRPr>
+            </a:pPr>
+            <a:r>
+              <a:t>Judge demo mode in sidebar</a:t>
+            </a:r>
+          </a:p>
+          <a:p>
+            <a:pPr>
+              <a:spcAft>
+                <a:spcPts val="644"/>
+              </a:spcAft>
+              <a:defRPr sz="1600">
+                <a:solidFill>
+                  <a:srgbClr val="111827"/>
+                </a:solidFill>
+              </a:defRPr>
+            </a:pPr>
+            <a:r>
+              <a:t>Polygon Amoy contracts deployed</a:t>
+            </a:r>
+          </a:p>
+          <a:p>
+            <a:pPr>
+              <a:spcAft>
+                <a:spcPts val="644"/>
+              </a:spcAft>
+              <a:defRPr sz="1600">
+                <a:solidFill>
+                  <a:srgbClr val="111827"/>
+                </a:solidFill>
+              </a:defRPr>
+            </a:pPr>
+            <a:r>
+              <a:t>Slither + Hardhat tests in CI</a:t>
+            </a:r>
+          </a:p>
+        </p:txBody>
+      </p:sp>
+      <p:pic>
+        <p:nvPicPr>
+          <p:cNvPr id="9" name="Picture 8" descr="workspace-judge-mode.png"/>
+          <p:cNvPicPr>
+            <a:picLocks noChangeAspect="1"/>
+          </p:cNvPicPr>
+          <p:nvPr/>
+        </p:nvPicPr>
+        <p:blipFill>
+          <a:blip r:embed="rId2"/>
+          <a:stretch>
+            <a:fillRect/>
+          </a:stretch>
+        </p:blipFill>
+        <p:spPr>
+          <a:xfrm>
+            <a:off x="6400800" y="1828800"/>
+            <a:ext cx="5303520" cy="3535680"/>
+          </a:xfrm>
+          <a:prstGeom prst="rect">
+            <a:avLst/>
+          </a:prstGeom>
+        </p:spPr>
+      </p:pic>
+      <p:sp>
+        <p:nvSpPr>
+          <p:cNvPr id="10" name="TextBox 9"/>
+          <p:cNvSpPr txBox="1"/>
+          <p:nvPr/>
+        </p:nvSpPr>
+        <p:spPr>
+          <a:xfrm>
+            <a:off x="6400800" y="5989320"/>
+            <a:ext cx="5303520" cy="274320"/>
+          </a:xfrm>
+          <a:prstGeom prst="rect">
+            <a:avLst/>
+          </a:prstGeom>
+          <a:noFill/>
+        </p:spPr>
+        <p:txBody>
+          <a:bodyPr wrap="square">
+            <a:spAutoFit/>
+          </a:bodyPr>
+          <a:lstStyle/>
+          <a:p>
+            <a:pPr algn="ctr">
+              <a:defRPr sz="1000" b="0">
+                <a:solidFill>
+                  <a:srgbClr val="667085"/>
+                </a:solidFill>
+              </a:defRPr>
+            </a:pPr>
+            <a:r>
+              <a:t>Enterprise workspace (Judge Mode)</a:t>
+            </a:r>
+          </a:p>
+        </p:txBody>
+      </p:sp>
+      <p:sp>
+        <p:nvSpPr>
+          <p:cNvPr id="11" name="TextBox 10"/>
+          <p:cNvSpPr txBox="1"/>
+          <p:nvPr/>
+        </p:nvSpPr>
+        <p:spPr>
+          <a:xfrm>
+            <a:off x="822960" y="5029200"/>
+            <a:ext cx="5303520" cy="457200"/>
+          </a:xfrm>
+          <a:prstGeom prst="rect">
+            <a:avLst/>
+          </a:prstGeom>
+          <a:noFill/>
+        </p:spPr>
+        <p:txBody>
+          <a:bodyPr wrap="square">
+            <a:spAutoFit/>
+          </a:bodyPr>
+          <a:lstStyle/>
+          <a:p>
+            <a:pPr algn="l">
+              <a:defRPr sz="1200" b="0">
+                <a:solidFill>
+                  <a:srgbClr val="667085"/>
+                </a:solidFill>
+              </a:defRPr>
+            </a:pPr>
+            <a:r>
+              <a:t>Non-goals: no remittance MVP · no POS · no AED issuance claim</a:t>
+            </a:r>
+          </a:p>
+        </p:txBody>
+      </p:sp>
+      <p:sp>
+        <p:nvSpPr>
+          <p:cNvPr id="12" name="TextBox 11"/>
+          <p:cNvSpPr txBox="1"/>
+          <p:nvPr/>
+        </p:nvSpPr>
+        <p:spPr>
+          <a:xfrm>
+            <a:off x="822960" y="5486400"/>
+            <a:ext cx="10058400" cy="457200"/>
+          </a:xfrm>
+          <a:prstGeom prst="rect">
+            <a:avLst/>
+          </a:prstGeom>
+          <a:noFill/>
+        </p:spPr>
+        <p:txBody>
+          <a:bodyPr wrap="square">
+            <a:spAutoFit/>
+          </a:bodyPr>
+          <a:lstStyle/>
+          <a:p>
+            <a:pPr algn="l">
+              <a:defRPr sz="1400" b="1">
+                <a:solidFill>
+                  <a:srgbClr val="16A34A"/>
+                </a:solidFill>
+              </a:defRPr>
+            </a:pPr>
+            <a:r>
+              <a:t>Demo climax: Polygonscan proof anchor + Smart LC settlement</a:t>
+            </a:r>
+          </a:p>
+        </p:txBody>
+      </p:sp>
+    </p:spTree>
+  </p:cSld>
+  <p:clrMapOvr>
+    <a:masterClrMapping/>
+  </p:clrMapOvr>
+</p:sld>
+</file>
+
+<file path=ppt/slides/slide16.xml><?xml version="1.0" encoding="utf-8"?>
 <p:sld xmlns:a="http://schemas.openxmlformats.org/drawingml/2006/main" xmlns:p="http://schemas.openxmlformats.org/presentationml/2006/main" xmlns:r="http://schemas.openxmlformats.org/officeDocument/2006/relationships">
   <p:cSld>
     <p:bg>
@@ -5731,7 +6505,7 @@
               </a:defRPr>
             </a:pPr>
             <a:r>
-              <a:t>CHALLENGE FIT</a:t>
+              <a:t>THE AHA MOMENT</a:t>
             </a:r>
           </a:p>
         </p:txBody>
@@ -5766,7 +6540,7 @@
               </a:defRPr>
             </a:pPr>
             <a:r>
-              <a:t>Built exactly what Problem #1 asks for — on Polygon, live today</a:t>
+              <a:t>Supplier paid after verified delivery — not after 45 days of paperwork</a:t>
             </a:r>
           </a:p>
         </p:txBody>
@@ -5935,8 +6709,8 @@
         </p:nvSpPr>
         <p:spPr>
           <a:xfrm>
-            <a:off x="822960" y="1874519"/>
-            <a:ext cx="5303520" cy="365760"/>
+            <a:off x="822960" y="1965960"/>
+            <a:ext cx="5303520" cy="1234440"/>
           </a:xfrm>
           <a:prstGeom prst="rect">
             <a:avLst/>
@@ -5950,14 +6724,18 @@
           <a:lstStyle/>
           <a:p>
             <a:pPr algn="l">
-              <a:defRPr sz="1200" b="1">
-                <a:solidFill>
-                  <a:srgbClr val="2563EB"/>
-                </a:solidFill>
-              </a:defRPr>
-            </a:pPr>
-            <a:r>
-              <a:t>Hackathon requirement</a:t>
+              <a:defRPr sz="1800" b="1">
+                <a:solidFill>
+                  <a:srgbClr val="111827"/>
+                </a:solidFill>
+              </a:defRPr>
+            </a:pPr>
+            <a:r>
+              <a:t>1,000 MockUSDC released on Polygon Amoy after Smart LC verified delivery.</a:t>
+            </a:r>
+            <a:br/>
+            <a:r>
+              <a:t>Bank LC would still be on day 3 of manual processing.</a:t>
             </a:r>
           </a:p>
         </p:txBody>
@@ -5970,333 +6748,110 @@
         </p:nvSpPr>
         <p:spPr>
           <a:xfrm>
-            <a:off x="6309360" y="1874519"/>
-            <a:ext cx="5303520" cy="365760"/>
-          </a:xfrm>
-          <a:prstGeom prst="rect">
-            <a:avLst/>
-          </a:prstGeom>
-          <a:noFill/>
-        </p:spPr>
-        <p:txBody>
-          <a:bodyPr wrap="square">
-            <a:spAutoFit/>
-          </a:bodyPr>
-          <a:lstStyle/>
-          <a:p>
-            <a:pPr algn="l">
-              <a:defRPr sz="1200" b="1">
-                <a:solidFill>
-                  <a:srgbClr val="16A34A"/>
-                </a:solidFill>
-              </a:defRPr>
-            </a:pPr>
-            <a:r>
-              <a:t>Credara (shipped)</a:t>
-            </a:r>
-          </a:p>
-        </p:txBody>
-      </p:sp>
-      <p:sp>
-        <p:nvSpPr>
-          <p:cNvPr id="10" name="TextBox 9"/>
-          <p:cNvSpPr txBox="1"/>
-          <p:nvPr/>
-        </p:nvSpPr>
-        <p:spPr>
-          <a:xfrm>
-            <a:off x="822960" y="2286000"/>
-            <a:ext cx="5120640" cy="502920"/>
-          </a:xfrm>
-          <a:prstGeom prst="rect">
-            <a:avLst/>
-          </a:prstGeom>
-          <a:noFill/>
-        </p:spPr>
-        <p:txBody>
-          <a:bodyPr wrap="square">
-            <a:spAutoFit/>
-          </a:bodyPr>
-          <a:lstStyle/>
-          <a:p>
-            <a:pPr algn="l">
-              <a:defRPr sz="1500" b="1">
+            <a:off x="822960" y="3246120"/>
+            <a:ext cx="5303520" cy="2011680"/>
+          </a:xfrm>
+          <a:prstGeom prst="rect">
+            <a:avLst/>
+          </a:prstGeom>
+          <a:noFill/>
+        </p:spPr>
+        <p:txBody>
+          <a:bodyPr wrap="square">
+            <a:spAutoFit/>
+          </a:bodyPr>
+          <a:lstStyle/>
+          <a:p>
+            <a:pPr>
+              <a:spcAft>
+                <a:spcPts val="563"/>
+              </a:spcAft>
+              <a:defRPr sz="1400">
                 <a:solidFill>
                   <a:srgbClr val="111827"/>
                 </a:solidFill>
               </a:defRPr>
             </a:pPr>
             <a:r>
-              <a:t>✓  Tokenized receivables</a:t>
-            </a:r>
-          </a:p>
-        </p:txBody>
-      </p:sp>
-      <p:sp>
-        <p:nvSpPr>
-          <p:cNvPr id="11" name="TextBox 10"/>
-          <p:cNvSpPr txBox="1"/>
-          <p:nvPr/>
-        </p:nvSpPr>
-        <p:spPr>
-          <a:xfrm>
-            <a:off x="6309360" y="2286000"/>
-            <a:ext cx="5303520" cy="502920"/>
-          </a:xfrm>
-          <a:prstGeom prst="rect">
-            <a:avLst/>
-          </a:prstGeom>
-          <a:noFill/>
-        </p:spPr>
-        <p:txBody>
-          <a:bodyPr wrap="square">
-            <a:spAutoFit/>
-          </a:bodyPr>
-          <a:lstStyle/>
-          <a:p>
-            <a:pPr algn="l">
-              <a:defRPr sz="1400" b="0">
-                <a:solidFill>
-                  <a:srgbClr val="667085"/>
-                </a:solidFill>
-              </a:defRPr>
-            </a:pPr>
-            <a:r>
-              <a:t>ReceivableRegistry + buyer-confirmed invoices → finance-ready receivables</a:t>
-            </a:r>
-          </a:p>
-        </p:txBody>
-      </p:sp>
-      <p:sp>
-        <p:nvSpPr>
-          <p:cNvPr id="12" name="TextBox 11"/>
-          <p:cNvSpPr txBox="1"/>
-          <p:nvPr/>
-        </p:nvSpPr>
-        <p:spPr>
-          <a:xfrm>
-            <a:off x="822960" y="2999232"/>
-            <a:ext cx="5120640" cy="502920"/>
-          </a:xfrm>
-          <a:prstGeom prst="rect">
-            <a:avLst/>
-          </a:prstGeom>
-          <a:noFill/>
-        </p:spPr>
-        <p:txBody>
-          <a:bodyPr wrap="square">
-            <a:spAutoFit/>
-          </a:bodyPr>
-          <a:lstStyle/>
-          <a:p>
-            <a:pPr algn="l">
-              <a:defRPr sz="1500" b="1">
+              <a:t>Live product: credara-jet.vercel.app/workspace</a:t>
+            </a:r>
+          </a:p>
+          <a:p>
+            <a:pPr>
+              <a:spcAft>
+                <a:spcPts val="563"/>
+              </a:spcAft>
+              <a:defRPr sz="1400">
                 <a:solidFill>
                   <a:srgbClr val="111827"/>
                 </a:solidFill>
               </a:defRPr>
             </a:pPr>
             <a:r>
-              <a:t>✓  Smart contract letters of credit</a:t>
-            </a:r>
-          </a:p>
-        </p:txBody>
-      </p:sp>
-      <p:sp>
-        <p:nvSpPr>
-          <p:cNvPr id="13" name="TextBox 12"/>
-          <p:cNvSpPr txBox="1"/>
-          <p:nvPr/>
-        </p:nvSpPr>
-        <p:spPr>
-          <a:xfrm>
-            <a:off x="6309360" y="2999232"/>
-            <a:ext cx="5303520" cy="502920"/>
-          </a:xfrm>
-          <a:prstGeom prst="rect">
-            <a:avLst/>
-          </a:prstGeom>
-          <a:noFill/>
-        </p:spPr>
-        <p:txBody>
-          <a:bodyPr wrap="square">
-            <a:spAutoFit/>
-          </a:bodyPr>
-          <a:lstStyle/>
-          <a:p>
-            <a:pPr algn="l">
-              <a:defRPr sz="1400" b="0">
-                <a:solidFill>
-                  <a:srgbClr val="667085"/>
-                </a:solidFill>
-              </a:defRPr>
-            </a:pPr>
-            <a:r>
-              <a:t>SmartLCFactory / SmartLC escrow lifecycle on Amoy</a:t>
-            </a:r>
-          </a:p>
-        </p:txBody>
-      </p:sp>
-      <p:sp>
-        <p:nvSpPr>
-          <p:cNvPr id="14" name="TextBox 13"/>
-          <p:cNvSpPr txBox="1"/>
-          <p:nvPr/>
-        </p:nvSpPr>
-        <p:spPr>
-          <a:xfrm>
-            <a:off x="822960" y="3712464"/>
-            <a:ext cx="5120640" cy="502920"/>
-          </a:xfrm>
-          <a:prstGeom prst="rect">
-            <a:avLst/>
-          </a:prstGeom>
-          <a:noFill/>
-        </p:spPr>
-        <p:txBody>
-          <a:bodyPr wrap="square">
-            <a:spAutoFit/>
-          </a:bodyPr>
-          <a:lstStyle/>
-          <a:p>
-            <a:pPr algn="l">
-              <a:defRPr sz="1500" b="1">
+              <a:t>Judge Mode walks the flow in ~3 minutes</a:t>
+            </a:r>
+          </a:p>
+          <a:p>
+            <a:pPr>
+              <a:spcAft>
+                <a:spcPts val="563"/>
+              </a:spcAft>
+              <a:defRPr sz="1400">
                 <a:solidFill>
                   <a:srgbClr val="111827"/>
                 </a:solidFill>
               </a:defRPr>
             </a:pPr>
             <a:r>
-              <a:t>✓  On-chain trade credit scoring</a:t>
-            </a:r>
-          </a:p>
-        </p:txBody>
-      </p:sp>
-      <p:sp>
-        <p:nvSpPr>
-          <p:cNvPr id="15" name="TextBox 14"/>
-          <p:cNvSpPr txBox="1"/>
-          <p:nvPr/>
-        </p:nvSpPr>
-        <p:spPr>
-          <a:xfrm>
-            <a:off x="6309360" y="3712464"/>
-            <a:ext cx="5303520" cy="502920"/>
-          </a:xfrm>
-          <a:prstGeom prst="rect">
-            <a:avLst/>
-          </a:prstGeom>
-          <a:noFill/>
-        </p:spPr>
-        <p:txBody>
-          <a:bodyPr wrap="square">
-            <a:spAutoFit/>
-          </a:bodyPr>
-          <a:lstStyle/>
-          <a:p>
-            <a:pPr algn="l">
-              <a:defRPr sz="1400" b="0">
-                <a:solidFill>
-                  <a:srgbClr val="667085"/>
-                </a:solidFill>
-              </a:defRPr>
-            </a:pPr>
-            <a:r>
-              <a:t>CreditScoreAttestation + scoring workers</a:t>
-            </a:r>
-          </a:p>
-        </p:txBody>
-      </p:sp>
-      <p:sp>
-        <p:nvSpPr>
-          <p:cNvPr id="16" name="TextBox 15"/>
-          <p:cNvSpPr txBox="1"/>
-          <p:nvPr/>
-        </p:nvSpPr>
-        <p:spPr>
-          <a:xfrm>
-            <a:off x="822960" y="4425696"/>
-            <a:ext cx="5120640" cy="502920"/>
-          </a:xfrm>
-          <a:prstGeom prst="rect">
-            <a:avLst/>
-          </a:prstGeom>
-          <a:noFill/>
-        </p:spPr>
-        <p:txBody>
-          <a:bodyPr wrap="square">
-            <a:spAutoFit/>
-          </a:bodyPr>
-          <a:lstStyle/>
-          <a:p>
-            <a:pPr algn="l">
-              <a:defRPr sz="1500" b="1">
-                <a:solidFill>
-                  <a:srgbClr val="111827"/>
-                </a:solidFill>
-              </a:defRPr>
-            </a:pPr>
-            <a:r>
-              <a:t>✓  Unlock SME capital · reduce friction</a:t>
-            </a:r>
-          </a:p>
-        </p:txBody>
-      </p:sp>
-      <p:sp>
-        <p:nvSpPr>
-          <p:cNvPr id="17" name="TextBox 16"/>
-          <p:cNvSpPr txBox="1"/>
-          <p:nvPr/>
-        </p:nvSpPr>
-        <p:spPr>
-          <a:xfrm>
-            <a:off x="6309360" y="4425696"/>
-            <a:ext cx="5303520" cy="502920"/>
-          </a:xfrm>
-          <a:prstGeom prst="rect">
-            <a:avLst/>
-          </a:prstGeom>
-          <a:noFill/>
-        </p:spPr>
-        <p:txBody>
-          <a:bodyPr wrap="square">
-            <a:spAutoFit/>
-          </a:bodyPr>
-          <a:lstStyle/>
-          <a:p>
-            <a:pPr algn="l">
-              <a:defRPr sz="1400" b="0">
-                <a:solidFill>
-                  <a:srgbClr val="667085"/>
-                </a:solidFill>
-              </a:defRPr>
-            </a:pPr>
-            <a:r>
-              <a:t>Judge Mode: proof anchor → fund LC → release in stablecoin</a:t>
-            </a:r>
-          </a:p>
-        </p:txBody>
-      </p:sp>
-      <p:sp>
-        <p:nvSpPr>
-          <p:cNvPr id="18" name="Rounded Rectangle 17"/>
+              <a:t>Fail-closed: Simulated vs Anchored — no fake links</a:t>
+            </a:r>
+          </a:p>
+        </p:txBody>
+      </p:sp>
+      <p:pic>
+        <p:nvPicPr>
+          <p:cNvPr id="10" name="Picture 9" descr="polygonscan-tx.png"/>
+          <p:cNvPicPr>
+            <a:picLocks noChangeAspect="1"/>
+          </p:cNvPicPr>
+          <p:nvPr/>
+        </p:nvPicPr>
+        <p:blipFill>
+          <a:blip r:embed="rId2"/>
+          <a:stretch>
+            <a:fillRect/>
+          </a:stretch>
+        </p:blipFill>
+        <p:spPr>
+          <a:xfrm>
+            <a:off x="6400800" y="1920240"/>
+            <a:ext cx="5303520" cy="2983230"/>
+          </a:xfrm>
+          <a:prstGeom prst="rect">
+            <a:avLst/>
+          </a:prstGeom>
+        </p:spPr>
+      </p:pic>
+      <p:sp>
+        <p:nvSpPr>
+          <p:cNvPr id="11" name="Rounded Rectangle 10"/>
           <p:cNvSpPr/>
           <p:nvPr/>
         </p:nvSpPr>
         <p:spPr>
           <a:xfrm>
-            <a:off x="822960" y="5257800"/>
+            <a:off x="822960" y="5349240"/>
             <a:ext cx="10515600" cy="685800"/>
           </a:xfrm>
           <a:prstGeom prst="roundRect">
             <a:avLst/>
           </a:prstGeom>
           <a:solidFill>
-            <a:srgbClr val="F8FAFC"/>
+            <a:srgbClr val="ECFDF5"/>
           </a:solidFill>
           <a:ln>
             <a:solidFill>
-              <a:srgbClr val="E2E8F0"/>
+              <a:srgbClr val="16A34A"/>
             </a:solidFill>
           </a:ln>
         </p:spPr>
@@ -6324,13 +6879,13 @@
       </p:sp>
       <p:sp>
         <p:nvSpPr>
-          <p:cNvPr id="19" name="TextBox 18"/>
-          <p:cNvSpPr txBox="1"/>
-          <p:nvPr/>
-        </p:nvSpPr>
-        <p:spPr>
-          <a:xfrm>
-            <a:off x="960120" y="5394960"/>
+          <p:cNvPr id="12" name="TextBox 11"/>
+          <p:cNvSpPr txBox="1"/>
+          <p:nvPr/>
+        </p:nvSpPr>
+        <p:spPr>
+          <a:xfrm>
+            <a:off x="960120" y="5486400"/>
             <a:ext cx="10241280" cy="457200"/>
           </a:xfrm>
           <a:prstGeom prst="rect">
@@ -6345,14 +6900,14 @@
           <a:lstStyle/>
           <a:p>
             <a:pPr algn="l">
-              <a:defRPr sz="1300" b="0">
-                <a:solidFill>
-                  <a:srgbClr val="111827"/>
-                </a:solidFill>
-              </a:defRPr>
-            </a:pPr>
-            <a:r>
-              <a:t>Problem #2 (POS / tourist wallets) is out of MVP scope — same settlement rails are PTSR-ready for licensed AED stablecoin B2B use.</a:t>
+              <a:defRPr sz="1100" b="1">
+                <a:solidFill>
+                  <a:srgbClr val="16A34A"/>
+                </a:solidFill>
+              </a:defRPr>
+            </a:pPr>
+            <a:r>
+              <a:t>Verified release tx: https://amoy.polygonscan.com/tx/0x5743a885e54063da6c4056d73e4b49113918558fd09d8973c9074de8e57af9de</a:t>
             </a:r>
           </a:p>
         </p:txBody>
@@ -6413,7 +6968,7 @@
               </a:defRPr>
             </a:pPr>
             <a:r>
-              <a:t>JUDGING CRITERIA</a:t>
+              <a:t>BEFORE · AFTER</a:t>
             </a:r>
           </a:p>
         </p:txBody>
@@ -6448,7 +7003,7 @@
               </a:defRPr>
             </a:pPr>
             <a:r>
-              <a:t>How Credara maps to what the panel scores</a:t>
+              <a:t>Collapse 7–10 day LC friction → same-day proof-to-funding</a:t>
             </a:r>
           </a:p>
         </p:txBody>
@@ -6611,14 +7166,407 @@
       </p:sp>
       <p:sp>
         <p:nvSpPr>
-          <p:cNvPr id="8" name="Rounded Rectangle 7"/>
+          <p:cNvPr id="8" name="TextBox 7"/>
+          <p:cNvSpPr txBox="1"/>
+          <p:nvPr/>
+        </p:nvSpPr>
+        <p:spPr>
+          <a:xfrm>
+            <a:off x="822960" y="1874519"/>
+            <a:ext cx="5029200" cy="365760"/>
+          </a:xfrm>
+          <a:prstGeom prst="rect">
+            <a:avLst/>
+          </a:prstGeom>
+          <a:noFill/>
+        </p:spPr>
+        <p:txBody>
+          <a:bodyPr wrap="square">
+            <a:spAutoFit/>
+          </a:bodyPr>
+          <a:lstStyle/>
+          <a:p>
+            <a:pPr algn="l">
+              <a:defRPr sz="1400" b="1">
+                <a:solidFill>
+                  <a:srgbClr val="667085"/>
+                </a:solidFill>
+              </a:defRPr>
+            </a:pPr>
+            <a:r>
+              <a:t>Traditional bank LC</a:t>
+            </a:r>
+          </a:p>
+        </p:txBody>
+      </p:sp>
+      <p:sp>
+        <p:nvSpPr>
+          <p:cNvPr id="9" name="TextBox 8"/>
+          <p:cNvSpPr txBox="1"/>
+          <p:nvPr/>
+        </p:nvSpPr>
+        <p:spPr>
+          <a:xfrm>
+            <a:off x="822960" y="2286000"/>
+            <a:ext cx="5029200" cy="411480"/>
+          </a:xfrm>
+          <a:prstGeom prst="rect">
+            <a:avLst/>
+          </a:prstGeom>
+          <a:noFill/>
+        </p:spPr>
+        <p:txBody>
+          <a:bodyPr wrap="square">
+            <a:spAutoFit/>
+          </a:bodyPr>
+          <a:lstStyle/>
+          <a:p>
+            <a:pPr algn="l">
+              <a:defRPr sz="1500" b="0">
+                <a:solidFill>
+                  <a:srgbClr val="667085"/>
+                </a:solidFill>
+              </a:defRPr>
+            </a:pPr>
+            <a:r>
+              <a:t>✗  7–10 days manual processing</a:t>
+            </a:r>
+          </a:p>
+        </p:txBody>
+      </p:sp>
+      <p:sp>
+        <p:nvSpPr>
+          <p:cNvPr id="10" name="TextBox 9"/>
+          <p:cNvSpPr txBox="1"/>
+          <p:nvPr/>
+        </p:nvSpPr>
+        <p:spPr>
+          <a:xfrm>
+            <a:off x="822960" y="2852928"/>
+            <a:ext cx="5029200" cy="411480"/>
+          </a:xfrm>
+          <a:prstGeom prst="rect">
+            <a:avLst/>
+          </a:prstGeom>
+          <a:noFill/>
+        </p:spPr>
+        <p:txBody>
+          <a:bodyPr wrap="square">
+            <a:spAutoFit/>
+          </a:bodyPr>
+          <a:lstStyle/>
+          <a:p>
+            <a:pPr algn="l">
+              <a:defRPr sz="1500" b="0">
+                <a:solidFill>
+                  <a:srgbClr val="667085"/>
+                </a:solidFill>
+              </a:defRPr>
+            </a:pPr>
+            <a:r>
+              <a:t>✗  Paper trails banks can't verify fast</a:t>
+            </a:r>
+          </a:p>
+        </p:txBody>
+      </p:sp>
+      <p:sp>
+        <p:nvSpPr>
+          <p:cNvPr id="11" name="TextBox 10"/>
+          <p:cNvSpPr txBox="1"/>
+          <p:nvPr/>
+        </p:nvSpPr>
+        <p:spPr>
+          <a:xfrm>
+            <a:off x="822960" y="3419856"/>
+            <a:ext cx="5029200" cy="411480"/>
+          </a:xfrm>
+          <a:prstGeom prst="rect">
+            <a:avLst/>
+          </a:prstGeom>
+          <a:noFill/>
+        </p:spPr>
+        <p:txBody>
+          <a:bodyPr wrap="square">
+            <a:spAutoFit/>
+          </a:bodyPr>
+          <a:lstStyle/>
+          <a:p>
+            <a:pPr algn="l">
+              <a:defRPr sz="1500" b="0">
+                <a:solidFill>
+                  <a:srgbClr val="667085"/>
+                </a:solidFill>
+              </a:defRPr>
+            </a:pPr>
+            <a:r>
+              <a:t>✗  ~40% SME applications rejected</a:t>
+            </a:r>
+          </a:p>
+        </p:txBody>
+      </p:sp>
+      <p:sp>
+        <p:nvSpPr>
+          <p:cNvPr id="12" name="TextBox 11"/>
+          <p:cNvSpPr txBox="1"/>
+          <p:nvPr/>
+        </p:nvSpPr>
+        <p:spPr>
+          <a:xfrm>
+            <a:off x="822960" y="3986784"/>
+            <a:ext cx="5029200" cy="411480"/>
+          </a:xfrm>
+          <a:prstGeom prst="rect">
+            <a:avLst/>
+          </a:prstGeom>
+          <a:noFill/>
+        </p:spPr>
+        <p:txBody>
+          <a:bodyPr wrap="square">
+            <a:spAutoFit/>
+          </a:bodyPr>
+          <a:lstStyle/>
+          <a:p>
+            <a:pPr algn="l">
+              <a:defRPr sz="1500" b="0">
+                <a:solidFill>
+                  <a:srgbClr val="667085"/>
+                </a:solidFill>
+              </a:defRPr>
+            </a:pPr>
+            <a:r>
+              <a:t>✗  Supplier waits 45–90 days to get paid</a:t>
+            </a:r>
+          </a:p>
+        </p:txBody>
+      </p:sp>
+      <p:sp>
+        <p:nvSpPr>
+          <p:cNvPr id="13" name="TextBox 12"/>
+          <p:cNvSpPr txBox="1"/>
+          <p:nvPr/>
+        </p:nvSpPr>
+        <p:spPr>
+          <a:xfrm>
+            <a:off x="6400800" y="1874519"/>
+            <a:ext cx="5029200" cy="365760"/>
+          </a:xfrm>
+          <a:prstGeom prst="rect">
+            <a:avLst/>
+          </a:prstGeom>
+          <a:noFill/>
+        </p:spPr>
+        <p:txBody>
+          <a:bodyPr wrap="square">
+            <a:spAutoFit/>
+          </a:bodyPr>
+          <a:lstStyle/>
+          <a:p>
+            <a:pPr algn="l">
+              <a:defRPr sz="1400" b="1">
+                <a:solidFill>
+                  <a:srgbClr val="2563EB"/>
+                </a:solidFill>
+              </a:defRPr>
+            </a:pPr>
+            <a:r>
+              <a:t>Credara (live today)</a:t>
+            </a:r>
+          </a:p>
+        </p:txBody>
+      </p:sp>
+      <p:sp>
+        <p:nvSpPr>
+          <p:cNvPr id="14" name="TextBox 13"/>
+          <p:cNvSpPr txBox="1"/>
+          <p:nvPr/>
+        </p:nvSpPr>
+        <p:spPr>
+          <a:xfrm>
+            <a:off x="6400800" y="2286000"/>
+            <a:ext cx="5029200" cy="411480"/>
+          </a:xfrm>
+          <a:prstGeom prst="rect">
+            <a:avLst/>
+          </a:prstGeom>
+          <a:noFill/>
+        </p:spPr>
+        <p:txBody>
+          <a:bodyPr wrap="square">
+            <a:spAutoFit/>
+          </a:bodyPr>
+          <a:lstStyle/>
+          <a:p>
+            <a:pPr algn="l">
+              <a:defRPr sz="1500" b="1">
+                <a:solidFill>
+                  <a:srgbClr val="111827"/>
+                </a:solidFill>
+              </a:defRPr>
+            </a:pPr>
+            <a:r>
+              <a:t>✓  Buyer confirms + delivery proof verified</a:t>
+            </a:r>
+          </a:p>
+        </p:txBody>
+      </p:sp>
+      <p:sp>
+        <p:nvSpPr>
+          <p:cNvPr id="15" name="TextBox 14"/>
+          <p:cNvSpPr txBox="1"/>
+          <p:nvPr/>
+        </p:nvSpPr>
+        <p:spPr>
+          <a:xfrm>
+            <a:off x="6400800" y="2852928"/>
+            <a:ext cx="5029200" cy="411480"/>
+          </a:xfrm>
+          <a:prstGeom prst="rect">
+            <a:avLst/>
+          </a:prstGeom>
+          <a:noFill/>
+        </p:spPr>
+        <p:txBody>
+          <a:bodyPr wrap="square">
+            <a:spAutoFit/>
+          </a:bodyPr>
+          <a:lstStyle/>
+          <a:p>
+            <a:pPr algn="l">
+              <a:defRPr sz="1500" b="1">
+                <a:solidFill>
+                  <a:srgbClr val="111827"/>
+                </a:solidFill>
+              </a:defRPr>
+            </a:pPr>
+            <a:r>
+              <a:t>✓  Proof hash anchored on Polygon</a:t>
+            </a:r>
+          </a:p>
+        </p:txBody>
+      </p:sp>
+      <p:sp>
+        <p:nvSpPr>
+          <p:cNvPr id="16" name="TextBox 15"/>
+          <p:cNvSpPr txBox="1"/>
+          <p:nvPr/>
+        </p:nvSpPr>
+        <p:spPr>
+          <a:xfrm>
+            <a:off x="6400800" y="3419856"/>
+            <a:ext cx="5029200" cy="411480"/>
+          </a:xfrm>
+          <a:prstGeom prst="rect">
+            <a:avLst/>
+          </a:prstGeom>
+          <a:noFill/>
+        </p:spPr>
+        <p:txBody>
+          <a:bodyPr wrap="square">
+            <a:spAutoFit/>
+          </a:bodyPr>
+          <a:lstStyle/>
+          <a:p>
+            <a:pPr algn="l">
+              <a:defRPr sz="1500" b="1">
+                <a:solidFill>
+                  <a:srgbClr val="111827"/>
+                </a:solidFill>
+              </a:defRPr>
+            </a:pPr>
+            <a:r>
+              <a:t>✓  Financier funds Smart LC escrow</a:t>
+            </a:r>
+          </a:p>
+        </p:txBody>
+      </p:sp>
+      <p:sp>
+        <p:nvSpPr>
+          <p:cNvPr id="17" name="TextBox 16"/>
+          <p:cNvSpPr txBox="1"/>
+          <p:nvPr/>
+        </p:nvSpPr>
+        <p:spPr>
+          <a:xfrm>
+            <a:off x="6400800" y="3986784"/>
+            <a:ext cx="5029200" cy="411480"/>
+          </a:xfrm>
+          <a:prstGeom prst="rect">
+            <a:avLst/>
+          </a:prstGeom>
+          <a:noFill/>
+        </p:spPr>
+        <p:txBody>
+          <a:bodyPr wrap="square">
+            <a:spAutoFit/>
+          </a:bodyPr>
+          <a:lstStyle/>
+          <a:p>
+            <a:pPr algn="l">
+              <a:defRPr sz="1500" b="1">
+                <a:solidFill>
+                  <a:srgbClr val="111827"/>
+                </a:solidFill>
+              </a:defRPr>
+            </a:pPr>
+            <a:r>
+              <a:t>✓  Stablecoin released same day after verify</a:t>
+            </a:r>
+          </a:p>
+        </p:txBody>
+      </p:sp>
+      <p:sp>
+        <p:nvSpPr>
+          <p:cNvPr id="18" name="Rectangle 17"/>
           <p:cNvSpPr/>
           <p:nvPr/>
         </p:nvSpPr>
         <p:spPr>
           <a:xfrm>
-            <a:off x="822960" y="1965960"/>
-            <a:ext cx="5120640" cy="1691640"/>
+            <a:off x="6172200" y="1783080"/>
+            <a:ext cx="45720" cy="4114800"/>
+          </a:xfrm>
+          <a:prstGeom prst="rect">
+            <a:avLst/>
+          </a:prstGeom>
+          <a:solidFill>
+            <a:srgbClr val="E7EAF1"/>
+          </a:solidFill>
+          <a:ln>
+            <a:noFill/>
+          </a:ln>
+        </p:spPr>
+        <p:style>
+          <a:lnRef idx="1">
+            <a:schemeClr val="accent1"/>
+          </a:lnRef>
+          <a:fillRef idx="3">
+            <a:schemeClr val="accent1"/>
+          </a:fillRef>
+          <a:effectRef idx="2">
+            <a:schemeClr val="accent1"/>
+          </a:effectRef>
+          <a:fontRef idx="minor">
+            <a:schemeClr val="lt1"/>
+          </a:fontRef>
+        </p:style>
+        <p:txBody>
+          <a:bodyPr rtlCol="0" anchor="ctr"/>
+          <a:lstStyle/>
+          <a:p>
+            <a:pPr algn="ctr"/>
+          </a:p>
+        </p:txBody>
+      </p:sp>
+      <p:sp>
+        <p:nvSpPr>
+          <p:cNvPr id="19" name="Rounded Rectangle 18"/>
+          <p:cNvSpPr/>
+          <p:nvPr/>
+        </p:nvSpPr>
+        <p:spPr>
+          <a:xfrm>
+            <a:off x="822960" y="4892040"/>
+            <a:ext cx="2377440" cy="960120"/>
           </a:xfrm>
           <a:prstGeom prst="roundRect">
             <a:avLst/>
@@ -6656,14 +7604,14 @@
       </p:sp>
       <p:sp>
         <p:nvSpPr>
-          <p:cNvPr id="9" name="TextBox 8"/>
-          <p:cNvSpPr txBox="1"/>
-          <p:nvPr/>
-        </p:nvSpPr>
-        <p:spPr>
-          <a:xfrm>
-            <a:off x="960120" y="2103120"/>
-            <a:ext cx="4846320" cy="365760"/>
+          <p:cNvPr id="20" name="TextBox 19"/>
+          <p:cNvSpPr txBox="1"/>
+          <p:nvPr/>
+        </p:nvSpPr>
+        <p:spPr>
+          <a:xfrm>
+            <a:off x="960120" y="5001768"/>
+            <a:ext cx="2103120" cy="502920"/>
           </a:xfrm>
           <a:prstGeom prst="rect">
             <a:avLst/>
@@ -6677,28 +7625,28 @@
           <a:lstStyle/>
           <a:p>
             <a:pPr algn="l">
-              <a:defRPr sz="1500" b="1">
+              <a:defRPr sz="2200" b="1">
                 <a:solidFill>
                   <a:srgbClr val="2563EB"/>
                 </a:solidFill>
               </a:defRPr>
             </a:pPr>
             <a:r>
-              <a:t>Innovation</a:t>
-            </a:r>
-          </a:p>
-        </p:txBody>
-      </p:sp>
-      <p:sp>
-        <p:nvSpPr>
-          <p:cNvPr id="10" name="TextBox 9"/>
-          <p:cNvSpPr txBox="1"/>
-          <p:nvPr/>
-        </p:nvSpPr>
-        <p:spPr>
-          <a:xfrm>
-            <a:off x="960120" y="2468880"/>
-            <a:ext cx="4846320" cy="1005840"/>
+              <a:t>7–10 days</a:t>
+            </a:r>
+          </a:p>
+        </p:txBody>
+      </p:sp>
+      <p:sp>
+        <p:nvSpPr>
+          <p:cNvPr id="21" name="TextBox 20"/>
+          <p:cNvSpPr txBox="1"/>
+          <p:nvPr/>
+        </p:nvSpPr>
+        <p:spPr>
+          <a:xfrm>
+            <a:off x="960120" y="5458968"/>
+            <a:ext cx="2103120" cy="411480"/>
           </a:xfrm>
           <a:prstGeom prst="rect">
             <a:avLst/>
@@ -6712,28 +7660,28 @@
           <a:lstStyle/>
           <a:p>
             <a:pPr algn="l">
-              <a:defRPr sz="1300" b="0">
-                <a:solidFill>
-                  <a:srgbClr val="111827"/>
-                </a:solidFill>
-              </a:defRPr>
-            </a:pPr>
-            <a:r>
-              <a:t>Smart LC + proof anchoring + receivables in one UAE corridor stack</a:t>
-            </a:r>
-          </a:p>
-        </p:txBody>
-      </p:sp>
-      <p:sp>
-        <p:nvSpPr>
-          <p:cNvPr id="11" name="Rounded Rectangle 10"/>
+              <a:defRPr sz="1100" b="0">
+                <a:solidFill>
+                  <a:srgbClr val="667085"/>
+                </a:solidFill>
+              </a:defRPr>
+            </a:pPr>
+            <a:r>
+              <a:t>Bank LC</a:t>
+            </a:r>
+          </a:p>
+        </p:txBody>
+      </p:sp>
+      <p:sp>
+        <p:nvSpPr>
+          <p:cNvPr id="22" name="Rounded Rectangle 21"/>
           <p:cNvSpPr/>
           <p:nvPr/>
         </p:nvSpPr>
         <p:spPr>
           <a:xfrm>
-            <a:off x="6309360" y="1965960"/>
-            <a:ext cx="5120640" cy="1691640"/>
+            <a:off x="3337560" y="4892040"/>
+            <a:ext cx="2377440" cy="960120"/>
           </a:xfrm>
           <a:prstGeom prst="roundRect">
             <a:avLst/>
@@ -6771,14 +7719,14 @@
       </p:sp>
       <p:sp>
         <p:nvSpPr>
-          <p:cNvPr id="12" name="TextBox 11"/>
-          <p:cNvSpPr txBox="1"/>
-          <p:nvPr/>
-        </p:nvSpPr>
-        <p:spPr>
-          <a:xfrm>
-            <a:off x="6446520" y="2103120"/>
-            <a:ext cx="4846320" cy="365760"/>
+          <p:cNvPr id="23" name="TextBox 22"/>
+          <p:cNvSpPr txBox="1"/>
+          <p:nvPr/>
+        </p:nvSpPr>
+        <p:spPr>
+          <a:xfrm>
+            <a:off x="3474720" y="5001768"/>
+            <a:ext cx="2103120" cy="502920"/>
           </a:xfrm>
           <a:prstGeom prst="rect">
             <a:avLst/>
@@ -6792,28 +7740,28 @@
           <a:lstStyle/>
           <a:p>
             <a:pPr algn="l">
-              <a:defRPr sz="1500" b="1">
+              <a:defRPr sz="2200" b="1">
                 <a:solidFill>
                   <a:srgbClr val="2563EB"/>
                 </a:solidFill>
               </a:defRPr>
             </a:pPr>
             <a:r>
-              <a:t>Technical excellence</a:t>
-            </a:r>
-          </a:p>
-        </p:txBody>
-      </p:sp>
-      <p:sp>
-        <p:nvSpPr>
-          <p:cNvPr id="13" name="TextBox 12"/>
-          <p:cNvSpPr txBox="1"/>
-          <p:nvPr/>
-        </p:nvSpPr>
-        <p:spPr>
-          <a:xfrm>
-            <a:off x="6446520" y="2468880"/>
-            <a:ext cx="4846320" cy="1005840"/>
+              <a:t>45–90 days</a:t>
+            </a:r>
+          </a:p>
+        </p:txBody>
+      </p:sp>
+      <p:sp>
+        <p:nvSpPr>
+          <p:cNvPr id="24" name="TextBox 23"/>
+          <p:cNvSpPr txBox="1"/>
+          <p:nvPr/>
+        </p:nvSpPr>
+        <p:spPr>
+          <a:xfrm>
+            <a:off x="3474720" y="5458968"/>
+            <a:ext cx="2103120" cy="411480"/>
           </a:xfrm>
           <a:prstGeom prst="rect">
             <a:avLst/>
@@ -6827,28 +7775,28 @@
           <a:lstStyle/>
           <a:p>
             <a:pPr algn="l">
-              <a:defRPr sz="1300" b="0">
-                <a:solidFill>
-                  <a:srgbClr val="111827"/>
-                </a:solidFill>
-              </a:defRPr>
-            </a:pPr>
-            <a:r>
-              <a:t>Slither CI, fail-closed chain, live deploy, role-separated contracts</a:t>
-            </a:r>
-          </a:p>
-        </p:txBody>
-      </p:sp>
-      <p:sp>
-        <p:nvSpPr>
-          <p:cNvPr id="14" name="Rounded Rectangle 13"/>
+              <a:defRPr sz="1100" b="0">
+                <a:solidFill>
+                  <a:srgbClr val="667085"/>
+                </a:solidFill>
+              </a:defRPr>
+            </a:pPr>
+            <a:r>
+              <a:t>SME wait</a:t>
+            </a:r>
+          </a:p>
+        </p:txBody>
+      </p:sp>
+      <p:sp>
+        <p:nvSpPr>
+          <p:cNvPr id="25" name="Rounded Rectangle 24"/>
           <p:cNvSpPr/>
           <p:nvPr/>
         </p:nvSpPr>
         <p:spPr>
           <a:xfrm>
-            <a:off x="822960" y="3977639"/>
-            <a:ext cx="5120640" cy="1691640"/>
+            <a:off x="5852160" y="4892040"/>
+            <a:ext cx="2377440" cy="960120"/>
           </a:xfrm>
           <a:prstGeom prst="roundRect">
             <a:avLst/>
@@ -6886,14 +7834,14 @@
       </p:sp>
       <p:sp>
         <p:nvSpPr>
-          <p:cNvPr id="15" name="TextBox 14"/>
-          <p:cNvSpPr txBox="1"/>
-          <p:nvPr/>
-        </p:nvSpPr>
-        <p:spPr>
-          <a:xfrm>
-            <a:off x="960120" y="4114800"/>
-            <a:ext cx="4846320" cy="365760"/>
+          <p:cNvPr id="26" name="TextBox 25"/>
+          <p:cNvSpPr txBox="1"/>
+          <p:nvPr/>
+        </p:nvSpPr>
+        <p:spPr>
+          <a:xfrm>
+            <a:off x="5989320" y="5001768"/>
+            <a:ext cx="2103120" cy="502920"/>
           </a:xfrm>
           <a:prstGeom prst="rect">
             <a:avLst/>
@@ -6907,28 +7855,28 @@
           <a:lstStyle/>
           <a:p>
             <a:pPr algn="l">
-              <a:defRPr sz="1500" b="1">
+              <a:defRPr sz="2200" b="1">
                 <a:solidFill>
                   <a:srgbClr val="2563EB"/>
                 </a:solidFill>
               </a:defRPr>
             </a:pPr>
             <a:r>
-              <a:t>User experience</a:t>
-            </a:r>
-          </a:p>
-        </p:txBody>
-      </p:sp>
-      <p:sp>
-        <p:nvSpPr>
-          <p:cNvPr id="16" name="TextBox 15"/>
-          <p:cNvSpPr txBox="1"/>
-          <p:nvPr/>
-        </p:nvSpPr>
-        <p:spPr>
-          <a:xfrm>
-            <a:off x="960120" y="4480559"/>
-            <a:ext cx="4846320" cy="1005840"/>
+              <a:t>Same day</a:t>
+            </a:r>
+          </a:p>
+        </p:txBody>
+      </p:sp>
+      <p:sp>
+        <p:nvSpPr>
+          <p:cNvPr id="27" name="TextBox 26"/>
+          <p:cNvSpPr txBox="1"/>
+          <p:nvPr/>
+        </p:nvSpPr>
+        <p:spPr>
+          <a:xfrm>
+            <a:off x="5989320" y="5458968"/>
+            <a:ext cx="2103120" cy="411480"/>
           </a:xfrm>
           <a:prstGeom prst="rect">
             <a:avLst/>
@@ -6942,28 +7890,28 @@
           <a:lstStyle/>
           <a:p>
             <a:pPr algn="l">
-              <a:defRPr sz="1300" b="0">
-                <a:solidFill>
-                  <a:srgbClr val="111827"/>
-                </a:solidFill>
-              </a:defRPr>
-            </a:pPr>
-            <a:r>
-              <a:t>4 enterprise workspaces + 3-min Judge Mode guided demo</a:t>
-            </a:r>
-          </a:p>
-        </p:txBody>
-      </p:sp>
-      <p:sp>
-        <p:nvSpPr>
-          <p:cNvPr id="17" name="Rounded Rectangle 16"/>
+              <a:defRPr sz="1100" b="0">
+                <a:solidFill>
+                  <a:srgbClr val="667085"/>
+                </a:solidFill>
+              </a:defRPr>
+            </a:pPr>
+            <a:r>
+              <a:t>Proof-to-fund</a:t>
+            </a:r>
+          </a:p>
+        </p:txBody>
+      </p:sp>
+      <p:sp>
+        <p:nvSpPr>
+          <p:cNvPr id="28" name="Rounded Rectangle 27"/>
           <p:cNvSpPr/>
           <p:nvPr/>
         </p:nvSpPr>
         <p:spPr>
           <a:xfrm>
-            <a:off x="6309360" y="3977639"/>
-            <a:ext cx="5120640" cy="1691640"/>
+            <a:off x="8366760" y="4892040"/>
+            <a:ext cx="2377440" cy="960120"/>
           </a:xfrm>
           <a:prstGeom prst="roundRect">
             <a:avLst/>
@@ -7001,14 +7949,14 @@
       </p:sp>
       <p:sp>
         <p:nvSpPr>
-          <p:cNvPr id="18" name="TextBox 17"/>
-          <p:cNvSpPr txBox="1"/>
-          <p:nvPr/>
-        </p:nvSpPr>
-        <p:spPr>
-          <a:xfrm>
-            <a:off x="6446520" y="4114800"/>
-            <a:ext cx="4846320" cy="365760"/>
+          <p:cNvPr id="29" name="TextBox 28"/>
+          <p:cNvSpPr txBox="1"/>
+          <p:nvPr/>
+        </p:nvSpPr>
+        <p:spPr>
+          <a:xfrm>
+            <a:off x="8503920" y="5001768"/>
+            <a:ext cx="2103120" cy="502920"/>
           </a:xfrm>
           <a:prstGeom prst="rect">
             <a:avLst/>
@@ -7022,28 +7970,28 @@
           <a:lstStyle/>
           <a:p>
             <a:pPr algn="l">
-              <a:defRPr sz="1500" b="1">
+              <a:defRPr sz="2200" b="1">
                 <a:solidFill>
                   <a:srgbClr val="2563EB"/>
                 </a:solidFill>
               </a:defRPr>
             </a:pPr>
             <a:r>
-              <a:t>Real-world impact</a:t>
-            </a:r>
-          </a:p>
-        </p:txBody>
-      </p:sp>
-      <p:sp>
-        <p:nvSpPr>
-          <p:cNvPr id="19" name="TextBox 18"/>
-          <p:cNvSpPr txBox="1"/>
-          <p:nvPr/>
-        </p:nvSpPr>
-        <p:spPr>
-          <a:xfrm>
-            <a:off x="6446520" y="4480559"/>
-            <a:ext cx="4846320" cy="1005840"/>
+              <a:t>3 min</a:t>
+            </a:r>
+          </a:p>
+        </p:txBody>
+      </p:sp>
+      <p:sp>
+        <p:nvSpPr>
+          <p:cNvPr id="30" name="TextBox 29"/>
+          <p:cNvSpPr txBox="1"/>
+          <p:nvPr/>
+        </p:nvSpPr>
+        <p:spPr>
+          <a:xfrm>
+            <a:off x="8503920" y="5458968"/>
+            <a:ext cx="2103120" cy="411480"/>
           </a:xfrm>
           <a:prstGeom prst="rect">
             <a:avLst/>
@@ -7057,14 +8005,14 @@
           <a:lstStyle/>
           <a:p>
             <a:pPr algn="l">
-              <a:defRPr sz="1300" b="0">
-                <a:solidFill>
-                  <a:srgbClr val="111827"/>
-                </a:solidFill>
-              </a:defRPr>
-            </a:pPr>
-            <a:r>
-              <a:t>$2T gap · 40% SME rejection · Jebel Ali 15M+ TEUs — suppliers paid faster</a:t>
+              <a:defRPr sz="1100" b="0">
+                <a:solidFill>
+                  <a:srgbClr val="667085"/>
+                </a:solidFill>
+              </a:defRPr>
+            </a:pPr>
+            <a:r>
+              <a:t>Judge Mode demo</a:t>
             </a:r>
           </a:p>
         </p:txBody>
@@ -7125,7 +8073,7 @@
               </a:defRPr>
             </a:pPr>
             <a:r>
-              <a:t>PROBLEM</a:t>
+              <a:t>CHALLENGE FIT</a:t>
             </a:r>
           </a:p>
         </p:txBody>
@@ -7160,7 +8108,7 @@
               </a:defRPr>
             </a:pPr>
             <a:r>
-              <a:t>SMEs wait months to get paid on goods already delivered</a:t>
+              <a:t>Built exactly what Problem #1 asks for — on Polygon, live today</a:t>
             </a:r>
           </a:p>
         </p:txBody>
@@ -7329,92 +8277,424 @@
         </p:nvSpPr>
         <p:spPr>
           <a:xfrm>
-            <a:off x="822960" y="2011680"/>
-            <a:ext cx="10515600" cy="4114800"/>
-          </a:xfrm>
-          <a:prstGeom prst="rect">
-            <a:avLst/>
-          </a:prstGeom>
-          <a:noFill/>
-        </p:spPr>
-        <p:txBody>
-          <a:bodyPr wrap="square">
-            <a:spAutoFit/>
-          </a:bodyPr>
-          <a:lstStyle/>
-          <a:p>
-            <a:pPr>
-              <a:spcAft>
-                <a:spcPts val="724"/>
-              </a:spcAft>
-              <a:defRPr sz="1800">
+            <a:off x="822960" y="1874519"/>
+            <a:ext cx="5303520" cy="365760"/>
+          </a:xfrm>
+          <a:prstGeom prst="rect">
+            <a:avLst/>
+          </a:prstGeom>
+          <a:noFill/>
+        </p:spPr>
+        <p:txBody>
+          <a:bodyPr wrap="square">
+            <a:spAutoFit/>
+          </a:bodyPr>
+          <a:lstStyle/>
+          <a:p>
+            <a:pPr algn="l">
+              <a:defRPr sz="1200" b="1">
+                <a:solidFill>
+                  <a:srgbClr val="2563EB"/>
+                </a:solidFill>
+              </a:defRPr>
+            </a:pPr>
+            <a:r>
+              <a:t>Hackathon requirement</a:t>
+            </a:r>
+          </a:p>
+        </p:txBody>
+      </p:sp>
+      <p:sp>
+        <p:nvSpPr>
+          <p:cNvPr id="9" name="TextBox 8"/>
+          <p:cNvSpPr txBox="1"/>
+          <p:nvPr/>
+        </p:nvSpPr>
+        <p:spPr>
+          <a:xfrm>
+            <a:off x="6309360" y="1874519"/>
+            <a:ext cx="5303520" cy="365760"/>
+          </a:xfrm>
+          <a:prstGeom prst="rect">
+            <a:avLst/>
+          </a:prstGeom>
+          <a:noFill/>
+        </p:spPr>
+        <p:txBody>
+          <a:bodyPr wrap="square">
+            <a:spAutoFit/>
+          </a:bodyPr>
+          <a:lstStyle/>
+          <a:p>
+            <a:pPr algn="l">
+              <a:defRPr sz="1200" b="1">
+                <a:solidFill>
+                  <a:srgbClr val="16A34A"/>
+                </a:solidFill>
+              </a:defRPr>
+            </a:pPr>
+            <a:r>
+              <a:t>Credara (shipped)</a:t>
+            </a:r>
+          </a:p>
+        </p:txBody>
+      </p:sp>
+      <p:sp>
+        <p:nvSpPr>
+          <p:cNvPr id="10" name="TextBox 9"/>
+          <p:cNvSpPr txBox="1"/>
+          <p:nvPr/>
+        </p:nvSpPr>
+        <p:spPr>
+          <a:xfrm>
+            <a:off x="822960" y="2286000"/>
+            <a:ext cx="5120640" cy="502920"/>
+          </a:xfrm>
+          <a:prstGeom prst="rect">
+            <a:avLst/>
+          </a:prstGeom>
+          <a:noFill/>
+        </p:spPr>
+        <p:txBody>
+          <a:bodyPr wrap="square">
+            <a:spAutoFit/>
+          </a:bodyPr>
+          <a:lstStyle/>
+          <a:p>
+            <a:pPr algn="l">
+              <a:defRPr sz="1500" b="1">
                 <a:solidFill>
                   <a:srgbClr val="111827"/>
                 </a:solidFill>
               </a:defRPr>
             </a:pPr>
             <a:r>
-              <a:t>$2T+ global trade finance gap — demand unfilled or priced out</a:t>
-            </a:r>
-          </a:p>
-          <a:p>
-            <a:pPr>
-              <a:spcAft>
-                <a:spcPts val="724"/>
-              </a:spcAft>
-              <a:defRPr sz="1800">
+              <a:t>✓  Tokenized receivables</a:t>
+            </a:r>
+          </a:p>
+        </p:txBody>
+      </p:sp>
+      <p:sp>
+        <p:nvSpPr>
+          <p:cNvPr id="11" name="TextBox 10"/>
+          <p:cNvSpPr txBox="1"/>
+          <p:nvPr/>
+        </p:nvSpPr>
+        <p:spPr>
+          <a:xfrm>
+            <a:off x="6309360" y="2286000"/>
+            <a:ext cx="5303520" cy="502920"/>
+          </a:xfrm>
+          <a:prstGeom prst="rect">
+            <a:avLst/>
+          </a:prstGeom>
+          <a:noFill/>
+        </p:spPr>
+        <p:txBody>
+          <a:bodyPr wrap="square">
+            <a:spAutoFit/>
+          </a:bodyPr>
+          <a:lstStyle/>
+          <a:p>
+            <a:pPr algn="l">
+              <a:defRPr sz="1400" b="0">
+                <a:solidFill>
+                  <a:srgbClr val="667085"/>
+                </a:solidFill>
+              </a:defRPr>
+            </a:pPr>
+            <a:r>
+              <a:t>ReceivableRegistry + buyer-confirmed invoices → finance-ready receivables</a:t>
+            </a:r>
+          </a:p>
+        </p:txBody>
+      </p:sp>
+      <p:sp>
+        <p:nvSpPr>
+          <p:cNvPr id="12" name="TextBox 11"/>
+          <p:cNvSpPr txBox="1"/>
+          <p:nvPr/>
+        </p:nvSpPr>
+        <p:spPr>
+          <a:xfrm>
+            <a:off x="822960" y="2999232"/>
+            <a:ext cx="5120640" cy="502920"/>
+          </a:xfrm>
+          <a:prstGeom prst="rect">
+            <a:avLst/>
+          </a:prstGeom>
+          <a:noFill/>
+        </p:spPr>
+        <p:txBody>
+          <a:bodyPr wrap="square">
+            <a:spAutoFit/>
+          </a:bodyPr>
+          <a:lstStyle/>
+          <a:p>
+            <a:pPr algn="l">
+              <a:defRPr sz="1500" b="1">
                 <a:solidFill>
                   <a:srgbClr val="111827"/>
                 </a:solidFill>
               </a:defRPr>
             </a:pPr>
             <a:r>
-              <a:t>~40% of SME trade-finance applications rejected (weak evidence, not weak fundamentals)</a:t>
-            </a:r>
-          </a:p>
-          <a:p>
-            <a:pPr>
-              <a:spcAft>
-                <a:spcPts val="724"/>
-              </a:spcAft>
-              <a:defRPr sz="1800">
+              <a:t>✓  Smart contract letters of credit</a:t>
+            </a:r>
+          </a:p>
+        </p:txBody>
+      </p:sp>
+      <p:sp>
+        <p:nvSpPr>
+          <p:cNvPr id="13" name="TextBox 12"/>
+          <p:cNvSpPr txBox="1"/>
+          <p:nvPr/>
+        </p:nvSpPr>
+        <p:spPr>
+          <a:xfrm>
+            <a:off x="6309360" y="2999232"/>
+            <a:ext cx="5303520" cy="502920"/>
+          </a:xfrm>
+          <a:prstGeom prst="rect">
+            <a:avLst/>
+          </a:prstGeom>
+          <a:noFill/>
+        </p:spPr>
+        <p:txBody>
+          <a:bodyPr wrap="square">
+            <a:spAutoFit/>
+          </a:bodyPr>
+          <a:lstStyle/>
+          <a:p>
+            <a:pPr algn="l">
+              <a:defRPr sz="1400" b="0">
+                <a:solidFill>
+                  <a:srgbClr val="667085"/>
+                </a:solidFill>
+              </a:defRPr>
+            </a:pPr>
+            <a:r>
+              <a:t>SmartLCFactory / SmartLC escrow lifecycle on Amoy</a:t>
+            </a:r>
+          </a:p>
+        </p:txBody>
+      </p:sp>
+      <p:sp>
+        <p:nvSpPr>
+          <p:cNvPr id="14" name="TextBox 13"/>
+          <p:cNvSpPr txBox="1"/>
+          <p:nvPr/>
+        </p:nvSpPr>
+        <p:spPr>
+          <a:xfrm>
+            <a:off x="822960" y="3712464"/>
+            <a:ext cx="5120640" cy="502920"/>
+          </a:xfrm>
+          <a:prstGeom prst="rect">
+            <a:avLst/>
+          </a:prstGeom>
+          <a:noFill/>
+        </p:spPr>
+        <p:txBody>
+          <a:bodyPr wrap="square">
+            <a:spAutoFit/>
+          </a:bodyPr>
+          <a:lstStyle/>
+          <a:p>
+            <a:pPr algn="l">
+              <a:defRPr sz="1500" b="1">
                 <a:solidFill>
                   <a:srgbClr val="111827"/>
                 </a:solidFill>
               </a:defRPr>
             </a:pPr>
             <a:r>
-              <a:t>Traditional LCs: 7–10 days of manual bank coordination and paper</a:t>
-            </a:r>
-          </a:p>
-          <a:p>
-            <a:pPr>
-              <a:spcAft>
-                <a:spcPts val="724"/>
-              </a:spcAft>
-              <a:defRPr sz="1800">
+              <a:t>✓  On-chain trade credit scoring</a:t>
+            </a:r>
+          </a:p>
+        </p:txBody>
+      </p:sp>
+      <p:sp>
+        <p:nvSpPr>
+          <p:cNvPr id="15" name="TextBox 14"/>
+          <p:cNvSpPr txBox="1"/>
+          <p:nvPr/>
+        </p:nvSpPr>
+        <p:spPr>
+          <a:xfrm>
+            <a:off x="6309360" y="3712464"/>
+            <a:ext cx="5303520" cy="502920"/>
+          </a:xfrm>
+          <a:prstGeom prst="rect">
+            <a:avLst/>
+          </a:prstGeom>
+          <a:noFill/>
+        </p:spPr>
+        <p:txBody>
+          <a:bodyPr wrap="square">
+            <a:spAutoFit/>
+          </a:bodyPr>
+          <a:lstStyle/>
+          <a:p>
+            <a:pPr algn="l">
+              <a:defRPr sz="1400" b="0">
+                <a:solidFill>
+                  <a:srgbClr val="667085"/>
+                </a:solidFill>
+              </a:defRPr>
+            </a:pPr>
+            <a:r>
+              <a:t>CreditScoreAttestation + scoring workers</a:t>
+            </a:r>
+          </a:p>
+        </p:txBody>
+      </p:sp>
+      <p:sp>
+        <p:nvSpPr>
+          <p:cNvPr id="16" name="TextBox 15"/>
+          <p:cNvSpPr txBox="1"/>
+          <p:nvPr/>
+        </p:nvSpPr>
+        <p:spPr>
+          <a:xfrm>
+            <a:off x="822960" y="4425696"/>
+            <a:ext cx="5120640" cy="502920"/>
+          </a:xfrm>
+          <a:prstGeom prst="rect">
+            <a:avLst/>
+          </a:prstGeom>
+          <a:noFill/>
+        </p:spPr>
+        <p:txBody>
+          <a:bodyPr wrap="square">
+            <a:spAutoFit/>
+          </a:bodyPr>
+          <a:lstStyle/>
+          <a:p>
+            <a:pPr algn="l">
+              <a:defRPr sz="1500" b="1">
                 <a:solidFill>
                   <a:srgbClr val="111827"/>
                 </a:solidFill>
               </a:defRPr>
             </a:pPr>
             <a:r>
-              <a:t>Invoice fraud &amp; duplicate financing — lenders can't verify delivery independently</a:t>
-            </a:r>
-          </a:p>
-          <a:p>
-            <a:pPr>
-              <a:spcAft>
-                <a:spcPts val="724"/>
-              </a:spcAft>
-              <a:defRPr sz="1800">
+              <a:t>✓  Unlock SME capital · reduce friction</a:t>
+            </a:r>
+          </a:p>
+        </p:txBody>
+      </p:sp>
+      <p:sp>
+        <p:nvSpPr>
+          <p:cNvPr id="17" name="TextBox 16"/>
+          <p:cNvSpPr txBox="1"/>
+          <p:nvPr/>
+        </p:nvSpPr>
+        <p:spPr>
+          <a:xfrm>
+            <a:off x="6309360" y="4425696"/>
+            <a:ext cx="5303520" cy="502920"/>
+          </a:xfrm>
+          <a:prstGeom prst="rect">
+            <a:avLst/>
+          </a:prstGeom>
+          <a:noFill/>
+        </p:spPr>
+        <p:txBody>
+          <a:bodyPr wrap="square">
+            <a:spAutoFit/>
+          </a:bodyPr>
+          <a:lstStyle/>
+          <a:p>
+            <a:pPr algn="l">
+              <a:defRPr sz="1400" b="0">
+                <a:solidFill>
+                  <a:srgbClr val="667085"/>
+                </a:solidFill>
+              </a:defRPr>
+            </a:pPr>
+            <a:r>
+              <a:t>Judge Mode: proof anchor → fund LC → release in stablecoin</a:t>
+            </a:r>
+          </a:p>
+        </p:txBody>
+      </p:sp>
+      <p:sp>
+        <p:nvSpPr>
+          <p:cNvPr id="18" name="Rounded Rectangle 17"/>
+          <p:cNvSpPr/>
+          <p:nvPr/>
+        </p:nvSpPr>
+        <p:spPr>
+          <a:xfrm>
+            <a:off x="822960" y="5257800"/>
+            <a:ext cx="10515600" cy="685800"/>
+          </a:xfrm>
+          <a:prstGeom prst="roundRect">
+            <a:avLst/>
+          </a:prstGeom>
+          <a:solidFill>
+            <a:srgbClr val="F8FAFC"/>
+          </a:solidFill>
+          <a:ln>
+            <a:solidFill>
+              <a:srgbClr val="E2E8F0"/>
+            </a:solidFill>
+          </a:ln>
+        </p:spPr>
+        <p:style>
+          <a:lnRef idx="1">
+            <a:schemeClr val="accent1"/>
+          </a:lnRef>
+          <a:fillRef idx="3">
+            <a:schemeClr val="accent1"/>
+          </a:fillRef>
+          <a:effectRef idx="2">
+            <a:schemeClr val="accent1"/>
+          </a:effectRef>
+          <a:fontRef idx="minor">
+            <a:schemeClr val="lt1"/>
+          </a:fontRef>
+        </p:style>
+        <p:txBody>
+          <a:bodyPr rtlCol="0" anchor="ctr"/>
+          <a:lstStyle/>
+          <a:p>
+            <a:pPr algn="ctr"/>
+          </a:p>
+        </p:txBody>
+      </p:sp>
+      <p:sp>
+        <p:nvSpPr>
+          <p:cNvPr id="19" name="TextBox 18"/>
+          <p:cNvSpPr txBox="1"/>
+          <p:nvPr/>
+        </p:nvSpPr>
+        <p:spPr>
+          <a:xfrm>
+            <a:off x="960120" y="5394960"/>
+            <a:ext cx="10241280" cy="457200"/>
+          </a:xfrm>
+          <a:prstGeom prst="rect">
+            <a:avLst/>
+          </a:prstGeom>
+          <a:noFill/>
+        </p:spPr>
+        <p:txBody>
+          <a:bodyPr wrap="square">
+            <a:spAutoFit/>
+          </a:bodyPr>
+          <a:lstStyle/>
+          <a:p>
+            <a:pPr algn="l">
+              <a:defRPr sz="1300" b="0">
                 <a:solidFill>
                   <a:srgbClr val="111827"/>
                 </a:solidFill>
               </a:defRPr>
             </a:pPr>
             <a:r>
-              <a:t>UAE corridor: Jebel Ali 15M+ TEUs/yr — high volume, high friction for suppliers</a:t>
+              <a:t>Problem #2 (POS / tourist wallets) is out of MVP scope — same settlement rails are PTSR-ready for licensed AED stablecoin B2B use.</a:t>
             </a:r>
           </a:p>
         </p:txBody>
@@ -7475,7 +8755,7 @@
               </a:defRPr>
             </a:pPr>
             <a:r>
-              <a:t>SOLUTION</a:t>
+              <a:t>JUDGING CRITERIA</a:t>
             </a:r>
           </a:p>
         </p:txBody>
@@ -7510,7 +8790,7 @@
               </a:defRPr>
             </a:pPr>
             <a:r>
-              <a:t>Verified trade evidence → finance-ready receivables → Smart LC settlement</a:t>
+              <a:t>How Credara maps to what the panel scores</a:t>
             </a:r>
           </a:p>
         </p:txBody>
@@ -7673,98 +8953,460 @@
       </p:sp>
       <p:sp>
         <p:nvSpPr>
-          <p:cNvPr id="8" name="TextBox 7"/>
-          <p:cNvSpPr txBox="1"/>
-          <p:nvPr/>
-        </p:nvSpPr>
-        <p:spPr>
-          <a:xfrm>
-            <a:off x="822960" y="2011680"/>
-            <a:ext cx="10515600" cy="4114800"/>
-          </a:xfrm>
-          <a:prstGeom prst="rect">
-            <a:avLst/>
-          </a:prstGeom>
-          <a:noFill/>
-        </p:spPr>
-        <p:txBody>
-          <a:bodyPr wrap="square">
-            <a:spAutoFit/>
-          </a:bodyPr>
-          <a:lstStyle/>
-          <a:p>
-            <a:pPr>
-              <a:spcAft>
-                <a:spcPts val="724"/>
-              </a:spcAft>
-              <a:defRPr sz="1800">
+          <p:cNvPr id="8" name="Rounded Rectangle 7"/>
+          <p:cNvSpPr/>
+          <p:nvPr/>
+        </p:nvSpPr>
+        <p:spPr>
+          <a:xfrm>
+            <a:off x="822960" y="1965960"/>
+            <a:ext cx="5120640" cy="1691640"/>
+          </a:xfrm>
+          <a:prstGeom prst="roundRect">
+            <a:avLst/>
+          </a:prstGeom>
+          <a:solidFill>
+            <a:srgbClr val="F8FAFC"/>
+          </a:solidFill>
+          <a:ln>
+            <a:solidFill>
+              <a:srgbClr val="E2E8F0"/>
+            </a:solidFill>
+          </a:ln>
+        </p:spPr>
+        <p:style>
+          <a:lnRef idx="1">
+            <a:schemeClr val="accent1"/>
+          </a:lnRef>
+          <a:fillRef idx="3">
+            <a:schemeClr val="accent1"/>
+          </a:fillRef>
+          <a:effectRef idx="2">
+            <a:schemeClr val="accent1"/>
+          </a:effectRef>
+          <a:fontRef idx="minor">
+            <a:schemeClr val="lt1"/>
+          </a:fontRef>
+        </p:style>
+        <p:txBody>
+          <a:bodyPr rtlCol="0" anchor="ctr"/>
+          <a:lstStyle/>
+          <a:p>
+            <a:pPr algn="ctr"/>
+          </a:p>
+        </p:txBody>
+      </p:sp>
+      <p:sp>
+        <p:nvSpPr>
+          <p:cNvPr id="9" name="TextBox 8"/>
+          <p:cNvSpPr txBox="1"/>
+          <p:nvPr/>
+        </p:nvSpPr>
+        <p:spPr>
+          <a:xfrm>
+            <a:off x="960120" y="2103120"/>
+            <a:ext cx="4846320" cy="365760"/>
+          </a:xfrm>
+          <a:prstGeom prst="rect">
+            <a:avLst/>
+          </a:prstGeom>
+          <a:noFill/>
+        </p:spPr>
+        <p:txBody>
+          <a:bodyPr wrap="square">
+            <a:spAutoFit/>
+          </a:bodyPr>
+          <a:lstStyle/>
+          <a:p>
+            <a:pPr algn="l">
+              <a:defRPr sz="1500" b="1">
+                <a:solidFill>
+                  <a:srgbClr val="2563EB"/>
+                </a:solidFill>
+              </a:defRPr>
+            </a:pPr>
+            <a:r>
+              <a:t>Innovation</a:t>
+            </a:r>
+          </a:p>
+        </p:txBody>
+      </p:sp>
+      <p:sp>
+        <p:nvSpPr>
+          <p:cNvPr id="10" name="TextBox 9"/>
+          <p:cNvSpPr txBox="1"/>
+          <p:nvPr/>
+        </p:nvSpPr>
+        <p:spPr>
+          <a:xfrm>
+            <a:off x="960120" y="2468880"/>
+            <a:ext cx="4846320" cy="1005840"/>
+          </a:xfrm>
+          <a:prstGeom prst="rect">
+            <a:avLst/>
+          </a:prstGeom>
+          <a:noFill/>
+        </p:spPr>
+        <p:txBody>
+          <a:bodyPr wrap="square">
+            <a:spAutoFit/>
+          </a:bodyPr>
+          <a:lstStyle/>
+          <a:p>
+            <a:pPr algn="l">
+              <a:defRPr sz="1300" b="0">
                 <a:solidFill>
                   <a:srgbClr val="111827"/>
                 </a:solidFill>
               </a:defRPr>
             </a:pPr>
             <a:r>
-              <a:t>Buyer-confirmed invoices + delivery proof become finance-ready receivables</a:t>
-            </a:r>
-          </a:p>
-          <a:p>
-            <a:pPr>
-              <a:spcAft>
-                <a:spcPts val="724"/>
-              </a:spcAft>
-              <a:defRPr sz="1800">
+              <a:t>Smart LC + proof anchoring + receivables in one UAE corridor stack</a:t>
+            </a:r>
+          </a:p>
+        </p:txBody>
+      </p:sp>
+      <p:sp>
+        <p:nvSpPr>
+          <p:cNvPr id="11" name="Rounded Rectangle 10"/>
+          <p:cNvSpPr/>
+          <p:nvPr/>
+        </p:nvSpPr>
+        <p:spPr>
+          <a:xfrm>
+            <a:off x="6309360" y="1965960"/>
+            <a:ext cx="5120640" cy="1691640"/>
+          </a:xfrm>
+          <a:prstGeom prst="roundRect">
+            <a:avLst/>
+          </a:prstGeom>
+          <a:solidFill>
+            <a:srgbClr val="F8FAFC"/>
+          </a:solidFill>
+          <a:ln>
+            <a:solidFill>
+              <a:srgbClr val="E2E8F0"/>
+            </a:solidFill>
+          </a:ln>
+        </p:spPr>
+        <p:style>
+          <a:lnRef idx="1">
+            <a:schemeClr val="accent1"/>
+          </a:lnRef>
+          <a:fillRef idx="3">
+            <a:schemeClr val="accent1"/>
+          </a:fillRef>
+          <a:effectRef idx="2">
+            <a:schemeClr val="accent1"/>
+          </a:effectRef>
+          <a:fontRef idx="minor">
+            <a:schemeClr val="lt1"/>
+          </a:fontRef>
+        </p:style>
+        <p:txBody>
+          <a:bodyPr rtlCol="0" anchor="ctr"/>
+          <a:lstStyle/>
+          <a:p>
+            <a:pPr algn="ctr"/>
+          </a:p>
+        </p:txBody>
+      </p:sp>
+      <p:sp>
+        <p:nvSpPr>
+          <p:cNvPr id="12" name="TextBox 11"/>
+          <p:cNvSpPr txBox="1"/>
+          <p:nvPr/>
+        </p:nvSpPr>
+        <p:spPr>
+          <a:xfrm>
+            <a:off x="6446520" y="2103120"/>
+            <a:ext cx="4846320" cy="365760"/>
+          </a:xfrm>
+          <a:prstGeom prst="rect">
+            <a:avLst/>
+          </a:prstGeom>
+          <a:noFill/>
+        </p:spPr>
+        <p:txBody>
+          <a:bodyPr wrap="square">
+            <a:spAutoFit/>
+          </a:bodyPr>
+          <a:lstStyle/>
+          <a:p>
+            <a:pPr algn="l">
+              <a:defRPr sz="1500" b="1">
+                <a:solidFill>
+                  <a:srgbClr val="2563EB"/>
+                </a:solidFill>
+              </a:defRPr>
+            </a:pPr>
+            <a:r>
+              <a:t>Technical excellence</a:t>
+            </a:r>
+          </a:p>
+        </p:txBody>
+      </p:sp>
+      <p:sp>
+        <p:nvSpPr>
+          <p:cNvPr id="13" name="TextBox 12"/>
+          <p:cNvSpPr txBox="1"/>
+          <p:nvPr/>
+        </p:nvSpPr>
+        <p:spPr>
+          <a:xfrm>
+            <a:off x="6446520" y="2468880"/>
+            <a:ext cx="4846320" cy="1005840"/>
+          </a:xfrm>
+          <a:prstGeom prst="rect">
+            <a:avLst/>
+          </a:prstGeom>
+          <a:noFill/>
+        </p:spPr>
+        <p:txBody>
+          <a:bodyPr wrap="square">
+            <a:spAutoFit/>
+          </a:bodyPr>
+          <a:lstStyle/>
+          <a:p>
+            <a:pPr algn="l">
+              <a:defRPr sz="1300" b="0">
                 <a:solidFill>
                   <a:srgbClr val="111827"/>
                 </a:solidFill>
               </a:defRPr>
             </a:pPr>
             <a:r>
-              <a:t>Proof hashes anchored on Polygon — tamper-evident, documents stay off-chain</a:t>
-            </a:r>
-          </a:p>
-          <a:p>
-            <a:pPr>
-              <a:spcAft>
-                <a:spcPts val="724"/>
-              </a:spcAft>
-              <a:defRPr sz="1800">
+              <a:t>Slither CI, fail-closed chain, live deploy, role-separated contracts</a:t>
+            </a:r>
+          </a:p>
+        </p:txBody>
+      </p:sp>
+      <p:sp>
+        <p:nvSpPr>
+          <p:cNvPr id="14" name="Rounded Rectangle 13"/>
+          <p:cNvSpPr/>
+          <p:nvPr/>
+        </p:nvSpPr>
+        <p:spPr>
+          <a:xfrm>
+            <a:off x="822960" y="3977639"/>
+            <a:ext cx="5120640" cy="1691640"/>
+          </a:xfrm>
+          <a:prstGeom prst="roundRect">
+            <a:avLst/>
+          </a:prstGeom>
+          <a:solidFill>
+            <a:srgbClr val="F8FAFC"/>
+          </a:solidFill>
+          <a:ln>
+            <a:solidFill>
+              <a:srgbClr val="E2E8F0"/>
+            </a:solidFill>
+          </a:ln>
+        </p:spPr>
+        <p:style>
+          <a:lnRef idx="1">
+            <a:schemeClr val="accent1"/>
+          </a:lnRef>
+          <a:fillRef idx="3">
+            <a:schemeClr val="accent1"/>
+          </a:fillRef>
+          <a:effectRef idx="2">
+            <a:schemeClr val="accent1"/>
+          </a:effectRef>
+          <a:fontRef idx="minor">
+            <a:schemeClr val="lt1"/>
+          </a:fontRef>
+        </p:style>
+        <p:txBody>
+          <a:bodyPr rtlCol="0" anchor="ctr"/>
+          <a:lstStyle/>
+          <a:p>
+            <a:pPr algn="ctr"/>
+          </a:p>
+        </p:txBody>
+      </p:sp>
+      <p:sp>
+        <p:nvSpPr>
+          <p:cNvPr id="15" name="TextBox 14"/>
+          <p:cNvSpPr txBox="1"/>
+          <p:nvPr/>
+        </p:nvSpPr>
+        <p:spPr>
+          <a:xfrm>
+            <a:off x="960120" y="4114800"/>
+            <a:ext cx="4846320" cy="365760"/>
+          </a:xfrm>
+          <a:prstGeom prst="rect">
+            <a:avLst/>
+          </a:prstGeom>
+          <a:noFill/>
+        </p:spPr>
+        <p:txBody>
+          <a:bodyPr wrap="square">
+            <a:spAutoFit/>
+          </a:bodyPr>
+          <a:lstStyle/>
+          <a:p>
+            <a:pPr algn="l">
+              <a:defRPr sz="1500" b="1">
+                <a:solidFill>
+                  <a:srgbClr val="2563EB"/>
+                </a:solidFill>
+              </a:defRPr>
+            </a:pPr>
+            <a:r>
+              <a:t>User experience</a:t>
+            </a:r>
+          </a:p>
+        </p:txBody>
+      </p:sp>
+      <p:sp>
+        <p:nvSpPr>
+          <p:cNvPr id="16" name="TextBox 15"/>
+          <p:cNvSpPr txBox="1"/>
+          <p:nvPr/>
+        </p:nvSpPr>
+        <p:spPr>
+          <a:xfrm>
+            <a:off x="960120" y="4480559"/>
+            <a:ext cx="4846320" cy="1005840"/>
+          </a:xfrm>
+          <a:prstGeom prst="rect">
+            <a:avLst/>
+          </a:prstGeom>
+          <a:noFill/>
+        </p:spPr>
+        <p:txBody>
+          <a:bodyPr wrap="square">
+            <a:spAutoFit/>
+          </a:bodyPr>
+          <a:lstStyle/>
+          <a:p>
+            <a:pPr algn="l">
+              <a:defRPr sz="1300" b="0">
                 <a:solidFill>
                   <a:srgbClr val="111827"/>
                 </a:solidFill>
               </a:defRPr>
             </a:pPr>
             <a:r>
-              <a:t>Programmable Smart LC escrow: fund → verify delivery → release in stablecoin</a:t>
-            </a:r>
-          </a:p>
-          <a:p>
-            <a:pPr>
-              <a:spcAft>
-                <a:spcPts val="724"/>
-              </a:spcAft>
-              <a:defRPr sz="1800">
+              <a:t>4 enterprise workspaces + 3-min Judge Mode guided demo</a:t>
+            </a:r>
+          </a:p>
+        </p:txBody>
+      </p:sp>
+      <p:sp>
+        <p:nvSpPr>
+          <p:cNvPr id="17" name="Rounded Rectangle 16"/>
+          <p:cNvSpPr/>
+          <p:nvPr/>
+        </p:nvSpPr>
+        <p:spPr>
+          <a:xfrm>
+            <a:off x="6309360" y="3977639"/>
+            <a:ext cx="5120640" cy="1691640"/>
+          </a:xfrm>
+          <a:prstGeom prst="roundRect">
+            <a:avLst/>
+          </a:prstGeom>
+          <a:solidFill>
+            <a:srgbClr val="F8FAFC"/>
+          </a:solidFill>
+          <a:ln>
+            <a:solidFill>
+              <a:srgbClr val="E2E8F0"/>
+            </a:solidFill>
+          </a:ln>
+        </p:spPr>
+        <p:style>
+          <a:lnRef idx="1">
+            <a:schemeClr val="accent1"/>
+          </a:lnRef>
+          <a:fillRef idx="3">
+            <a:schemeClr val="accent1"/>
+          </a:fillRef>
+          <a:effectRef idx="2">
+            <a:schemeClr val="accent1"/>
+          </a:effectRef>
+          <a:fontRef idx="minor">
+            <a:schemeClr val="lt1"/>
+          </a:fontRef>
+        </p:style>
+        <p:txBody>
+          <a:bodyPr rtlCol="0" anchor="ctr"/>
+          <a:lstStyle/>
+          <a:p>
+            <a:pPr algn="ctr"/>
+          </a:p>
+        </p:txBody>
+      </p:sp>
+      <p:sp>
+        <p:nvSpPr>
+          <p:cNvPr id="18" name="TextBox 17"/>
+          <p:cNvSpPr txBox="1"/>
+          <p:nvPr/>
+        </p:nvSpPr>
+        <p:spPr>
+          <a:xfrm>
+            <a:off x="6446520" y="4114800"/>
+            <a:ext cx="4846320" cy="365760"/>
+          </a:xfrm>
+          <a:prstGeom prst="rect">
+            <a:avLst/>
+          </a:prstGeom>
+          <a:noFill/>
+        </p:spPr>
+        <p:txBody>
+          <a:bodyPr wrap="square">
+            <a:spAutoFit/>
+          </a:bodyPr>
+          <a:lstStyle/>
+          <a:p>
+            <a:pPr algn="l">
+              <a:defRPr sz="1500" b="1">
+                <a:solidFill>
+                  <a:srgbClr val="2563EB"/>
+                </a:solidFill>
+              </a:defRPr>
+            </a:pPr>
+            <a:r>
+              <a:t>Real-world impact</a:t>
+            </a:r>
+          </a:p>
+        </p:txBody>
+      </p:sp>
+      <p:sp>
+        <p:nvSpPr>
+          <p:cNvPr id="19" name="TextBox 18"/>
+          <p:cNvSpPr txBox="1"/>
+          <p:nvPr/>
+        </p:nvSpPr>
+        <p:spPr>
+          <a:xfrm>
+            <a:off x="6446520" y="4480559"/>
+            <a:ext cx="4846320" cy="1005840"/>
+          </a:xfrm>
+          <a:prstGeom prst="rect">
+            <a:avLst/>
+          </a:prstGeom>
+          <a:noFill/>
+        </p:spPr>
+        <p:txBody>
+          <a:bodyPr wrap="square">
+            <a:spAutoFit/>
+          </a:bodyPr>
+          <a:lstStyle/>
+          <a:p>
+            <a:pPr algn="l">
+              <a:defRPr sz="1300" b="0">
                 <a:solidFill>
                   <a:srgbClr val="111827"/>
                 </a:solidFill>
               </a:defRPr>
             </a:pPr>
             <a:r>
-              <a:t>Four workspaces (SME, Buyer, Financier, Admin) on one shared trust layer</a:t>
-            </a:r>
-          </a:p>
-          <a:p>
-            <a:pPr>
-              <a:spcAft>
-                <a:spcPts val="724"/>
-              </a:spcAft>
-              <a:defRPr sz="1800">
-                <a:solidFill>
-                  <a:srgbClr val="111827"/>
-                </a:solidFill>
-              </a:defRPr>
-            </a:pPr>
-            <a:r>
-              <a:t>Wedge: SME trade-finance slice of UAE corridor — not consumer remittance or POS</a:t>
+              <a:t>$2T gap · 40% SME rejection · Jebel Ali 15M+ TEUs — suppliers paid faster</a:t>
             </a:r>
           </a:p>
         </p:txBody>
@@ -7825,7 +9467,7 @@
               </a:defRPr>
             </a:pPr>
             <a:r>
-              <a:t>HOW IT WORKS</a:t>
+              <a:t>PROBLEM</a:t>
             </a:r>
           </a:p>
         </p:txBody>
@@ -7860,7 +9502,7 @@
               </a:defRPr>
             </a:pPr>
             <a:r>
-              <a:t>End-to-end flow (~3 min Judge Mode)</a:t>
+              <a:t>SMEs wait months to get paid on goods already delivered</a:t>
             </a:r>
           </a:p>
         </p:txBody>
@@ -8023,775 +9665,98 @@
       </p:sp>
       <p:sp>
         <p:nvSpPr>
-          <p:cNvPr id="8" name="Rounded Rectangle 7"/>
-          <p:cNvSpPr/>
-          <p:nvPr/>
-        </p:nvSpPr>
-        <p:spPr>
-          <a:xfrm>
-            <a:off x="822960" y="1920240"/>
-            <a:ext cx="457200" cy="457200"/>
-          </a:xfrm>
-          <a:prstGeom prst="roundRect">
-            <a:avLst/>
-          </a:prstGeom>
-          <a:solidFill>
-            <a:srgbClr val="2563EB"/>
-          </a:solidFill>
-          <a:ln>
-            <a:noFill/>
-          </a:ln>
-        </p:spPr>
-        <p:style>
-          <a:lnRef idx="1">
-            <a:schemeClr val="accent1"/>
-          </a:lnRef>
-          <a:fillRef idx="3">
-            <a:schemeClr val="accent1"/>
-          </a:fillRef>
-          <a:effectRef idx="2">
-            <a:schemeClr val="accent1"/>
-          </a:effectRef>
-          <a:fontRef idx="minor">
-            <a:schemeClr val="lt1"/>
-          </a:fontRef>
-        </p:style>
-        <p:txBody>
-          <a:bodyPr rtlCol="0" anchor="ctr"/>
-          <a:lstStyle/>
-          <a:p>
-            <a:pPr algn="ctr"/>
-          </a:p>
-        </p:txBody>
-      </p:sp>
-      <p:sp>
-        <p:nvSpPr>
-          <p:cNvPr id="9" name="TextBox 8"/>
-          <p:cNvSpPr txBox="1"/>
-          <p:nvPr/>
-        </p:nvSpPr>
-        <p:spPr>
-          <a:xfrm>
-            <a:off x="822960" y="1975104"/>
-            <a:ext cx="457200" cy="365760"/>
-          </a:xfrm>
-          <a:prstGeom prst="rect">
-            <a:avLst/>
-          </a:prstGeom>
-          <a:noFill/>
-        </p:spPr>
-        <p:txBody>
-          <a:bodyPr wrap="square">
-            <a:spAutoFit/>
-          </a:bodyPr>
-          <a:lstStyle/>
-          <a:p>
-            <a:pPr algn="ctr">
-              <a:defRPr sz="1500" b="1">
-                <a:solidFill>
-                  <a:srgbClr val="FFFFFF"/>
-                </a:solidFill>
-              </a:defRPr>
-            </a:pPr>
-            <a:r>
-              <a:t>1</a:t>
-            </a:r>
-          </a:p>
-        </p:txBody>
-      </p:sp>
-      <p:sp>
-        <p:nvSpPr>
-          <p:cNvPr id="10" name="TextBox 9"/>
-          <p:cNvSpPr txBox="1"/>
-          <p:nvPr/>
-        </p:nvSpPr>
-        <p:spPr>
-          <a:xfrm>
-            <a:off x="1417320" y="1965960"/>
-            <a:ext cx="1828800" cy="320040"/>
-          </a:xfrm>
-          <a:prstGeom prst="rect">
-            <a:avLst/>
-          </a:prstGeom>
-          <a:noFill/>
-        </p:spPr>
-        <p:txBody>
-          <a:bodyPr wrap="square">
-            <a:spAutoFit/>
-          </a:bodyPr>
-          <a:lstStyle/>
-          <a:p>
-            <a:pPr algn="l">
-              <a:defRPr sz="1300" b="1">
-                <a:solidFill>
-                  <a:srgbClr val="2563EB"/>
-                </a:solidFill>
-              </a:defRPr>
-            </a:pPr>
-            <a:r>
-              <a:t>SME</a:t>
-            </a:r>
-          </a:p>
-        </p:txBody>
-      </p:sp>
-      <p:sp>
-        <p:nvSpPr>
-          <p:cNvPr id="11" name="TextBox 10"/>
-          <p:cNvSpPr txBox="1"/>
-          <p:nvPr/>
-        </p:nvSpPr>
-        <p:spPr>
-          <a:xfrm>
-            <a:off x="3291840" y="1938528"/>
-            <a:ext cx="8046720" cy="502920"/>
-          </a:xfrm>
-          <a:prstGeom prst="rect">
-            <a:avLst/>
-          </a:prstGeom>
-          <a:noFill/>
-        </p:spPr>
-        <p:txBody>
-          <a:bodyPr wrap="square">
-            <a:spAutoFit/>
-          </a:bodyPr>
-          <a:lstStyle/>
-          <a:p>
-            <a:pPr algn="l">
-              <a:defRPr sz="1600" b="0">
+          <p:cNvPr id="8" name="TextBox 7"/>
+          <p:cNvSpPr txBox="1"/>
+          <p:nvPr/>
+        </p:nvSpPr>
+        <p:spPr>
+          <a:xfrm>
+            <a:off x="822960" y="2011680"/>
+            <a:ext cx="10515600" cy="4114800"/>
+          </a:xfrm>
+          <a:prstGeom prst="rect">
+            <a:avLst/>
+          </a:prstGeom>
+          <a:noFill/>
+        </p:spPr>
+        <p:txBody>
+          <a:bodyPr wrap="square">
+            <a:spAutoFit/>
+          </a:bodyPr>
+          <a:lstStyle/>
+          <a:p>
+            <a:pPr>
+              <a:spcAft>
+                <a:spcPts val="724"/>
+              </a:spcAft>
+              <a:defRPr sz="1800">
                 <a:solidFill>
                   <a:srgbClr val="111827"/>
                 </a:solidFill>
               </a:defRPr>
             </a:pPr>
             <a:r>
-              <a:t>Order → invoice → delivery proof</a:t>
-            </a:r>
-          </a:p>
-        </p:txBody>
-      </p:sp>
-      <p:sp>
-        <p:nvSpPr>
-          <p:cNvPr id="12" name="Rounded Rectangle 11"/>
-          <p:cNvSpPr/>
-          <p:nvPr/>
-        </p:nvSpPr>
-        <p:spPr>
-          <a:xfrm>
-            <a:off x="822960" y="2761488"/>
-            <a:ext cx="457200" cy="457200"/>
-          </a:xfrm>
-          <a:prstGeom prst="roundRect">
-            <a:avLst/>
-          </a:prstGeom>
-          <a:solidFill>
-            <a:srgbClr val="2563EB"/>
-          </a:solidFill>
-          <a:ln>
-            <a:noFill/>
-          </a:ln>
-        </p:spPr>
-        <p:style>
-          <a:lnRef idx="1">
-            <a:schemeClr val="accent1"/>
-          </a:lnRef>
-          <a:fillRef idx="3">
-            <a:schemeClr val="accent1"/>
-          </a:fillRef>
-          <a:effectRef idx="2">
-            <a:schemeClr val="accent1"/>
-          </a:effectRef>
-          <a:fontRef idx="minor">
-            <a:schemeClr val="lt1"/>
-          </a:fontRef>
-        </p:style>
-        <p:txBody>
-          <a:bodyPr rtlCol="0" anchor="ctr"/>
-          <a:lstStyle/>
-          <a:p>
-            <a:pPr algn="ctr"/>
-          </a:p>
-        </p:txBody>
-      </p:sp>
-      <p:sp>
-        <p:nvSpPr>
-          <p:cNvPr id="13" name="TextBox 12"/>
-          <p:cNvSpPr txBox="1"/>
-          <p:nvPr/>
-        </p:nvSpPr>
-        <p:spPr>
-          <a:xfrm>
-            <a:off x="822960" y="2816352"/>
-            <a:ext cx="457200" cy="365760"/>
-          </a:xfrm>
-          <a:prstGeom prst="rect">
-            <a:avLst/>
-          </a:prstGeom>
-          <a:noFill/>
-        </p:spPr>
-        <p:txBody>
-          <a:bodyPr wrap="square">
-            <a:spAutoFit/>
-          </a:bodyPr>
-          <a:lstStyle/>
-          <a:p>
-            <a:pPr algn="ctr">
-              <a:defRPr sz="1500" b="1">
-                <a:solidFill>
-                  <a:srgbClr val="FFFFFF"/>
-                </a:solidFill>
-              </a:defRPr>
-            </a:pPr>
-            <a:r>
-              <a:t>2</a:t>
-            </a:r>
-          </a:p>
-        </p:txBody>
-      </p:sp>
-      <p:sp>
-        <p:nvSpPr>
-          <p:cNvPr id="14" name="TextBox 13"/>
-          <p:cNvSpPr txBox="1"/>
-          <p:nvPr/>
-        </p:nvSpPr>
-        <p:spPr>
-          <a:xfrm>
-            <a:off x="1417320" y="2807208"/>
-            <a:ext cx="1828800" cy="320040"/>
-          </a:xfrm>
-          <a:prstGeom prst="rect">
-            <a:avLst/>
-          </a:prstGeom>
-          <a:noFill/>
-        </p:spPr>
-        <p:txBody>
-          <a:bodyPr wrap="square">
-            <a:spAutoFit/>
-          </a:bodyPr>
-          <a:lstStyle/>
-          <a:p>
-            <a:pPr algn="l">
-              <a:defRPr sz="1300" b="1">
-                <a:solidFill>
-                  <a:srgbClr val="2563EB"/>
-                </a:solidFill>
-              </a:defRPr>
-            </a:pPr>
-            <a:r>
-              <a:t>Buyer</a:t>
-            </a:r>
-          </a:p>
-        </p:txBody>
-      </p:sp>
-      <p:sp>
-        <p:nvSpPr>
-          <p:cNvPr id="15" name="TextBox 14"/>
-          <p:cNvSpPr txBox="1"/>
-          <p:nvPr/>
-        </p:nvSpPr>
-        <p:spPr>
-          <a:xfrm>
-            <a:off x="3291840" y="2779776"/>
-            <a:ext cx="8046720" cy="502920"/>
-          </a:xfrm>
-          <a:prstGeom prst="rect">
-            <a:avLst/>
-          </a:prstGeom>
-          <a:noFill/>
-        </p:spPr>
-        <p:txBody>
-          <a:bodyPr wrap="square">
-            <a:spAutoFit/>
-          </a:bodyPr>
-          <a:lstStyle/>
-          <a:p>
-            <a:pPr algn="l">
-              <a:defRPr sz="1600" b="0">
+              <a:t>$2T+ global trade finance gap — demand unfilled or priced out</a:t>
+            </a:r>
+          </a:p>
+          <a:p>
+            <a:pPr>
+              <a:spcAft>
+                <a:spcPts val="724"/>
+              </a:spcAft>
+              <a:defRPr sz="1800">
                 <a:solidFill>
                   <a:srgbClr val="111827"/>
                 </a:solidFill>
               </a:defRPr>
             </a:pPr>
             <a:r>
-              <a:t>Confirm trade obligation</a:t>
-            </a:r>
-          </a:p>
-        </p:txBody>
-      </p:sp>
-      <p:sp>
-        <p:nvSpPr>
-          <p:cNvPr id="16" name="Rounded Rectangle 15"/>
-          <p:cNvSpPr/>
-          <p:nvPr/>
-        </p:nvSpPr>
-        <p:spPr>
-          <a:xfrm>
-            <a:off x="822960" y="3602736"/>
-            <a:ext cx="457200" cy="457200"/>
-          </a:xfrm>
-          <a:prstGeom prst="roundRect">
-            <a:avLst/>
-          </a:prstGeom>
-          <a:solidFill>
-            <a:srgbClr val="2563EB"/>
-          </a:solidFill>
-          <a:ln>
-            <a:noFill/>
-          </a:ln>
-        </p:spPr>
-        <p:style>
-          <a:lnRef idx="1">
-            <a:schemeClr val="accent1"/>
-          </a:lnRef>
-          <a:fillRef idx="3">
-            <a:schemeClr val="accent1"/>
-          </a:fillRef>
-          <a:effectRef idx="2">
-            <a:schemeClr val="accent1"/>
-          </a:effectRef>
-          <a:fontRef idx="minor">
-            <a:schemeClr val="lt1"/>
-          </a:fontRef>
-        </p:style>
-        <p:txBody>
-          <a:bodyPr rtlCol="0" anchor="ctr"/>
-          <a:lstStyle/>
-          <a:p>
-            <a:pPr algn="ctr"/>
-          </a:p>
-        </p:txBody>
-      </p:sp>
-      <p:sp>
-        <p:nvSpPr>
-          <p:cNvPr id="17" name="TextBox 16"/>
-          <p:cNvSpPr txBox="1"/>
-          <p:nvPr/>
-        </p:nvSpPr>
-        <p:spPr>
-          <a:xfrm>
-            <a:off x="822960" y="3657600"/>
-            <a:ext cx="457200" cy="365760"/>
-          </a:xfrm>
-          <a:prstGeom prst="rect">
-            <a:avLst/>
-          </a:prstGeom>
-          <a:noFill/>
-        </p:spPr>
-        <p:txBody>
-          <a:bodyPr wrap="square">
-            <a:spAutoFit/>
-          </a:bodyPr>
-          <a:lstStyle/>
-          <a:p>
-            <a:pPr algn="ctr">
-              <a:defRPr sz="1500" b="1">
-                <a:solidFill>
-                  <a:srgbClr val="FFFFFF"/>
-                </a:solidFill>
-              </a:defRPr>
-            </a:pPr>
-            <a:r>
-              <a:t>3</a:t>
-            </a:r>
-          </a:p>
-        </p:txBody>
-      </p:sp>
-      <p:sp>
-        <p:nvSpPr>
-          <p:cNvPr id="18" name="TextBox 17"/>
-          <p:cNvSpPr txBox="1"/>
-          <p:nvPr/>
-        </p:nvSpPr>
-        <p:spPr>
-          <a:xfrm>
-            <a:off x="1417320" y="3648456"/>
-            <a:ext cx="1828800" cy="320040"/>
-          </a:xfrm>
-          <a:prstGeom prst="rect">
-            <a:avLst/>
-          </a:prstGeom>
-          <a:noFill/>
-        </p:spPr>
-        <p:txBody>
-          <a:bodyPr wrap="square">
-            <a:spAutoFit/>
-          </a:bodyPr>
-          <a:lstStyle/>
-          <a:p>
-            <a:pPr algn="l">
-              <a:defRPr sz="1300" b="1">
-                <a:solidFill>
-                  <a:srgbClr val="2563EB"/>
-                </a:solidFill>
-              </a:defRPr>
-            </a:pPr>
-            <a:r>
-              <a:t>SME</a:t>
-            </a:r>
-          </a:p>
-        </p:txBody>
-      </p:sp>
-      <p:sp>
-        <p:nvSpPr>
-          <p:cNvPr id="19" name="TextBox 18"/>
-          <p:cNvSpPr txBox="1"/>
-          <p:nvPr/>
-        </p:nvSpPr>
-        <p:spPr>
-          <a:xfrm>
-            <a:off x="3291840" y="3621024"/>
-            <a:ext cx="8046720" cy="502920"/>
-          </a:xfrm>
-          <a:prstGeom prst="rect">
-            <a:avLst/>
-          </a:prstGeom>
-          <a:noFill/>
-        </p:spPr>
-        <p:txBody>
-          <a:bodyPr wrap="square">
-            <a:spAutoFit/>
-          </a:bodyPr>
-          <a:lstStyle/>
-          <a:p>
-            <a:pPr algn="l">
-              <a:defRPr sz="1600" b="0">
+              <a:t>~40% of SME trade-finance applications rejected (weak evidence, not weak fundamentals)</a:t>
+            </a:r>
+          </a:p>
+          <a:p>
+            <a:pPr>
+              <a:spcAft>
+                <a:spcPts val="724"/>
+              </a:spcAft>
+              <a:defRPr sz="1800">
                 <a:solidFill>
                   <a:srgbClr val="111827"/>
                 </a:solidFill>
               </a:defRPr>
             </a:pPr>
             <a:r>
-              <a:t>Create receivable · anchor proof on Polygon</a:t>
-            </a:r>
-          </a:p>
-        </p:txBody>
-      </p:sp>
-      <p:sp>
-        <p:nvSpPr>
-          <p:cNvPr id="20" name="Rounded Rectangle 19"/>
-          <p:cNvSpPr/>
-          <p:nvPr/>
-        </p:nvSpPr>
-        <p:spPr>
-          <a:xfrm>
-            <a:off x="822960" y="4443984"/>
-            <a:ext cx="457200" cy="457200"/>
-          </a:xfrm>
-          <a:prstGeom prst="roundRect">
-            <a:avLst/>
-          </a:prstGeom>
-          <a:solidFill>
-            <a:srgbClr val="2563EB"/>
-          </a:solidFill>
-          <a:ln>
-            <a:noFill/>
-          </a:ln>
-        </p:spPr>
-        <p:style>
-          <a:lnRef idx="1">
-            <a:schemeClr val="accent1"/>
-          </a:lnRef>
-          <a:fillRef idx="3">
-            <a:schemeClr val="accent1"/>
-          </a:fillRef>
-          <a:effectRef idx="2">
-            <a:schemeClr val="accent1"/>
-          </a:effectRef>
-          <a:fontRef idx="minor">
-            <a:schemeClr val="lt1"/>
-          </a:fontRef>
-        </p:style>
-        <p:txBody>
-          <a:bodyPr rtlCol="0" anchor="ctr"/>
-          <a:lstStyle/>
-          <a:p>
-            <a:pPr algn="ctr"/>
-          </a:p>
-        </p:txBody>
-      </p:sp>
-      <p:sp>
-        <p:nvSpPr>
-          <p:cNvPr id="21" name="TextBox 20"/>
-          <p:cNvSpPr txBox="1"/>
-          <p:nvPr/>
-        </p:nvSpPr>
-        <p:spPr>
-          <a:xfrm>
-            <a:off x="822960" y="4498848"/>
-            <a:ext cx="457200" cy="365760"/>
-          </a:xfrm>
-          <a:prstGeom prst="rect">
-            <a:avLst/>
-          </a:prstGeom>
-          <a:noFill/>
-        </p:spPr>
-        <p:txBody>
-          <a:bodyPr wrap="square">
-            <a:spAutoFit/>
-          </a:bodyPr>
-          <a:lstStyle/>
-          <a:p>
-            <a:pPr algn="ctr">
-              <a:defRPr sz="1500" b="1">
-                <a:solidFill>
-                  <a:srgbClr val="FFFFFF"/>
-                </a:solidFill>
-              </a:defRPr>
-            </a:pPr>
-            <a:r>
-              <a:t>4</a:t>
-            </a:r>
-          </a:p>
-        </p:txBody>
-      </p:sp>
-      <p:sp>
-        <p:nvSpPr>
-          <p:cNvPr id="22" name="TextBox 21"/>
-          <p:cNvSpPr txBox="1"/>
-          <p:nvPr/>
-        </p:nvSpPr>
-        <p:spPr>
-          <a:xfrm>
-            <a:off x="1417320" y="4489704"/>
-            <a:ext cx="1828800" cy="320040"/>
-          </a:xfrm>
-          <a:prstGeom prst="rect">
-            <a:avLst/>
-          </a:prstGeom>
-          <a:noFill/>
-        </p:spPr>
-        <p:txBody>
-          <a:bodyPr wrap="square">
-            <a:spAutoFit/>
-          </a:bodyPr>
-          <a:lstStyle/>
-          <a:p>
-            <a:pPr algn="l">
-              <a:defRPr sz="1300" b="1">
-                <a:solidFill>
-                  <a:srgbClr val="2563EB"/>
-                </a:solidFill>
-              </a:defRPr>
-            </a:pPr>
-            <a:r>
-              <a:t>Financier</a:t>
-            </a:r>
-          </a:p>
-        </p:txBody>
-      </p:sp>
-      <p:sp>
-        <p:nvSpPr>
-          <p:cNvPr id="23" name="TextBox 22"/>
-          <p:cNvSpPr txBox="1"/>
-          <p:nvPr/>
-        </p:nvSpPr>
-        <p:spPr>
-          <a:xfrm>
-            <a:off x="3291840" y="4462272"/>
-            <a:ext cx="8046720" cy="502920"/>
-          </a:xfrm>
-          <a:prstGeom prst="rect">
-            <a:avLst/>
-          </a:prstGeom>
-          <a:noFill/>
-        </p:spPr>
-        <p:txBody>
-          <a:bodyPr wrap="square">
-            <a:spAutoFit/>
-          </a:bodyPr>
-          <a:lstStyle/>
-          <a:p>
-            <a:pPr algn="l">
-              <a:defRPr sz="1600" b="0">
+              <a:t>Traditional LCs: 7–10 days of manual bank coordination and paper</a:t>
+            </a:r>
+          </a:p>
+          <a:p>
+            <a:pPr>
+              <a:spcAft>
+                <a:spcPts val="724"/>
+              </a:spcAft>
+              <a:defRPr sz="1800">
                 <a:solidFill>
                   <a:srgbClr val="111827"/>
                 </a:solidFill>
               </a:defRPr>
             </a:pPr>
             <a:r>
-              <a:t>Deal room review · fund Smart LC</a:t>
-            </a:r>
-          </a:p>
-        </p:txBody>
-      </p:sp>
-      <p:sp>
-        <p:nvSpPr>
-          <p:cNvPr id="24" name="Rounded Rectangle 23"/>
-          <p:cNvSpPr/>
-          <p:nvPr/>
-        </p:nvSpPr>
-        <p:spPr>
-          <a:xfrm>
-            <a:off x="822960" y="5285232"/>
-            <a:ext cx="457200" cy="457200"/>
-          </a:xfrm>
-          <a:prstGeom prst="roundRect">
-            <a:avLst/>
-          </a:prstGeom>
-          <a:solidFill>
-            <a:srgbClr val="2563EB"/>
-          </a:solidFill>
-          <a:ln>
-            <a:noFill/>
-          </a:ln>
-        </p:spPr>
-        <p:style>
-          <a:lnRef idx="1">
-            <a:schemeClr val="accent1"/>
-          </a:lnRef>
-          <a:fillRef idx="3">
-            <a:schemeClr val="accent1"/>
-          </a:fillRef>
-          <a:effectRef idx="2">
-            <a:schemeClr val="accent1"/>
-          </a:effectRef>
-          <a:fontRef idx="minor">
-            <a:schemeClr val="lt1"/>
-          </a:fontRef>
-        </p:style>
-        <p:txBody>
-          <a:bodyPr rtlCol="0" anchor="ctr"/>
-          <a:lstStyle/>
-          <a:p>
-            <a:pPr algn="ctr"/>
-          </a:p>
-        </p:txBody>
-      </p:sp>
-      <p:sp>
-        <p:nvSpPr>
-          <p:cNvPr id="25" name="TextBox 24"/>
-          <p:cNvSpPr txBox="1"/>
-          <p:nvPr/>
-        </p:nvSpPr>
-        <p:spPr>
-          <a:xfrm>
-            <a:off x="822960" y="5340096"/>
-            <a:ext cx="457200" cy="365760"/>
-          </a:xfrm>
-          <a:prstGeom prst="rect">
-            <a:avLst/>
-          </a:prstGeom>
-          <a:noFill/>
-        </p:spPr>
-        <p:txBody>
-          <a:bodyPr wrap="square">
-            <a:spAutoFit/>
-          </a:bodyPr>
-          <a:lstStyle/>
-          <a:p>
-            <a:pPr algn="ctr">
-              <a:defRPr sz="1500" b="1">
-                <a:solidFill>
-                  <a:srgbClr val="FFFFFF"/>
-                </a:solidFill>
-              </a:defRPr>
-            </a:pPr>
-            <a:r>
-              <a:t>5</a:t>
-            </a:r>
-          </a:p>
-        </p:txBody>
-      </p:sp>
-      <p:sp>
-        <p:nvSpPr>
-          <p:cNvPr id="26" name="TextBox 25"/>
-          <p:cNvSpPr txBox="1"/>
-          <p:nvPr/>
-        </p:nvSpPr>
-        <p:spPr>
-          <a:xfrm>
-            <a:off x="1417320" y="5330952"/>
-            <a:ext cx="1828800" cy="320040"/>
-          </a:xfrm>
-          <a:prstGeom prst="rect">
-            <a:avLst/>
-          </a:prstGeom>
-          <a:noFill/>
-        </p:spPr>
-        <p:txBody>
-          <a:bodyPr wrap="square">
-            <a:spAutoFit/>
-          </a:bodyPr>
-          <a:lstStyle/>
-          <a:p>
-            <a:pPr algn="l">
-              <a:defRPr sz="1300" b="1">
-                <a:solidFill>
-                  <a:srgbClr val="2563EB"/>
-                </a:solidFill>
-              </a:defRPr>
-            </a:pPr>
-            <a:r>
-              <a:t>System</a:t>
-            </a:r>
-          </a:p>
-        </p:txBody>
-      </p:sp>
-      <p:sp>
-        <p:nvSpPr>
-          <p:cNvPr id="27" name="TextBox 26"/>
-          <p:cNvSpPr txBox="1"/>
-          <p:nvPr/>
-        </p:nvSpPr>
-        <p:spPr>
-          <a:xfrm>
-            <a:off x="3291840" y="5303520"/>
-            <a:ext cx="8046720" cy="502920"/>
-          </a:xfrm>
-          <a:prstGeom prst="rect">
-            <a:avLst/>
-          </a:prstGeom>
-          <a:noFill/>
-        </p:spPr>
-        <p:txBody>
-          <a:bodyPr wrap="square">
-            <a:spAutoFit/>
-          </a:bodyPr>
-          <a:lstStyle/>
-          <a:p>
-            <a:pPr algn="l">
-              <a:defRPr sz="1600" b="0">
+              <a:t>Invoice fraud &amp; duplicate financing — lenders can't verify delivery independently</a:t>
+            </a:r>
+          </a:p>
+          <a:p>
+            <a:pPr>
+              <a:spcAft>
+                <a:spcPts val="724"/>
+              </a:spcAft>
+              <a:defRPr sz="1800">
                 <a:solidFill>
                   <a:srgbClr val="111827"/>
                 </a:solidFill>
               </a:defRPr>
             </a:pPr>
             <a:r>
-              <a:t>Verify delivery · release settlement to seller</a:t>
-            </a:r>
-          </a:p>
-        </p:txBody>
-      </p:sp>
-      <p:sp>
-        <p:nvSpPr>
-          <p:cNvPr id="28" name="TextBox 27"/>
-          <p:cNvSpPr txBox="1"/>
-          <p:nvPr/>
-        </p:nvSpPr>
-        <p:spPr>
-          <a:xfrm>
-            <a:off x="822960" y="5943600"/>
-            <a:ext cx="10058400" cy="365760"/>
-          </a:xfrm>
-          <a:prstGeom prst="rect">
-            <a:avLst/>
-          </a:prstGeom>
-          <a:noFill/>
-        </p:spPr>
-        <p:txBody>
-          <a:bodyPr wrap="square">
-            <a:spAutoFit/>
-          </a:bodyPr>
-          <a:lstStyle/>
-          <a:p>
-            <a:pPr algn="l">
-              <a:defRPr sz="1200" b="0">
-                <a:solidFill>
-                  <a:srgbClr val="667085"/>
-                </a:solidFill>
-              </a:defRPr>
-            </a:pPr>
-            <a:r>
-              <a:t>Live: credara-jet.vercel.app/workspace</a:t>
+              <a:t>UAE corridor: Jebel Ali 15M+ TEUs/yr — high volume, high friction for suppliers</a:t>
             </a:r>
           </a:p>
         </p:txBody>
@@ -8852,7 +9817,7 @@
               </a:defRPr>
             </a:pPr>
             <a:r>
-              <a:t>WHY CREDARA</a:t>
+              <a:t>SOLUTION</a:t>
             </a:r>
           </a:p>
         </p:txBody>
@@ -8887,7 +9852,7 @@
               </a:defRPr>
             </a:pPr>
             <a:r>
-              <a:t>Institutional-grade infrastructure, not a hash-on-chain demo</a:t>
+              <a:t>Verified trade evidence → finance-ready receivables → Smart LC settlement</a:t>
             </a:r>
           </a:p>
         </p:txBody>
@@ -9057,7 +10022,7 @@
         <p:spPr>
           <a:xfrm>
             <a:off x="822960" y="2011680"/>
-            <a:ext cx="10515600" cy="4389120"/>
+            <a:ext cx="10515600" cy="4114800"/>
           </a:xfrm>
           <a:prstGeom prst="rect">
             <a:avLst/>
@@ -9072,76 +10037,76 @@
           <a:p>
             <a:pPr>
               <a:spcAft>
-                <a:spcPts val="684"/>
+                <a:spcPts val="724"/>
               </a:spcAft>
-              <a:defRPr sz="1700">
+              <a:defRPr sz="1800">
                 <a:solidFill>
                   <a:srgbClr val="111827"/>
                 </a:solidFill>
               </a:defRPr>
             </a:pPr>
             <a:r>
-              <a:t>Fail-closed chain — No fake Polygonscan links. Simulated only when tx isn't on-chain.</a:t>
+              <a:t>Buyer-confirmed invoices + delivery proof become finance-ready receivables</a:t>
             </a:r>
           </a:p>
           <a:p>
             <a:pPr>
               <a:spcAft>
-                <a:spcPts val="684"/>
+                <a:spcPts val="724"/>
               </a:spcAft>
-              <a:defRPr sz="1700">
+              <a:defRPr sz="1800">
                 <a:solidFill>
                   <a:srgbClr val="111827"/>
                 </a:solidFill>
               </a:defRPr>
             </a:pPr>
             <a:r>
-              <a:t>Real persistence — Postgres-backed workspaces — no canned seed data for judges.</a:t>
+              <a:t>Proof hashes anchored on Polygon — tamper-evident, documents stay off-chain</a:t>
             </a:r>
           </a:p>
           <a:p>
             <a:pPr>
               <a:spcAft>
-                <a:spcPts val="684"/>
+                <a:spcPts val="724"/>
               </a:spcAft>
-              <a:defRPr sz="1700">
+              <a:defRPr sz="1800">
                 <a:solidFill>
                   <a:srgbClr val="111827"/>
                 </a:solidFill>
               </a:defRPr>
             </a:pPr>
             <a:r>
-              <a:t>Role-separated LC — Verifier, dispute-resolver, pauser — not one key for every escrow.</a:t>
+              <a:t>Programmable Smart LC escrow: fund → verify delivery → release in stablecoin</a:t>
             </a:r>
           </a:p>
           <a:p>
             <a:pPr>
               <a:spcAft>
-                <a:spcPts val="684"/>
+                <a:spcPts val="724"/>
               </a:spcAft>
-              <a:defRPr sz="1700">
+              <a:defRPr sz="1800">
                 <a:solidFill>
                   <a:srgbClr val="111827"/>
                 </a:solidFill>
               </a:defRPr>
             </a:pPr>
             <a:r>
-              <a:t>Evidence-first — AIRG/SURGE discipline: cryptographic receipts, deterministic hashing.</a:t>
+              <a:t>Four workspaces (SME, Buyer, Financier, Admin) on one shared trust layer</a:t>
             </a:r>
           </a:p>
           <a:p>
             <a:pPr>
               <a:spcAft>
-                <a:spcPts val="684"/>
+                <a:spcPts val="724"/>
               </a:spcAft>
-              <a:defRPr sz="1700">
+              <a:defRPr sz="1800">
                 <a:solidFill>
                   <a:srgbClr val="111827"/>
                 </a:solidFill>
               </a:defRPr>
             </a:pPr>
             <a:r>
-              <a:t>Production path — Auth0, Didit KYB, Slither CI, Vercel deploy — shipped today.</a:t>
+              <a:t>Wedge: SME trade-finance slice of UAE corridor — not consumer remittance or POS</a:t>
             </a:r>
           </a:p>
         </p:txBody>
@@ -9202,7 +10167,7 @@
               </a:defRPr>
             </a:pPr>
             <a:r>
-              <a:t>ARCHITECTURE</a:t>
+              <a:t>HOW IT WORKS</a:t>
             </a:r>
           </a:p>
         </p:txBody>
@@ -9237,7 +10202,7 @@
               </a:defRPr>
             </a:pPr>
             <a:r>
-              <a:t>Monorepo: web · API · workers · contracts</a:t>
+              <a:t>End-to-end flow (~3 min Judge Mode)</a:t>
             </a:r>
           </a:p>
         </p:txBody>
@@ -9400,201 +10365,20 @@
       </p:sp>
       <p:sp>
         <p:nvSpPr>
-          <p:cNvPr id="8" name="TextBox 7"/>
-          <p:cNvSpPr txBox="1"/>
-          <p:nvPr/>
-        </p:nvSpPr>
-        <p:spPr>
-          <a:xfrm>
-            <a:off x="822960" y="1828800"/>
-            <a:ext cx="5029200" cy="4114800"/>
-          </a:xfrm>
-          <a:prstGeom prst="rect">
-            <a:avLst/>
-          </a:prstGeom>
-          <a:noFill/>
-        </p:spPr>
-        <p:txBody>
-          <a:bodyPr wrap="square">
-            <a:spAutoFit/>
-          </a:bodyPr>
-          <a:lstStyle/>
-          <a:p>
-            <a:pPr>
-              <a:spcAft>
-                <a:spcPts val="644"/>
-              </a:spcAft>
-              <a:defRPr sz="1600">
-                <a:solidFill>
-                  <a:srgbClr val="111827"/>
-                </a:solidFill>
-              </a:defRPr>
-            </a:pPr>
-            <a:r>
-              <a:t>apps/web — Next.js enterprise dashboard</a:t>
-            </a:r>
-          </a:p>
-          <a:p>
-            <a:pPr>
-              <a:spcAft>
-                <a:spcPts val="644"/>
-              </a:spcAft>
-              <a:defRPr sz="1600">
-                <a:solidFill>
-                  <a:srgbClr val="111827"/>
-                </a:solidFill>
-              </a:defRPr>
-            </a:pPr>
-            <a:r>
-              <a:t>apps/api — FastAPI, Postgres, JWT, Auth0</a:t>
-            </a:r>
-          </a:p>
-          <a:p>
-            <a:pPr>
-              <a:spcAft>
-                <a:spcPts val="644"/>
-              </a:spcAft>
-              <a:defRPr sz="1600">
-                <a:solidFill>
-                  <a:srgbClr val="111827"/>
-                </a:solidFill>
-              </a:defRPr>
-            </a:pPr>
-            <a:r>
-              <a:t>apps/workers — relayer, indexer, scoring</a:t>
-            </a:r>
-          </a:p>
-          <a:p>
-            <a:pPr>
-              <a:spcAft>
-                <a:spcPts val="644"/>
-              </a:spcAft>
-              <a:defRPr sz="1600">
-                <a:solidFill>
-                  <a:srgbClr val="111827"/>
-                </a:solidFill>
-              </a:defRPr>
-            </a:pPr>
-            <a:r>
-              <a:t>contracts — Solidity 0.8.28, Amoy / PoS-ready</a:t>
-            </a:r>
-          </a:p>
-        </p:txBody>
-      </p:sp>
-      <p:sp>
-        <p:nvSpPr>
-          <p:cNvPr id="9" name="TextBox 8"/>
-          <p:cNvSpPr txBox="1"/>
-          <p:nvPr/>
-        </p:nvSpPr>
-        <p:spPr>
-          <a:xfrm>
-            <a:off x="6217920" y="1828800"/>
-            <a:ext cx="5303520" cy="4114800"/>
-          </a:xfrm>
-          <a:prstGeom prst="rect">
-            <a:avLst/>
-          </a:prstGeom>
-          <a:noFill/>
-        </p:spPr>
-        <p:txBody>
-          <a:bodyPr wrap="square">
-            <a:spAutoFit/>
-          </a:bodyPr>
-          <a:lstStyle/>
-          <a:p>
-            <a:pPr>
-              <a:spcAft>
-                <a:spcPts val="644"/>
-              </a:spcAft>
-              <a:defRPr sz="1600">
-                <a:solidFill>
-                  <a:srgbClr val="111827"/>
-                </a:solidFill>
-              </a:defRPr>
-            </a:pPr>
-            <a:r>
-              <a:t>ProofRegistry — anchor proof hashes</a:t>
-            </a:r>
-          </a:p>
-          <a:p>
-            <a:pPr>
-              <a:spcAft>
-                <a:spcPts val="644"/>
-              </a:spcAft>
-              <a:defRPr sz="1600">
-                <a:solidFill>
-                  <a:srgbClr val="111827"/>
-                </a:solidFill>
-              </a:defRPr>
-            </a:pPr>
-            <a:r>
-              <a:t>ReceivableRegistry — finance-ready state</a:t>
-            </a:r>
-          </a:p>
-          <a:p>
-            <a:pPr>
-              <a:spcAft>
-                <a:spcPts val="644"/>
-              </a:spcAft>
-              <a:defRPr sz="1600">
-                <a:solidFill>
-                  <a:srgbClr val="111827"/>
-                </a:solidFill>
-              </a:defRPr>
-            </a:pPr>
-            <a:r>
-              <a:t>SmartLCFactory / SmartLC — escrow lifecycle</a:t>
-            </a:r>
-          </a:p>
-          <a:p>
-            <a:pPr>
-              <a:spcAft>
-                <a:spcPts val="644"/>
-              </a:spcAft>
-              <a:defRPr sz="1600">
-                <a:solidFill>
-                  <a:srgbClr val="111827"/>
-                </a:solidFill>
-              </a:defRPr>
-            </a:pPr>
-            <a:r>
-              <a:t>CreditScoreAttestation — trade credit on-chain</a:t>
-            </a:r>
-          </a:p>
-          <a:p>
-            <a:pPr>
-              <a:spcAft>
-                <a:spcPts val="644"/>
-              </a:spcAft>
-              <a:defRPr sz="1600">
-                <a:solidFill>
-                  <a:srgbClr val="111827"/>
-                </a:solidFill>
-              </a:defRPr>
-            </a:pPr>
-            <a:r>
-              <a:t>MockUSDC — demo settlement (IERC20-agnostic)</a:t>
-            </a:r>
-          </a:p>
-        </p:txBody>
-      </p:sp>
-      <p:sp>
-        <p:nvSpPr>
-          <p:cNvPr id="10" name="Rectangle 9"/>
+          <p:cNvPr id="8" name="Rounded Rectangle 7"/>
           <p:cNvSpPr/>
           <p:nvPr/>
         </p:nvSpPr>
         <p:spPr>
           <a:xfrm>
-            <a:off x="5943600" y="1691640"/>
-            <a:ext cx="45720" cy="4389120"/>
-          </a:xfrm>
-          <a:prstGeom prst="rect">
+            <a:off x="822960" y="1920240"/>
+            <a:ext cx="457200" cy="457200"/>
+          </a:xfrm>
+          <a:prstGeom prst="roundRect">
             <a:avLst/>
           </a:prstGeom>
           <a:solidFill>
-            <a:srgbClr val="E7EAF1"/>
+            <a:srgbClr val="2563EB"/>
           </a:solidFill>
           <a:ln>
             <a:noFill/>
@@ -9619,6 +10403,738 @@
           <a:lstStyle/>
           <a:p>
             <a:pPr algn="ctr"/>
+          </a:p>
+        </p:txBody>
+      </p:sp>
+      <p:sp>
+        <p:nvSpPr>
+          <p:cNvPr id="9" name="TextBox 8"/>
+          <p:cNvSpPr txBox="1"/>
+          <p:nvPr/>
+        </p:nvSpPr>
+        <p:spPr>
+          <a:xfrm>
+            <a:off x="822960" y="1975104"/>
+            <a:ext cx="457200" cy="365760"/>
+          </a:xfrm>
+          <a:prstGeom prst="rect">
+            <a:avLst/>
+          </a:prstGeom>
+          <a:noFill/>
+        </p:spPr>
+        <p:txBody>
+          <a:bodyPr wrap="square">
+            <a:spAutoFit/>
+          </a:bodyPr>
+          <a:lstStyle/>
+          <a:p>
+            <a:pPr algn="ctr">
+              <a:defRPr sz="1500" b="1">
+                <a:solidFill>
+                  <a:srgbClr val="FFFFFF"/>
+                </a:solidFill>
+              </a:defRPr>
+            </a:pPr>
+            <a:r>
+              <a:t>1</a:t>
+            </a:r>
+          </a:p>
+        </p:txBody>
+      </p:sp>
+      <p:sp>
+        <p:nvSpPr>
+          <p:cNvPr id="10" name="TextBox 9"/>
+          <p:cNvSpPr txBox="1"/>
+          <p:nvPr/>
+        </p:nvSpPr>
+        <p:spPr>
+          <a:xfrm>
+            <a:off x="1417320" y="1965960"/>
+            <a:ext cx="1828800" cy="320040"/>
+          </a:xfrm>
+          <a:prstGeom prst="rect">
+            <a:avLst/>
+          </a:prstGeom>
+          <a:noFill/>
+        </p:spPr>
+        <p:txBody>
+          <a:bodyPr wrap="square">
+            <a:spAutoFit/>
+          </a:bodyPr>
+          <a:lstStyle/>
+          <a:p>
+            <a:pPr algn="l">
+              <a:defRPr sz="1300" b="1">
+                <a:solidFill>
+                  <a:srgbClr val="2563EB"/>
+                </a:solidFill>
+              </a:defRPr>
+            </a:pPr>
+            <a:r>
+              <a:t>SME</a:t>
+            </a:r>
+          </a:p>
+        </p:txBody>
+      </p:sp>
+      <p:sp>
+        <p:nvSpPr>
+          <p:cNvPr id="11" name="TextBox 10"/>
+          <p:cNvSpPr txBox="1"/>
+          <p:nvPr/>
+        </p:nvSpPr>
+        <p:spPr>
+          <a:xfrm>
+            <a:off x="3291840" y="1938528"/>
+            <a:ext cx="8046720" cy="502920"/>
+          </a:xfrm>
+          <a:prstGeom prst="rect">
+            <a:avLst/>
+          </a:prstGeom>
+          <a:noFill/>
+        </p:spPr>
+        <p:txBody>
+          <a:bodyPr wrap="square">
+            <a:spAutoFit/>
+          </a:bodyPr>
+          <a:lstStyle/>
+          <a:p>
+            <a:pPr algn="l">
+              <a:defRPr sz="1600" b="0">
+                <a:solidFill>
+                  <a:srgbClr val="111827"/>
+                </a:solidFill>
+              </a:defRPr>
+            </a:pPr>
+            <a:r>
+              <a:t>Order → invoice → delivery proof</a:t>
+            </a:r>
+          </a:p>
+        </p:txBody>
+      </p:sp>
+      <p:sp>
+        <p:nvSpPr>
+          <p:cNvPr id="12" name="Rounded Rectangle 11"/>
+          <p:cNvSpPr/>
+          <p:nvPr/>
+        </p:nvSpPr>
+        <p:spPr>
+          <a:xfrm>
+            <a:off x="822960" y="2761488"/>
+            <a:ext cx="457200" cy="457200"/>
+          </a:xfrm>
+          <a:prstGeom prst="roundRect">
+            <a:avLst/>
+          </a:prstGeom>
+          <a:solidFill>
+            <a:srgbClr val="2563EB"/>
+          </a:solidFill>
+          <a:ln>
+            <a:noFill/>
+          </a:ln>
+        </p:spPr>
+        <p:style>
+          <a:lnRef idx="1">
+            <a:schemeClr val="accent1"/>
+          </a:lnRef>
+          <a:fillRef idx="3">
+            <a:schemeClr val="accent1"/>
+          </a:fillRef>
+          <a:effectRef idx="2">
+            <a:schemeClr val="accent1"/>
+          </a:effectRef>
+          <a:fontRef idx="minor">
+            <a:schemeClr val="lt1"/>
+          </a:fontRef>
+        </p:style>
+        <p:txBody>
+          <a:bodyPr rtlCol="0" anchor="ctr"/>
+          <a:lstStyle/>
+          <a:p>
+            <a:pPr algn="ctr"/>
+          </a:p>
+        </p:txBody>
+      </p:sp>
+      <p:sp>
+        <p:nvSpPr>
+          <p:cNvPr id="13" name="TextBox 12"/>
+          <p:cNvSpPr txBox="1"/>
+          <p:nvPr/>
+        </p:nvSpPr>
+        <p:spPr>
+          <a:xfrm>
+            <a:off x="822960" y="2816352"/>
+            <a:ext cx="457200" cy="365760"/>
+          </a:xfrm>
+          <a:prstGeom prst="rect">
+            <a:avLst/>
+          </a:prstGeom>
+          <a:noFill/>
+        </p:spPr>
+        <p:txBody>
+          <a:bodyPr wrap="square">
+            <a:spAutoFit/>
+          </a:bodyPr>
+          <a:lstStyle/>
+          <a:p>
+            <a:pPr algn="ctr">
+              <a:defRPr sz="1500" b="1">
+                <a:solidFill>
+                  <a:srgbClr val="FFFFFF"/>
+                </a:solidFill>
+              </a:defRPr>
+            </a:pPr>
+            <a:r>
+              <a:t>2</a:t>
+            </a:r>
+          </a:p>
+        </p:txBody>
+      </p:sp>
+      <p:sp>
+        <p:nvSpPr>
+          <p:cNvPr id="14" name="TextBox 13"/>
+          <p:cNvSpPr txBox="1"/>
+          <p:nvPr/>
+        </p:nvSpPr>
+        <p:spPr>
+          <a:xfrm>
+            <a:off x="1417320" y="2807208"/>
+            <a:ext cx="1828800" cy="320040"/>
+          </a:xfrm>
+          <a:prstGeom prst="rect">
+            <a:avLst/>
+          </a:prstGeom>
+          <a:noFill/>
+        </p:spPr>
+        <p:txBody>
+          <a:bodyPr wrap="square">
+            <a:spAutoFit/>
+          </a:bodyPr>
+          <a:lstStyle/>
+          <a:p>
+            <a:pPr algn="l">
+              <a:defRPr sz="1300" b="1">
+                <a:solidFill>
+                  <a:srgbClr val="2563EB"/>
+                </a:solidFill>
+              </a:defRPr>
+            </a:pPr>
+            <a:r>
+              <a:t>Buyer</a:t>
+            </a:r>
+          </a:p>
+        </p:txBody>
+      </p:sp>
+      <p:sp>
+        <p:nvSpPr>
+          <p:cNvPr id="15" name="TextBox 14"/>
+          <p:cNvSpPr txBox="1"/>
+          <p:nvPr/>
+        </p:nvSpPr>
+        <p:spPr>
+          <a:xfrm>
+            <a:off x="3291840" y="2779776"/>
+            <a:ext cx="8046720" cy="502920"/>
+          </a:xfrm>
+          <a:prstGeom prst="rect">
+            <a:avLst/>
+          </a:prstGeom>
+          <a:noFill/>
+        </p:spPr>
+        <p:txBody>
+          <a:bodyPr wrap="square">
+            <a:spAutoFit/>
+          </a:bodyPr>
+          <a:lstStyle/>
+          <a:p>
+            <a:pPr algn="l">
+              <a:defRPr sz="1600" b="0">
+                <a:solidFill>
+                  <a:srgbClr val="111827"/>
+                </a:solidFill>
+              </a:defRPr>
+            </a:pPr>
+            <a:r>
+              <a:t>Confirm trade obligation</a:t>
+            </a:r>
+          </a:p>
+        </p:txBody>
+      </p:sp>
+      <p:sp>
+        <p:nvSpPr>
+          <p:cNvPr id="16" name="Rounded Rectangle 15"/>
+          <p:cNvSpPr/>
+          <p:nvPr/>
+        </p:nvSpPr>
+        <p:spPr>
+          <a:xfrm>
+            <a:off x="822960" y="3602736"/>
+            <a:ext cx="457200" cy="457200"/>
+          </a:xfrm>
+          <a:prstGeom prst="roundRect">
+            <a:avLst/>
+          </a:prstGeom>
+          <a:solidFill>
+            <a:srgbClr val="2563EB"/>
+          </a:solidFill>
+          <a:ln>
+            <a:noFill/>
+          </a:ln>
+        </p:spPr>
+        <p:style>
+          <a:lnRef idx="1">
+            <a:schemeClr val="accent1"/>
+          </a:lnRef>
+          <a:fillRef idx="3">
+            <a:schemeClr val="accent1"/>
+          </a:fillRef>
+          <a:effectRef idx="2">
+            <a:schemeClr val="accent1"/>
+          </a:effectRef>
+          <a:fontRef idx="minor">
+            <a:schemeClr val="lt1"/>
+          </a:fontRef>
+        </p:style>
+        <p:txBody>
+          <a:bodyPr rtlCol="0" anchor="ctr"/>
+          <a:lstStyle/>
+          <a:p>
+            <a:pPr algn="ctr"/>
+          </a:p>
+        </p:txBody>
+      </p:sp>
+      <p:sp>
+        <p:nvSpPr>
+          <p:cNvPr id="17" name="TextBox 16"/>
+          <p:cNvSpPr txBox="1"/>
+          <p:nvPr/>
+        </p:nvSpPr>
+        <p:spPr>
+          <a:xfrm>
+            <a:off x="822960" y="3657600"/>
+            <a:ext cx="457200" cy="365760"/>
+          </a:xfrm>
+          <a:prstGeom prst="rect">
+            <a:avLst/>
+          </a:prstGeom>
+          <a:noFill/>
+        </p:spPr>
+        <p:txBody>
+          <a:bodyPr wrap="square">
+            <a:spAutoFit/>
+          </a:bodyPr>
+          <a:lstStyle/>
+          <a:p>
+            <a:pPr algn="ctr">
+              <a:defRPr sz="1500" b="1">
+                <a:solidFill>
+                  <a:srgbClr val="FFFFFF"/>
+                </a:solidFill>
+              </a:defRPr>
+            </a:pPr>
+            <a:r>
+              <a:t>3</a:t>
+            </a:r>
+          </a:p>
+        </p:txBody>
+      </p:sp>
+      <p:sp>
+        <p:nvSpPr>
+          <p:cNvPr id="18" name="TextBox 17"/>
+          <p:cNvSpPr txBox="1"/>
+          <p:nvPr/>
+        </p:nvSpPr>
+        <p:spPr>
+          <a:xfrm>
+            <a:off x="1417320" y="3648456"/>
+            <a:ext cx="1828800" cy="320040"/>
+          </a:xfrm>
+          <a:prstGeom prst="rect">
+            <a:avLst/>
+          </a:prstGeom>
+          <a:noFill/>
+        </p:spPr>
+        <p:txBody>
+          <a:bodyPr wrap="square">
+            <a:spAutoFit/>
+          </a:bodyPr>
+          <a:lstStyle/>
+          <a:p>
+            <a:pPr algn="l">
+              <a:defRPr sz="1300" b="1">
+                <a:solidFill>
+                  <a:srgbClr val="2563EB"/>
+                </a:solidFill>
+              </a:defRPr>
+            </a:pPr>
+            <a:r>
+              <a:t>SME</a:t>
+            </a:r>
+          </a:p>
+        </p:txBody>
+      </p:sp>
+      <p:sp>
+        <p:nvSpPr>
+          <p:cNvPr id="19" name="TextBox 18"/>
+          <p:cNvSpPr txBox="1"/>
+          <p:nvPr/>
+        </p:nvSpPr>
+        <p:spPr>
+          <a:xfrm>
+            <a:off x="3291840" y="3621024"/>
+            <a:ext cx="8046720" cy="502920"/>
+          </a:xfrm>
+          <a:prstGeom prst="rect">
+            <a:avLst/>
+          </a:prstGeom>
+          <a:noFill/>
+        </p:spPr>
+        <p:txBody>
+          <a:bodyPr wrap="square">
+            <a:spAutoFit/>
+          </a:bodyPr>
+          <a:lstStyle/>
+          <a:p>
+            <a:pPr algn="l">
+              <a:defRPr sz="1600" b="0">
+                <a:solidFill>
+                  <a:srgbClr val="111827"/>
+                </a:solidFill>
+              </a:defRPr>
+            </a:pPr>
+            <a:r>
+              <a:t>Create receivable · anchor proof on Polygon</a:t>
+            </a:r>
+          </a:p>
+        </p:txBody>
+      </p:sp>
+      <p:sp>
+        <p:nvSpPr>
+          <p:cNvPr id="20" name="Rounded Rectangle 19"/>
+          <p:cNvSpPr/>
+          <p:nvPr/>
+        </p:nvSpPr>
+        <p:spPr>
+          <a:xfrm>
+            <a:off x="822960" y="4443984"/>
+            <a:ext cx="457200" cy="457200"/>
+          </a:xfrm>
+          <a:prstGeom prst="roundRect">
+            <a:avLst/>
+          </a:prstGeom>
+          <a:solidFill>
+            <a:srgbClr val="2563EB"/>
+          </a:solidFill>
+          <a:ln>
+            <a:noFill/>
+          </a:ln>
+        </p:spPr>
+        <p:style>
+          <a:lnRef idx="1">
+            <a:schemeClr val="accent1"/>
+          </a:lnRef>
+          <a:fillRef idx="3">
+            <a:schemeClr val="accent1"/>
+          </a:fillRef>
+          <a:effectRef idx="2">
+            <a:schemeClr val="accent1"/>
+          </a:effectRef>
+          <a:fontRef idx="minor">
+            <a:schemeClr val="lt1"/>
+          </a:fontRef>
+        </p:style>
+        <p:txBody>
+          <a:bodyPr rtlCol="0" anchor="ctr"/>
+          <a:lstStyle/>
+          <a:p>
+            <a:pPr algn="ctr"/>
+          </a:p>
+        </p:txBody>
+      </p:sp>
+      <p:sp>
+        <p:nvSpPr>
+          <p:cNvPr id="21" name="TextBox 20"/>
+          <p:cNvSpPr txBox="1"/>
+          <p:nvPr/>
+        </p:nvSpPr>
+        <p:spPr>
+          <a:xfrm>
+            <a:off x="822960" y="4498848"/>
+            <a:ext cx="457200" cy="365760"/>
+          </a:xfrm>
+          <a:prstGeom prst="rect">
+            <a:avLst/>
+          </a:prstGeom>
+          <a:noFill/>
+        </p:spPr>
+        <p:txBody>
+          <a:bodyPr wrap="square">
+            <a:spAutoFit/>
+          </a:bodyPr>
+          <a:lstStyle/>
+          <a:p>
+            <a:pPr algn="ctr">
+              <a:defRPr sz="1500" b="1">
+                <a:solidFill>
+                  <a:srgbClr val="FFFFFF"/>
+                </a:solidFill>
+              </a:defRPr>
+            </a:pPr>
+            <a:r>
+              <a:t>4</a:t>
+            </a:r>
+          </a:p>
+        </p:txBody>
+      </p:sp>
+      <p:sp>
+        <p:nvSpPr>
+          <p:cNvPr id="22" name="TextBox 21"/>
+          <p:cNvSpPr txBox="1"/>
+          <p:nvPr/>
+        </p:nvSpPr>
+        <p:spPr>
+          <a:xfrm>
+            <a:off x="1417320" y="4489704"/>
+            <a:ext cx="1828800" cy="320040"/>
+          </a:xfrm>
+          <a:prstGeom prst="rect">
+            <a:avLst/>
+          </a:prstGeom>
+          <a:noFill/>
+        </p:spPr>
+        <p:txBody>
+          <a:bodyPr wrap="square">
+            <a:spAutoFit/>
+          </a:bodyPr>
+          <a:lstStyle/>
+          <a:p>
+            <a:pPr algn="l">
+              <a:defRPr sz="1300" b="1">
+                <a:solidFill>
+                  <a:srgbClr val="2563EB"/>
+                </a:solidFill>
+              </a:defRPr>
+            </a:pPr>
+            <a:r>
+              <a:t>Financier</a:t>
+            </a:r>
+          </a:p>
+        </p:txBody>
+      </p:sp>
+      <p:sp>
+        <p:nvSpPr>
+          <p:cNvPr id="23" name="TextBox 22"/>
+          <p:cNvSpPr txBox="1"/>
+          <p:nvPr/>
+        </p:nvSpPr>
+        <p:spPr>
+          <a:xfrm>
+            <a:off x="3291840" y="4462272"/>
+            <a:ext cx="8046720" cy="502920"/>
+          </a:xfrm>
+          <a:prstGeom prst="rect">
+            <a:avLst/>
+          </a:prstGeom>
+          <a:noFill/>
+        </p:spPr>
+        <p:txBody>
+          <a:bodyPr wrap="square">
+            <a:spAutoFit/>
+          </a:bodyPr>
+          <a:lstStyle/>
+          <a:p>
+            <a:pPr algn="l">
+              <a:defRPr sz="1600" b="0">
+                <a:solidFill>
+                  <a:srgbClr val="111827"/>
+                </a:solidFill>
+              </a:defRPr>
+            </a:pPr>
+            <a:r>
+              <a:t>Deal room review · fund Smart LC</a:t>
+            </a:r>
+          </a:p>
+        </p:txBody>
+      </p:sp>
+      <p:sp>
+        <p:nvSpPr>
+          <p:cNvPr id="24" name="Rounded Rectangle 23"/>
+          <p:cNvSpPr/>
+          <p:nvPr/>
+        </p:nvSpPr>
+        <p:spPr>
+          <a:xfrm>
+            <a:off x="822960" y="5285232"/>
+            <a:ext cx="457200" cy="457200"/>
+          </a:xfrm>
+          <a:prstGeom prst="roundRect">
+            <a:avLst/>
+          </a:prstGeom>
+          <a:solidFill>
+            <a:srgbClr val="2563EB"/>
+          </a:solidFill>
+          <a:ln>
+            <a:noFill/>
+          </a:ln>
+        </p:spPr>
+        <p:style>
+          <a:lnRef idx="1">
+            <a:schemeClr val="accent1"/>
+          </a:lnRef>
+          <a:fillRef idx="3">
+            <a:schemeClr val="accent1"/>
+          </a:fillRef>
+          <a:effectRef idx="2">
+            <a:schemeClr val="accent1"/>
+          </a:effectRef>
+          <a:fontRef idx="minor">
+            <a:schemeClr val="lt1"/>
+          </a:fontRef>
+        </p:style>
+        <p:txBody>
+          <a:bodyPr rtlCol="0" anchor="ctr"/>
+          <a:lstStyle/>
+          <a:p>
+            <a:pPr algn="ctr"/>
+          </a:p>
+        </p:txBody>
+      </p:sp>
+      <p:sp>
+        <p:nvSpPr>
+          <p:cNvPr id="25" name="TextBox 24"/>
+          <p:cNvSpPr txBox="1"/>
+          <p:nvPr/>
+        </p:nvSpPr>
+        <p:spPr>
+          <a:xfrm>
+            <a:off x="822960" y="5340096"/>
+            <a:ext cx="457200" cy="365760"/>
+          </a:xfrm>
+          <a:prstGeom prst="rect">
+            <a:avLst/>
+          </a:prstGeom>
+          <a:noFill/>
+        </p:spPr>
+        <p:txBody>
+          <a:bodyPr wrap="square">
+            <a:spAutoFit/>
+          </a:bodyPr>
+          <a:lstStyle/>
+          <a:p>
+            <a:pPr algn="ctr">
+              <a:defRPr sz="1500" b="1">
+                <a:solidFill>
+                  <a:srgbClr val="FFFFFF"/>
+                </a:solidFill>
+              </a:defRPr>
+            </a:pPr>
+            <a:r>
+              <a:t>5</a:t>
+            </a:r>
+          </a:p>
+        </p:txBody>
+      </p:sp>
+      <p:sp>
+        <p:nvSpPr>
+          <p:cNvPr id="26" name="TextBox 25"/>
+          <p:cNvSpPr txBox="1"/>
+          <p:nvPr/>
+        </p:nvSpPr>
+        <p:spPr>
+          <a:xfrm>
+            <a:off x="1417320" y="5330952"/>
+            <a:ext cx="1828800" cy="320040"/>
+          </a:xfrm>
+          <a:prstGeom prst="rect">
+            <a:avLst/>
+          </a:prstGeom>
+          <a:noFill/>
+        </p:spPr>
+        <p:txBody>
+          <a:bodyPr wrap="square">
+            <a:spAutoFit/>
+          </a:bodyPr>
+          <a:lstStyle/>
+          <a:p>
+            <a:pPr algn="l">
+              <a:defRPr sz="1300" b="1">
+                <a:solidFill>
+                  <a:srgbClr val="2563EB"/>
+                </a:solidFill>
+              </a:defRPr>
+            </a:pPr>
+            <a:r>
+              <a:t>System</a:t>
+            </a:r>
+          </a:p>
+        </p:txBody>
+      </p:sp>
+      <p:sp>
+        <p:nvSpPr>
+          <p:cNvPr id="27" name="TextBox 26"/>
+          <p:cNvSpPr txBox="1"/>
+          <p:nvPr/>
+        </p:nvSpPr>
+        <p:spPr>
+          <a:xfrm>
+            <a:off x="3291840" y="5303520"/>
+            <a:ext cx="8046720" cy="502920"/>
+          </a:xfrm>
+          <a:prstGeom prst="rect">
+            <a:avLst/>
+          </a:prstGeom>
+          <a:noFill/>
+        </p:spPr>
+        <p:txBody>
+          <a:bodyPr wrap="square">
+            <a:spAutoFit/>
+          </a:bodyPr>
+          <a:lstStyle/>
+          <a:p>
+            <a:pPr algn="l">
+              <a:defRPr sz="1600" b="0">
+                <a:solidFill>
+                  <a:srgbClr val="111827"/>
+                </a:solidFill>
+              </a:defRPr>
+            </a:pPr>
+            <a:r>
+              <a:t>Verify delivery · release settlement to seller</a:t>
+            </a:r>
+          </a:p>
+        </p:txBody>
+      </p:sp>
+      <p:sp>
+        <p:nvSpPr>
+          <p:cNvPr id="28" name="TextBox 27"/>
+          <p:cNvSpPr txBox="1"/>
+          <p:nvPr/>
+        </p:nvSpPr>
+        <p:spPr>
+          <a:xfrm>
+            <a:off x="822960" y="5943600"/>
+            <a:ext cx="10058400" cy="365760"/>
+          </a:xfrm>
+          <a:prstGeom prst="rect">
+            <a:avLst/>
+          </a:prstGeom>
+          <a:noFill/>
+        </p:spPr>
+        <p:txBody>
+          <a:bodyPr wrap="square">
+            <a:spAutoFit/>
+          </a:bodyPr>
+          <a:lstStyle/>
+          <a:p>
+            <a:pPr algn="l">
+              <a:defRPr sz="1200" b="0">
+                <a:solidFill>
+                  <a:srgbClr val="667085"/>
+                </a:solidFill>
+              </a:defRPr>
+            </a:pPr>
+            <a:r>
+              <a:t>Live: credara-jet.vercel.app/workspace</a:t>
+            </a:r>
           </a:p>
         </p:txBody>
       </p:sp>
@@ -9636,7 +11152,7 @@
     <p:bg>
       <p:bgPr>
         <a:solidFill>
-          <a:srgbClr val="F8FAFC"/>
+          <a:srgbClr val="FFFFFF"/>
         </a:solidFill>
         <a:effectLst/>
       </p:bgPr>
@@ -9656,8 +11172,8 @@
         </p:nvSpPr>
         <p:spPr>
           <a:xfrm>
-            <a:off x="822960" y="548640"/>
-            <a:ext cx="10058400" cy="365760"/>
+            <a:off x="640080" y="411480"/>
+            <a:ext cx="10515600" cy="457200"/>
           </a:xfrm>
           <a:prstGeom prst="rect">
             <a:avLst/>
@@ -9678,7 +11194,7 @@
               </a:defRPr>
             </a:pPr>
             <a:r>
-              <a:t>SETTLEMENT ROADMAP</a:t>
+              <a:t>WHY CREDARA</a:t>
             </a:r>
           </a:p>
         </p:txBody>
@@ -9691,8 +11207,8 @@
         </p:nvSpPr>
         <p:spPr>
           <a:xfrm>
-            <a:off x="822960" y="1005840"/>
-            <a:ext cx="10058400" cy="1280160"/>
+            <a:off x="640080" y="777240"/>
+            <a:ext cx="10515600" cy="1097280"/>
           </a:xfrm>
           <a:prstGeom prst="rect">
             <a:avLst/>
@@ -9706,102 +11222,58 @@
           <a:lstStyle/>
           <a:p>
             <a:pPr algn="l">
-              <a:defRPr sz="3000" b="1">
+              <a:defRPr sz="3200" b="1">
                 <a:solidFill>
                   <a:srgbClr val="111827"/>
                 </a:solidFill>
               </a:defRPr>
             </a:pPr>
             <a:r>
-              <a:t>Today: MockUSDC on Amoy.</a:t>
-            </a:r>
-            <a:br/>
-            <a:r>
-              <a:t>Tomorrow: regulated AED stablecoin — same Smart LC rails.</a:t>
-            </a:r>
-          </a:p>
-        </p:txBody>
-      </p:sp>
-      <p:sp>
-        <p:nvSpPr>
-          <p:cNvPr id="4" name="TextBox 3"/>
-          <p:cNvSpPr txBox="1"/>
-          <p:nvPr/>
-        </p:nvSpPr>
-        <p:spPr>
-          <a:xfrm>
-            <a:off x="822960" y="2743200"/>
-            <a:ext cx="10058400" cy="3200400"/>
-          </a:xfrm>
-          <a:prstGeom prst="rect">
-            <a:avLst/>
-          </a:prstGeom>
-          <a:noFill/>
-        </p:spPr>
-        <p:txBody>
-          <a:bodyPr wrap="square">
-            <a:spAutoFit/>
-          </a:bodyPr>
-          <a:lstStyle/>
-          <a:p>
-            <a:pPr>
-              <a:spcAft>
-                <a:spcPts val="684"/>
-              </a:spcAft>
-              <a:defRPr sz="1700">
-                <a:solidFill>
-                  <a:srgbClr val="111827"/>
-                </a:solidFill>
-              </a:defRPr>
-            </a:pPr>
-            <a:r>
-              <a:t>Demo proves create → fund → verify → release without claiming AED issuance</a:t>
-            </a:r>
-          </a:p>
-          <a:p>
-            <a:pPr>
-              <a:spcAft>
-                <a:spcPts val="684"/>
-              </a:spcAft>
-              <a:defRPr sz="1700">
-                <a:solidFill>
-                  <a:srgbClr val="111827"/>
-                </a:solidFill>
-              </a:defRPr>
-            </a:pPr>
-            <a:r>
-              <a:t>UAE CBUAE PTSR: regulated AED stablecoin partner — same Smart LC rails</a:t>
-            </a:r>
-          </a:p>
-          <a:p>
-            <a:pPr>
-              <a:spcAft>
-                <a:spcPts val="684"/>
-              </a:spcAft>
-              <a:defRPr sz="1700">
-                <a:solidFill>
-                  <a:srgbClr val="111827"/>
-                </a:solidFill>
-              </a:defRPr>
-            </a:pPr>
-            <a:r>
-              <a:t>Smart LC is token-agnostic — factory and proof conditions unchanged</a:t>
-            </a:r>
-          </a:p>
-          <a:p>
-            <a:pPr>
-              <a:spcAft>
-                <a:spcPts val="684"/>
-              </a:spcAft>
-              <a:defRPr sz="1700">
-                <a:solidFill>
-                  <a:srgbClr val="111827"/>
-                </a:solidFill>
-              </a:defRPr>
-            </a:pPr>
-            <a:r>
-              <a:t>Do say: settlement-ready · Don't say: we issue AED or we are remittance</a:t>
-            </a:r>
+              <a:t>Institutional-grade infrastructure, not a hash-on-chain demo</a:t>
+            </a:r>
+          </a:p>
+        </p:txBody>
+      </p:sp>
+      <p:sp>
+        <p:nvSpPr>
+          <p:cNvPr id="4" name="Rectangle 3"/>
+          <p:cNvSpPr/>
+          <p:nvPr/>
+        </p:nvSpPr>
+        <p:spPr>
+          <a:xfrm>
+            <a:off x="640080" y="1600200"/>
+            <a:ext cx="1097280" cy="54864"/>
+          </a:xfrm>
+          <a:prstGeom prst="rect">
+            <a:avLst/>
+          </a:prstGeom>
+          <a:solidFill>
+            <a:srgbClr val="2563EB"/>
+          </a:solidFill>
+          <a:ln>
+            <a:noFill/>
+          </a:ln>
+        </p:spPr>
+        <p:style>
+          <a:lnRef idx="1">
+            <a:schemeClr val="accent1"/>
+          </a:lnRef>
+          <a:fillRef idx="3">
+            <a:schemeClr val="accent1"/>
+          </a:fillRef>
+          <a:effectRef idx="2">
+            <a:schemeClr val="accent1"/>
+          </a:effectRef>
+          <a:fontRef idx="minor">
+            <a:schemeClr val="lt1"/>
+          </a:fontRef>
+        </p:style>
+        <p:txBody>
+          <a:bodyPr rtlCol="0" anchor="ctr"/>
+          <a:lstStyle/>
+          <a:p>
+            <a:pPr algn="ctr"/>
           </a:p>
         </p:txBody>
       </p:sp>
@@ -9914,6 +11386,104 @@
             </a:pPr>
             <a:r>
               <a:t>credara-jet.vercel.app</a:t>
+            </a:r>
+          </a:p>
+        </p:txBody>
+      </p:sp>
+      <p:sp>
+        <p:nvSpPr>
+          <p:cNvPr id="8" name="TextBox 7"/>
+          <p:cNvSpPr txBox="1"/>
+          <p:nvPr/>
+        </p:nvSpPr>
+        <p:spPr>
+          <a:xfrm>
+            <a:off x="822960" y="2011680"/>
+            <a:ext cx="10515600" cy="4389120"/>
+          </a:xfrm>
+          <a:prstGeom prst="rect">
+            <a:avLst/>
+          </a:prstGeom>
+          <a:noFill/>
+        </p:spPr>
+        <p:txBody>
+          <a:bodyPr wrap="square">
+            <a:spAutoFit/>
+          </a:bodyPr>
+          <a:lstStyle/>
+          <a:p>
+            <a:pPr>
+              <a:spcAft>
+                <a:spcPts val="684"/>
+              </a:spcAft>
+              <a:defRPr sz="1700">
+                <a:solidFill>
+                  <a:srgbClr val="111827"/>
+                </a:solidFill>
+              </a:defRPr>
+            </a:pPr>
+            <a:r>
+              <a:t>Fail-closed chain — No fake Polygonscan links. Simulated only when tx isn't on-chain.</a:t>
+            </a:r>
+          </a:p>
+          <a:p>
+            <a:pPr>
+              <a:spcAft>
+                <a:spcPts val="684"/>
+              </a:spcAft>
+              <a:defRPr sz="1700">
+                <a:solidFill>
+                  <a:srgbClr val="111827"/>
+                </a:solidFill>
+              </a:defRPr>
+            </a:pPr>
+            <a:r>
+              <a:t>Real persistence — Postgres-backed workspaces — no canned seed data for judges.</a:t>
+            </a:r>
+          </a:p>
+          <a:p>
+            <a:pPr>
+              <a:spcAft>
+                <a:spcPts val="684"/>
+              </a:spcAft>
+              <a:defRPr sz="1700">
+                <a:solidFill>
+                  <a:srgbClr val="111827"/>
+                </a:solidFill>
+              </a:defRPr>
+            </a:pPr>
+            <a:r>
+              <a:t>Role-separated LC — Verifier, dispute-resolver, pauser — not one key for every escrow.</a:t>
+            </a:r>
+          </a:p>
+          <a:p>
+            <a:pPr>
+              <a:spcAft>
+                <a:spcPts val="684"/>
+              </a:spcAft>
+              <a:defRPr sz="1700">
+                <a:solidFill>
+                  <a:srgbClr val="111827"/>
+                </a:solidFill>
+              </a:defRPr>
+            </a:pPr>
+            <a:r>
+              <a:t>Evidence-first — AIRG/SURGE discipline: cryptographic receipts, deterministic hashing.</a:t>
+            </a:r>
+          </a:p>
+          <a:p>
+            <a:pPr>
+              <a:spcAft>
+                <a:spcPts val="684"/>
+              </a:spcAft>
+              <a:defRPr sz="1700">
+                <a:solidFill>
+                  <a:srgbClr val="111827"/>
+                </a:solidFill>
+              </a:defRPr>
+            </a:pPr>
+            <a:r>
+              <a:t>Production path — Auth0, Didit KYB, Slither CI, Vercel deploy — shipped today.</a:t>
             </a:r>
           </a:p>
         </p:txBody>
